--- a/assets/lecture_slides/SAS1_intro_to_sas.pptx
+++ b/assets/lecture_slides/SAS1_intro_to_sas.pptx
@@ -5,7 +5,7 @@
     <p:sldMasterId id="2147483744" r:id="rId1"/>
   </p:sldMasterIdLst>
   <p:notesMasterIdLst>
-    <p:notesMasterId r:id="rId76"/>
+    <p:notesMasterId r:id="rId62"/>
   </p:notesMasterIdLst>
   <p:sldIdLst>
     <p:sldId id="257" r:id="rId2"/>
@@ -68,20 +68,6 @@
     <p:sldId id="321" r:id="rId59"/>
     <p:sldId id="341" r:id="rId60"/>
     <p:sldId id="342" r:id="rId61"/>
-    <p:sldId id="323" r:id="rId62"/>
-    <p:sldId id="322" r:id="rId63"/>
-    <p:sldId id="324" r:id="rId64"/>
-    <p:sldId id="325" r:id="rId65"/>
-    <p:sldId id="326" r:id="rId66"/>
-    <p:sldId id="327" r:id="rId67"/>
-    <p:sldId id="328" r:id="rId68"/>
-    <p:sldId id="329" r:id="rId69"/>
-    <p:sldId id="330" r:id="rId70"/>
-    <p:sldId id="331" r:id="rId71"/>
-    <p:sldId id="332" r:id="rId72"/>
-    <p:sldId id="333" r:id="rId73"/>
-    <p:sldId id="334" r:id="rId74"/>
-    <p:sldId id="335" r:id="rId75"/>
   </p:sldIdLst>
   <p:sldSz cx="12192000" cy="6858000"/>
   <p:notesSz cx="6858000" cy="9144000"/>
@@ -188,20 +174,12 @@
 </p:presentation>
 </file>
 
-<file path=ppt/revisionInfo.xml><?xml version="1.0" encoding="utf-8"?>
-<p1510:revInfo xmlns:a="http://schemas.openxmlformats.org/drawingml/2006/main" xmlns:r="http://schemas.openxmlformats.org/officeDocument/2006/relationships" xmlns:p1510="http://schemas.microsoft.com/office/powerpoint/2015/10/main">
-  <p1510:revLst>
-    <p1510:client id="{C5A9166A-37A8-D744-8A1E-A8EEB546AFAE}" v="41" dt="2025-08-26T17:59:22.190"/>
-  </p1510:revLst>
-</p1510:revInfo>
-</file>
-
 <file path=ppt/changesInfos/changesInfo1.xml><?xml version="1.0" encoding="utf-8"?>
 <pc:chgInfo xmlns:a="http://schemas.openxmlformats.org/drawingml/2006/main" xmlns:r="http://schemas.openxmlformats.org/officeDocument/2006/relationships" xmlns:ac="http://schemas.microsoft.com/office/drawing/2013/main/command" xmlns:pc="http://schemas.microsoft.com/office/powerpoint/2013/main/command">
   <pc:docChgLst>
     <pc:chgData name="Kaitlyn Fitzgerald" userId="5f80a7dc-562f-4413-9d6e-37134f387a9f" providerId="ADAL" clId="{FC2319E2-36D7-52E6-A55A-33E60E1F0DB6}"/>
     <pc:docChg chg="undo custSel addSld delSld modSld sldOrd">
-      <pc:chgData name="Kaitlyn Fitzgerald" userId="5f80a7dc-562f-4413-9d6e-37134f387a9f" providerId="ADAL" clId="{FC2319E2-36D7-52E6-A55A-33E60E1F0DB6}" dt="2025-08-26T21:12:33.177" v="620" actId="20577"/>
+      <pc:chgData name="Kaitlyn Fitzgerald" userId="5f80a7dc-562f-4413-9d6e-37134f387a9f" providerId="ADAL" clId="{FC2319E2-36D7-52E6-A55A-33E60E1F0DB6}" dt="2025-08-27T21:42:28.349" v="634" actId="2696"/>
       <pc:docMkLst>
         <pc:docMk/>
       </pc:docMkLst>
@@ -565,20 +543,19 @@
           </ac:spMkLst>
         </pc:spChg>
       </pc:sldChg>
-      <pc:sldChg chg="modSp mod">
-        <pc:chgData name="Kaitlyn Fitzgerald" userId="5f80a7dc-562f-4413-9d6e-37134f387a9f" providerId="ADAL" clId="{FC2319E2-36D7-52E6-A55A-33E60E1F0DB6}" dt="2025-08-26T18:00:28.817" v="462" actId="20577"/>
+      <pc:sldChg chg="del">
+        <pc:chgData name="Kaitlyn Fitzgerald" userId="5f80a7dc-562f-4413-9d6e-37134f387a9f" providerId="ADAL" clId="{FC2319E2-36D7-52E6-A55A-33E60E1F0DB6}" dt="2025-08-27T21:42:28.321" v="625" actId="2696"/>
+        <pc:sldMkLst>
+          <pc:docMk/>
+          <pc:sldMk cId="3716777212" sldId="322"/>
+        </pc:sldMkLst>
+      </pc:sldChg>
+      <pc:sldChg chg="modSp del mod">
+        <pc:chgData name="Kaitlyn Fitzgerald" userId="5f80a7dc-562f-4413-9d6e-37134f387a9f" providerId="ADAL" clId="{FC2319E2-36D7-52E6-A55A-33E60E1F0DB6}" dt="2025-08-27T21:42:28.300" v="621" actId="2696"/>
         <pc:sldMkLst>
           <pc:docMk/>
           <pc:sldMk cId="1397274695" sldId="323"/>
         </pc:sldMkLst>
-        <pc:spChg chg="mod">
-          <ac:chgData name="Kaitlyn Fitzgerald" userId="5f80a7dc-562f-4413-9d6e-37134f387a9f" providerId="ADAL" clId="{FC2319E2-36D7-52E6-A55A-33E60E1F0DB6}" dt="2025-08-21T19:06:54.836" v="27"/>
-          <ac:spMkLst>
-            <pc:docMk/>
-            <pc:sldMk cId="1397274695" sldId="323"/>
-            <ac:spMk id="2" creationId="{0A31C982-480E-49DB-B79B-1DC3D9A9CECF}"/>
-          </ac:spMkLst>
-        </pc:spChg>
         <pc:spChg chg="mod">
           <ac:chgData name="Kaitlyn Fitzgerald" userId="5f80a7dc-562f-4413-9d6e-37134f387a9f" providerId="ADAL" clId="{FC2319E2-36D7-52E6-A55A-33E60E1F0DB6}" dt="2025-08-26T18:00:13.945" v="436" actId="20577"/>
           <ac:spMkLst>
@@ -620,134 +597,89 @@
           </ac:cxnSpMkLst>
         </pc:cxnChg>
       </pc:sldChg>
-      <pc:sldChg chg="modSp">
-        <pc:chgData name="Kaitlyn Fitzgerald" userId="5f80a7dc-562f-4413-9d6e-37134f387a9f" providerId="ADAL" clId="{FC2319E2-36D7-52E6-A55A-33E60E1F0DB6}" dt="2025-08-21T19:06:54.836" v="27"/>
+      <pc:sldChg chg="del">
+        <pc:chgData name="Kaitlyn Fitzgerald" userId="5f80a7dc-562f-4413-9d6e-37134f387a9f" providerId="ADAL" clId="{FC2319E2-36D7-52E6-A55A-33E60E1F0DB6}" dt="2025-08-27T21:42:28.306" v="624" actId="2696"/>
+        <pc:sldMkLst>
+          <pc:docMk/>
+          <pc:sldMk cId="2451382011" sldId="324"/>
+        </pc:sldMkLst>
+      </pc:sldChg>
+      <pc:sldChg chg="modSp del">
+        <pc:chgData name="Kaitlyn Fitzgerald" userId="5f80a7dc-562f-4413-9d6e-37134f387a9f" providerId="ADAL" clId="{FC2319E2-36D7-52E6-A55A-33E60E1F0DB6}" dt="2025-08-27T21:42:28.335" v="628" actId="2696"/>
         <pc:sldMkLst>
           <pc:docMk/>
           <pc:sldMk cId="4190073491" sldId="325"/>
         </pc:sldMkLst>
-        <pc:spChg chg="mod">
-          <ac:chgData name="Kaitlyn Fitzgerald" userId="5f80a7dc-562f-4413-9d6e-37134f387a9f" providerId="ADAL" clId="{FC2319E2-36D7-52E6-A55A-33E60E1F0DB6}" dt="2025-08-21T19:06:54.836" v="27"/>
-          <ac:spMkLst>
-            <pc:docMk/>
-            <pc:sldMk cId="4190073491" sldId="325"/>
-            <ac:spMk id="2" creationId="{75365ECF-BE3C-4F9D-9AAE-0A74B7F23673}"/>
-          </ac:spMkLst>
-        </pc:spChg>
       </pc:sldChg>
-      <pc:sldChg chg="modSp">
-        <pc:chgData name="Kaitlyn Fitzgerald" userId="5f80a7dc-562f-4413-9d6e-37134f387a9f" providerId="ADAL" clId="{FC2319E2-36D7-52E6-A55A-33E60E1F0DB6}" dt="2025-08-21T19:06:54.836" v="27"/>
+      <pc:sldChg chg="modSp del">
+        <pc:chgData name="Kaitlyn Fitzgerald" userId="5f80a7dc-562f-4413-9d6e-37134f387a9f" providerId="ADAL" clId="{FC2319E2-36D7-52E6-A55A-33E60E1F0DB6}" dt="2025-08-27T21:42:28.339" v="630" actId="2696"/>
         <pc:sldMkLst>
           <pc:docMk/>
           <pc:sldMk cId="2309926911" sldId="326"/>
         </pc:sldMkLst>
-        <pc:spChg chg="mod">
-          <ac:chgData name="Kaitlyn Fitzgerald" userId="5f80a7dc-562f-4413-9d6e-37134f387a9f" providerId="ADAL" clId="{FC2319E2-36D7-52E6-A55A-33E60E1F0DB6}" dt="2025-08-21T19:06:54.836" v="27"/>
-          <ac:spMkLst>
-            <pc:docMk/>
-            <pc:sldMk cId="2309926911" sldId="326"/>
-            <ac:spMk id="2" creationId="{75365ECF-BE3C-4F9D-9AAE-0A74B7F23673}"/>
-          </ac:spMkLst>
-        </pc:spChg>
       </pc:sldChg>
-      <pc:sldChg chg="modSp">
-        <pc:chgData name="Kaitlyn Fitzgerald" userId="5f80a7dc-562f-4413-9d6e-37134f387a9f" providerId="ADAL" clId="{FC2319E2-36D7-52E6-A55A-33E60E1F0DB6}" dt="2025-08-21T19:06:54.836" v="27"/>
+      <pc:sldChg chg="modSp del">
+        <pc:chgData name="Kaitlyn Fitzgerald" userId="5f80a7dc-562f-4413-9d6e-37134f387a9f" providerId="ADAL" clId="{FC2319E2-36D7-52E6-A55A-33E60E1F0DB6}" dt="2025-08-27T21:42:28.304" v="623" actId="2696"/>
         <pc:sldMkLst>
           <pc:docMk/>
           <pc:sldMk cId="1877044937" sldId="327"/>
         </pc:sldMkLst>
-        <pc:spChg chg="mod">
-          <ac:chgData name="Kaitlyn Fitzgerald" userId="5f80a7dc-562f-4413-9d6e-37134f387a9f" providerId="ADAL" clId="{FC2319E2-36D7-52E6-A55A-33E60E1F0DB6}" dt="2025-08-21T19:06:54.836" v="27"/>
-          <ac:spMkLst>
-            <pc:docMk/>
-            <pc:sldMk cId="1877044937" sldId="327"/>
-            <ac:spMk id="2" creationId="{75365ECF-BE3C-4F9D-9AAE-0A74B7F23673}"/>
-          </ac:spMkLst>
-        </pc:spChg>
       </pc:sldChg>
-      <pc:sldChg chg="modSp">
-        <pc:chgData name="Kaitlyn Fitzgerald" userId="5f80a7dc-562f-4413-9d6e-37134f387a9f" providerId="ADAL" clId="{FC2319E2-36D7-52E6-A55A-33E60E1F0DB6}" dt="2025-08-21T19:06:54.836" v="27"/>
+      <pc:sldChg chg="del">
+        <pc:chgData name="Kaitlyn Fitzgerald" userId="5f80a7dc-562f-4413-9d6e-37134f387a9f" providerId="ADAL" clId="{FC2319E2-36D7-52E6-A55A-33E60E1F0DB6}" dt="2025-08-27T21:42:28.344" v="631" actId="2696"/>
+        <pc:sldMkLst>
+          <pc:docMk/>
+          <pc:sldMk cId="106555921" sldId="328"/>
+        </pc:sldMkLst>
+      </pc:sldChg>
+      <pc:sldChg chg="modSp del">
+        <pc:chgData name="Kaitlyn Fitzgerald" userId="5f80a7dc-562f-4413-9d6e-37134f387a9f" providerId="ADAL" clId="{FC2319E2-36D7-52E6-A55A-33E60E1F0DB6}" dt="2025-08-27T21:42:28.349" v="634" actId="2696"/>
         <pc:sldMkLst>
           <pc:docMk/>
           <pc:sldMk cId="3506893750" sldId="329"/>
         </pc:sldMkLst>
-        <pc:spChg chg="mod">
-          <ac:chgData name="Kaitlyn Fitzgerald" userId="5f80a7dc-562f-4413-9d6e-37134f387a9f" providerId="ADAL" clId="{FC2319E2-36D7-52E6-A55A-33E60E1F0DB6}" dt="2025-08-21T19:06:54.836" v="27"/>
-          <ac:spMkLst>
-            <pc:docMk/>
-            <pc:sldMk cId="3506893750" sldId="329"/>
-            <ac:spMk id="2" creationId="{E0AC3147-A150-41D3-980F-1FE2613D7FBD}"/>
-          </ac:spMkLst>
-        </pc:spChg>
       </pc:sldChg>
-      <pc:sldChg chg="modSp">
-        <pc:chgData name="Kaitlyn Fitzgerald" userId="5f80a7dc-562f-4413-9d6e-37134f387a9f" providerId="ADAL" clId="{FC2319E2-36D7-52E6-A55A-33E60E1F0DB6}" dt="2025-08-21T19:06:54.836" v="27"/>
+      <pc:sldChg chg="modSp del">
+        <pc:chgData name="Kaitlyn Fitzgerald" userId="5f80a7dc-562f-4413-9d6e-37134f387a9f" providerId="ADAL" clId="{FC2319E2-36D7-52E6-A55A-33E60E1F0DB6}" dt="2025-08-27T21:42:28.344" v="632" actId="2696"/>
         <pc:sldMkLst>
           <pc:docMk/>
           <pc:sldMk cId="1446279482" sldId="330"/>
         </pc:sldMkLst>
-        <pc:spChg chg="mod">
-          <ac:chgData name="Kaitlyn Fitzgerald" userId="5f80a7dc-562f-4413-9d6e-37134f387a9f" providerId="ADAL" clId="{FC2319E2-36D7-52E6-A55A-33E60E1F0DB6}" dt="2025-08-21T19:06:54.836" v="27"/>
-          <ac:spMkLst>
-            <pc:docMk/>
-            <pc:sldMk cId="1446279482" sldId="330"/>
-            <ac:spMk id="2" creationId="{F97D7E0D-CE79-4CAF-B9E4-C414A4EA0EA8}"/>
-          </ac:spMkLst>
-        </pc:spChg>
-        <pc:spChg chg="mod">
-          <ac:chgData name="Kaitlyn Fitzgerald" userId="5f80a7dc-562f-4413-9d6e-37134f387a9f" providerId="ADAL" clId="{FC2319E2-36D7-52E6-A55A-33E60E1F0DB6}" dt="2025-08-21T19:06:54.836" v="27"/>
-          <ac:spMkLst>
-            <pc:docMk/>
-            <pc:sldMk cId="1446279482" sldId="330"/>
-            <ac:spMk id="3" creationId="{4C29615D-FB77-4D3B-BBBA-A6FA7D647320}"/>
-          </ac:spMkLst>
-        </pc:spChg>
       </pc:sldChg>
-      <pc:sldChg chg="modSp">
-        <pc:chgData name="Kaitlyn Fitzgerald" userId="5f80a7dc-562f-4413-9d6e-37134f387a9f" providerId="ADAL" clId="{FC2319E2-36D7-52E6-A55A-33E60E1F0DB6}" dt="2025-08-21T19:06:54.836" v="27"/>
+      <pc:sldChg chg="modSp del">
+        <pc:chgData name="Kaitlyn Fitzgerald" userId="5f80a7dc-562f-4413-9d6e-37134f387a9f" providerId="ADAL" clId="{FC2319E2-36D7-52E6-A55A-33E60E1F0DB6}" dt="2025-08-27T21:42:28.302" v="622" actId="2696"/>
         <pc:sldMkLst>
           <pc:docMk/>
           <pc:sldMk cId="2057441664" sldId="331"/>
         </pc:sldMkLst>
-        <pc:spChg chg="mod">
-          <ac:chgData name="Kaitlyn Fitzgerald" userId="5f80a7dc-562f-4413-9d6e-37134f387a9f" providerId="ADAL" clId="{FC2319E2-36D7-52E6-A55A-33E60E1F0DB6}" dt="2025-08-21T19:06:54.836" v="27"/>
-          <ac:spMkLst>
-            <pc:docMk/>
-            <pc:sldMk cId="2057441664" sldId="331"/>
-            <ac:spMk id="2" creationId="{988631CA-8901-4CB5-B7CE-6F3DE5D16DC5}"/>
-          </ac:spMkLst>
-        </pc:spChg>
-        <pc:spChg chg="mod">
-          <ac:chgData name="Kaitlyn Fitzgerald" userId="5f80a7dc-562f-4413-9d6e-37134f387a9f" providerId="ADAL" clId="{FC2319E2-36D7-52E6-A55A-33E60E1F0DB6}" dt="2025-08-21T19:06:54.836" v="27"/>
-          <ac:spMkLst>
-            <pc:docMk/>
-            <pc:sldMk cId="2057441664" sldId="331"/>
-            <ac:spMk id="3" creationId="{5E082F13-90AA-4676-8142-2B41161C6B1E}"/>
-          </ac:spMkLst>
-        </pc:spChg>
       </pc:sldChg>
-      <pc:sldChg chg="modSp">
-        <pc:chgData name="Kaitlyn Fitzgerald" userId="5f80a7dc-562f-4413-9d6e-37134f387a9f" providerId="ADAL" clId="{FC2319E2-36D7-52E6-A55A-33E60E1F0DB6}" dt="2025-08-21T19:06:54.836" v="27"/>
+      <pc:sldChg chg="del">
+        <pc:chgData name="Kaitlyn Fitzgerald" userId="5f80a7dc-562f-4413-9d6e-37134f387a9f" providerId="ADAL" clId="{FC2319E2-36D7-52E6-A55A-33E60E1F0DB6}" dt="2025-08-27T21:42:28.336" v="629" actId="2696"/>
+        <pc:sldMkLst>
+          <pc:docMk/>
+          <pc:sldMk cId="190571764" sldId="332"/>
+        </pc:sldMkLst>
+      </pc:sldChg>
+      <pc:sldChg chg="del">
+        <pc:chgData name="Kaitlyn Fitzgerald" userId="5f80a7dc-562f-4413-9d6e-37134f387a9f" providerId="ADAL" clId="{FC2319E2-36D7-52E6-A55A-33E60E1F0DB6}" dt="2025-08-27T21:42:28.322" v="626" actId="2696"/>
+        <pc:sldMkLst>
+          <pc:docMk/>
+          <pc:sldMk cId="3475638571" sldId="333"/>
+        </pc:sldMkLst>
+      </pc:sldChg>
+      <pc:sldChg chg="modSp del">
+        <pc:chgData name="Kaitlyn Fitzgerald" userId="5f80a7dc-562f-4413-9d6e-37134f387a9f" providerId="ADAL" clId="{FC2319E2-36D7-52E6-A55A-33E60E1F0DB6}" dt="2025-08-27T21:42:28.345" v="633" actId="2696"/>
         <pc:sldMkLst>
           <pc:docMk/>
           <pc:sldMk cId="1686000079" sldId="334"/>
         </pc:sldMkLst>
-        <pc:spChg chg="mod">
-          <ac:chgData name="Kaitlyn Fitzgerald" userId="5f80a7dc-562f-4413-9d6e-37134f387a9f" providerId="ADAL" clId="{FC2319E2-36D7-52E6-A55A-33E60E1F0DB6}" dt="2025-08-21T19:06:54.836" v="27"/>
-          <ac:spMkLst>
-            <pc:docMk/>
-            <pc:sldMk cId="1686000079" sldId="334"/>
-            <ac:spMk id="2" creationId="{55E7B279-FD4F-49F7-8297-272A11ED4F6E}"/>
-          </ac:spMkLst>
-        </pc:spChg>
-        <pc:spChg chg="mod">
-          <ac:chgData name="Kaitlyn Fitzgerald" userId="5f80a7dc-562f-4413-9d6e-37134f387a9f" providerId="ADAL" clId="{FC2319E2-36D7-52E6-A55A-33E60E1F0DB6}" dt="2025-08-21T19:06:54.836" v="27"/>
-          <ac:spMkLst>
-            <pc:docMk/>
-            <pc:sldMk cId="1686000079" sldId="334"/>
-            <ac:spMk id="3" creationId="{EA2BDD2E-4BC0-4CA5-AEA1-32B5FDD181D1}"/>
-          </ac:spMkLst>
-        </pc:spChg>
+      </pc:sldChg>
+      <pc:sldChg chg="del">
+        <pc:chgData name="Kaitlyn Fitzgerald" userId="5f80a7dc-562f-4413-9d6e-37134f387a9f" providerId="ADAL" clId="{FC2319E2-36D7-52E6-A55A-33E60E1F0DB6}" dt="2025-08-27T21:42:28.323" v="627" actId="2696"/>
+        <pc:sldMkLst>
+          <pc:docMk/>
+          <pc:sldMk cId="3933304321" sldId="335"/>
+        </pc:sldMkLst>
       </pc:sldChg>
       <pc:sldChg chg="mod modShow">
         <pc:chgData name="Kaitlyn Fitzgerald" userId="5f80a7dc-562f-4413-9d6e-37134f387a9f" providerId="ADAL" clId="{FC2319E2-36D7-52E6-A55A-33E60E1F0DB6}" dt="2025-08-26T17:03:06.706" v="32" actId="729"/>
@@ -1443,7 +1375,7 @@
           <a:p>
             <a:fld id="{674E18CB-9F38-1143-972A-0CA96454FA4B}" type="datetimeFigureOut">
               <a:rPr lang="en-US" smtClean="0"/>
-              <a:t>8/26/25</a:t>
+              <a:t>8/27/25</a:t>
             </a:fld>
             <a:endParaRPr lang="en-US"/>
           </a:p>
@@ -4826,7 +4758,7 @@
             <a:fld id="{B61BEF0D-F0BB-DE4B-95CE-6DB70DBA9567}" type="datetimeFigureOut">
               <a:rPr lang="en-US" smtClean="0"/>
               <a:pPr/>
-              <a:t>8/26/25</a:t>
+              <a:t>8/27/25</a:t>
             </a:fld>
             <a:endParaRPr lang="en-US" dirty="0"/>
           </a:p>
@@ -5162,7 +5094,7 @@
             <a:fld id="{B61BEF0D-F0BB-DE4B-95CE-6DB70DBA9567}" type="datetimeFigureOut">
               <a:rPr lang="en-US" smtClean="0"/>
               <a:pPr/>
-              <a:t>8/26/25</a:t>
+              <a:t>8/27/25</a:t>
             </a:fld>
             <a:endParaRPr lang="en-US" dirty="0"/>
           </a:p>
@@ -5442,7 +5374,7 @@
             <a:fld id="{B61BEF0D-F0BB-DE4B-95CE-6DB70DBA9567}" type="datetimeFigureOut">
               <a:rPr lang="en-US" smtClean="0"/>
               <a:pPr/>
-              <a:t>8/26/25</a:t>
+              <a:t>8/27/25</a:t>
             </a:fld>
             <a:endParaRPr lang="en-US" dirty="0"/>
           </a:p>
@@ -6012,7 +5944,7 @@
             <a:fld id="{B61BEF0D-F0BB-DE4B-95CE-6DB70DBA9567}" type="datetimeFigureOut">
               <a:rPr lang="en-US" smtClean="0"/>
               <a:pPr/>
-              <a:t>8/26/25</a:t>
+              <a:t>8/27/25</a:t>
             </a:fld>
             <a:endParaRPr lang="en-US" dirty="0"/>
           </a:p>
@@ -6292,7 +6224,7 @@
             <a:fld id="{B61BEF0D-F0BB-DE4B-95CE-6DB70DBA9567}" type="datetimeFigureOut">
               <a:rPr lang="en-US" smtClean="0"/>
               <a:pPr/>
-              <a:t>8/26/25</a:t>
+              <a:t>8/27/25</a:t>
             </a:fld>
             <a:endParaRPr lang="en-US" dirty="0"/>
           </a:p>
@@ -6856,7 +6788,7 @@
             <a:fld id="{B61BEF0D-F0BB-DE4B-95CE-6DB70DBA9567}" type="datetimeFigureOut">
               <a:rPr lang="en-US" smtClean="0"/>
               <a:pPr/>
-              <a:t>8/26/25</a:t>
+              <a:t>8/27/25</a:t>
             </a:fld>
             <a:endParaRPr lang="en-US" dirty="0"/>
           </a:p>
@@ -7185,7 +7117,7 @@
             <a:fld id="{B61BEF0D-F0BB-DE4B-95CE-6DB70DBA9567}" type="datetimeFigureOut">
               <a:rPr lang="en-US" smtClean="0"/>
               <a:pPr/>
-              <a:t>8/26/25</a:t>
+              <a:t>8/27/25</a:t>
             </a:fld>
             <a:endParaRPr lang="en-US" dirty="0"/>
           </a:p>
@@ -7364,7 +7296,7 @@
             <a:fld id="{B61BEF0D-F0BB-DE4B-95CE-6DB70DBA9567}" type="datetimeFigureOut">
               <a:rPr lang="en-US" smtClean="0"/>
               <a:pPr/>
-              <a:t>8/26/25</a:t>
+              <a:t>8/27/25</a:t>
             </a:fld>
             <a:endParaRPr lang="en-US" dirty="0"/>
           </a:p>
@@ -7604,7 +7536,7 @@
             <a:fld id="{B61BEF0D-F0BB-DE4B-95CE-6DB70DBA9567}" type="datetimeFigureOut">
               <a:rPr lang="en-US" smtClean="0"/>
               <a:pPr/>
-              <a:t>8/26/25</a:t>
+              <a:t>8/27/25</a:t>
             </a:fld>
             <a:endParaRPr lang="en-US" dirty="0"/>
           </a:p>
@@ -7806,7 +7738,7 @@
             <a:fld id="{B61BEF0D-F0BB-DE4B-95CE-6DB70DBA9567}" type="datetimeFigureOut">
               <a:rPr lang="en-US" smtClean="0"/>
               <a:pPr/>
-              <a:t>8/26/25</a:t>
+              <a:t>8/27/25</a:t>
             </a:fld>
             <a:endParaRPr lang="en-US" dirty="0"/>
           </a:p>
@@ -8084,7 +8016,7 @@
             <a:fld id="{B61BEF0D-F0BB-DE4B-95CE-6DB70DBA9567}" type="datetimeFigureOut">
               <a:rPr lang="en-US" smtClean="0"/>
               <a:pPr/>
-              <a:t>8/26/25</a:t>
+              <a:t>8/27/25</a:t>
             </a:fld>
             <a:endParaRPr lang="en-US" dirty="0"/>
           </a:p>
@@ -8352,7 +8284,7 @@
             <a:fld id="{B61BEF0D-F0BB-DE4B-95CE-6DB70DBA9567}" type="datetimeFigureOut">
               <a:rPr lang="en-US" smtClean="0"/>
               <a:pPr/>
-              <a:t>8/26/25</a:t>
+              <a:t>8/27/25</a:t>
             </a:fld>
             <a:endParaRPr lang="en-US" dirty="0"/>
           </a:p>
@@ -8728,7 +8660,7 @@
             <a:fld id="{B61BEF0D-F0BB-DE4B-95CE-6DB70DBA9567}" type="datetimeFigureOut">
               <a:rPr lang="en-US" smtClean="0"/>
               <a:pPr/>
-              <a:t>8/26/25</a:t>
+              <a:t>8/27/25</a:t>
             </a:fld>
             <a:endParaRPr lang="en-US" dirty="0"/>
           </a:p>
@@ -8878,7 +8810,7 @@
             <a:fld id="{B61BEF0D-F0BB-DE4B-95CE-6DB70DBA9567}" type="datetimeFigureOut">
               <a:rPr lang="en-US" smtClean="0"/>
               <a:pPr/>
-              <a:t>8/26/25</a:t>
+              <a:t>8/27/25</a:t>
             </a:fld>
             <a:endParaRPr lang="en-US" dirty="0"/>
           </a:p>
@@ -9005,7 +8937,7 @@
             <a:fld id="{B61BEF0D-F0BB-DE4B-95CE-6DB70DBA9567}" type="datetimeFigureOut">
               <a:rPr lang="en-US" smtClean="0"/>
               <a:pPr/>
-              <a:t>8/26/25</a:t>
+              <a:t>8/27/25</a:t>
             </a:fld>
             <a:endParaRPr lang="en-US" dirty="0"/>
           </a:p>
@@ -9292,7 +9224,7 @@
             <a:fld id="{B61BEF0D-F0BB-DE4B-95CE-6DB70DBA9567}" type="datetimeFigureOut">
               <a:rPr lang="en-US" smtClean="0"/>
               <a:pPr/>
-              <a:t>8/26/25</a:t>
+              <a:t>8/27/25</a:t>
             </a:fld>
             <a:endParaRPr lang="en-US" dirty="0"/>
           </a:p>
@@ -9618,7 +9550,7 @@
             <a:fld id="{B61BEF0D-F0BB-DE4B-95CE-6DB70DBA9567}" type="datetimeFigureOut">
               <a:rPr lang="en-US" smtClean="0"/>
               <a:pPr/>
-              <a:t>8/26/25</a:t>
+              <a:t>8/27/25</a:t>
             </a:fld>
             <a:endParaRPr lang="en-US" dirty="0"/>
           </a:p>
@@ -9834,7 +9766,7 @@
             <a:fld id="{B61BEF0D-F0BB-DE4B-95CE-6DB70DBA9567}" type="datetimeFigureOut">
               <a:rPr lang="en-US" smtClean="0"/>
               <a:pPr/>
-              <a:t>8/26/25</a:t>
+              <a:t>8/27/25</a:t>
             </a:fld>
             <a:endParaRPr lang="en-US" dirty="0"/>
           </a:p>
@@ -36560,4210 +36492,6 @@
 </p:sld>
 </file>
 
-<file path=ppt/slides/slide61.xml><?xml version="1.0" encoding="utf-8"?>
-<p:sld xmlns:a="http://schemas.openxmlformats.org/drawingml/2006/main" xmlns:r="http://schemas.openxmlformats.org/officeDocument/2006/relationships" xmlns:p="http://schemas.openxmlformats.org/presentationml/2006/main">
-  <p:cSld>
-    <p:spTree>
-      <p:nvGrpSpPr>
-        <p:cNvPr id="1" name=""/>
-        <p:cNvGrpSpPr/>
-        <p:nvPr/>
-      </p:nvGrpSpPr>
-      <p:grpSpPr>
-        <a:xfrm>
-          <a:off x="0" y="0"/>
-          <a:ext cx="0" cy="0"/>
-          <a:chOff x="0" y="0"/>
-          <a:chExt cx="0" cy="0"/>
-        </a:xfrm>
-      </p:grpSpPr>
-      <p:sp>
-        <p:nvSpPr>
-          <p:cNvPr id="2" name="Title 1">
-            <a:extLst>
-              <a:ext uri="{FF2B5EF4-FFF2-40B4-BE49-F238E27FC236}">
-                <a16:creationId xmlns:a16="http://schemas.microsoft.com/office/drawing/2014/main" id="{0A31C982-480E-49DB-B79B-1DC3D9A9CECF}"/>
-              </a:ext>
-            </a:extLst>
-          </p:cNvPr>
-          <p:cNvSpPr>
-            <a:spLocks noGrp="1"/>
-          </p:cNvSpPr>
-          <p:nvPr>
-            <p:ph type="title"/>
-          </p:nvPr>
-        </p:nvSpPr>
-        <p:spPr/>
-        <p:txBody>
-          <a:bodyPr/>
-          <a:lstStyle/>
-          <a:p>
-            <a:r>
-              <a:rPr lang="en-US" dirty="0"/>
-              <a:t>Loading an Excel file with </a:t>
-            </a:r>
-            <a:r>
-              <a:rPr lang="en-US" dirty="0" err="1"/>
-              <a:t>libname</a:t>
-            </a:r>
-            <a:endParaRPr lang="en-US" dirty="0"/>
-          </a:p>
-        </p:txBody>
-      </p:sp>
-      <p:sp>
-        <p:nvSpPr>
-          <p:cNvPr id="3" name="Content Placeholder 2">
-            <a:extLst>
-              <a:ext uri="{FF2B5EF4-FFF2-40B4-BE49-F238E27FC236}">
-                <a16:creationId xmlns:a16="http://schemas.microsoft.com/office/drawing/2014/main" id="{06849EC4-D454-45C6-8E1B-497DDE4E2B66}"/>
-              </a:ext>
-            </a:extLst>
-          </p:cNvPr>
-          <p:cNvSpPr>
-            <a:spLocks noGrp="1"/>
-          </p:cNvSpPr>
-          <p:nvPr>
-            <p:ph idx="1"/>
-          </p:nvPr>
-        </p:nvSpPr>
-        <p:spPr>
-          <a:xfrm>
-            <a:off x="602024" y="1456500"/>
-            <a:ext cx="11589976" cy="3649133"/>
-          </a:xfrm>
-        </p:spPr>
-        <p:txBody>
-          <a:bodyPr>
-            <a:normAutofit/>
-          </a:bodyPr>
-          <a:lstStyle/>
-          <a:p>
-            <a:pPr marL="0" indent="0">
-              <a:buNone/>
-            </a:pPr>
-            <a:r>
-              <a:rPr lang="en-US" sz="1800" dirty="0" err="1">
-                <a:latin typeface="Courier New" panose="02070309020205020404" pitchFamily="49" charset="0"/>
-                <a:cs typeface="Courier New" panose="02070309020205020404" pitchFamily="49" charset="0"/>
-              </a:rPr>
-              <a:t>libname</a:t>
-            </a:r>
-            <a:r>
-              <a:rPr lang="en-US" sz="1800" dirty="0">
-                <a:latin typeface="Courier New" panose="02070309020205020404" pitchFamily="49" charset="0"/>
-                <a:cs typeface="Courier New" panose="02070309020205020404" pitchFamily="49" charset="0"/>
-              </a:rPr>
-              <a:t> </a:t>
-            </a:r>
-            <a:r>
-              <a:rPr lang="en-US" dirty="0" err="1">
-                <a:latin typeface="Courier New" panose="02070309020205020404" pitchFamily="49" charset="0"/>
-                <a:cs typeface="Courier New" panose="02070309020205020404" pitchFamily="49" charset="0"/>
-              </a:rPr>
-              <a:t>datahome</a:t>
-            </a:r>
-            <a:r>
-              <a:rPr lang="en-US" sz="1800" dirty="0">
-                <a:latin typeface="Courier New" panose="02070309020205020404" pitchFamily="49" charset="0"/>
-                <a:cs typeface="Courier New" panose="02070309020205020404" pitchFamily="49" charset="0"/>
-              </a:rPr>
-              <a:t> xlsx </a:t>
-            </a:r>
-            <a:r>
-              <a:rPr lang="en-US" dirty="0">
-                <a:latin typeface="Courier New" panose="02070309020205020404" pitchFamily="49" charset="0"/>
-                <a:cs typeface="Courier New" panose="02070309020205020404" pitchFamily="49" charset="0"/>
-              </a:rPr>
-              <a:t>'/home/u64289425/sasuser.v94/STAT 7500 F25/data/</a:t>
-            </a:r>
-            <a:r>
-              <a:rPr lang="en-US" sz="1800" dirty="0">
-                <a:latin typeface="Courier New" panose="02070309020205020404" pitchFamily="49" charset="0"/>
-                <a:cs typeface="Courier New" panose="02070309020205020404" pitchFamily="49" charset="0"/>
-              </a:rPr>
-              <a:t>data1.xlsx';</a:t>
-            </a:r>
-          </a:p>
-          <a:p>
-            <a:pPr marL="0" indent="0">
-              <a:buNone/>
-            </a:pPr>
-            <a:endParaRPr lang="en-US" sz="1800" dirty="0">
-              <a:latin typeface="Courier New" panose="02070309020205020404" pitchFamily="49" charset="0"/>
-              <a:cs typeface="Courier New" panose="02070309020205020404" pitchFamily="49" charset="0"/>
-            </a:endParaRPr>
-          </a:p>
-          <a:p>
-            <a:pPr marL="0" indent="0">
-              <a:buNone/>
-            </a:pPr>
-            <a:r>
-              <a:rPr lang="en-US" sz="1800" dirty="0">
-                <a:latin typeface="Courier New" panose="02070309020205020404" pitchFamily="49" charset="0"/>
-                <a:cs typeface="Courier New" panose="02070309020205020404" pitchFamily="49" charset="0"/>
-              </a:rPr>
-              <a:t>proc print data=datahome.sheet1;</a:t>
-            </a:r>
-          </a:p>
-          <a:p>
-            <a:pPr marL="0" indent="0">
-              <a:buNone/>
-            </a:pPr>
-            <a:r>
-              <a:rPr lang="en-US" sz="1800" dirty="0">
-                <a:latin typeface="Courier New" panose="02070309020205020404" pitchFamily="49" charset="0"/>
-                <a:cs typeface="Courier New" panose="02070309020205020404" pitchFamily="49" charset="0"/>
-              </a:rPr>
-              <a:t>run;</a:t>
-            </a:r>
-          </a:p>
-          <a:p>
-            <a:pPr marL="0" indent="0">
-              <a:buNone/>
-            </a:pPr>
-            <a:endParaRPr lang="en-US" dirty="0"/>
-          </a:p>
-        </p:txBody>
-      </p:sp>
-      <p:pic>
-        <p:nvPicPr>
-          <p:cNvPr id="5" name="Picture 4">
-            <a:extLst>
-              <a:ext uri="{FF2B5EF4-FFF2-40B4-BE49-F238E27FC236}">
-                <a16:creationId xmlns:a16="http://schemas.microsoft.com/office/drawing/2014/main" id="{B9F02D91-BC58-4CAE-ABE5-480F92B8424D}"/>
-              </a:ext>
-            </a:extLst>
-          </p:cNvPr>
-          <p:cNvPicPr>
-            <a:picLocks noChangeAspect="1"/>
-          </p:cNvPicPr>
-          <p:nvPr/>
-        </p:nvPicPr>
-        <p:blipFill>
-          <a:blip r:embed="rId2"/>
-          <a:stretch>
-            <a:fillRect/>
-          </a:stretch>
-        </p:blipFill>
-        <p:spPr>
-          <a:xfrm>
-            <a:off x="3480019" y="4294552"/>
-            <a:ext cx="4004146" cy="2033567"/>
-          </a:xfrm>
-          <a:prstGeom prst="rect">
-            <a:avLst/>
-          </a:prstGeom>
-        </p:spPr>
-      </p:pic>
-      <p:sp>
-        <p:nvSpPr>
-          <p:cNvPr id="6" name="Oval 5">
-            <a:extLst>
-              <a:ext uri="{FF2B5EF4-FFF2-40B4-BE49-F238E27FC236}">
-                <a16:creationId xmlns:a16="http://schemas.microsoft.com/office/drawing/2014/main" id="{0A204D0C-AAB1-477B-96FB-2718B18FBF82}"/>
-              </a:ext>
-            </a:extLst>
-          </p:cNvPr>
-          <p:cNvSpPr/>
-          <p:nvPr/>
-        </p:nvSpPr>
-        <p:spPr>
-          <a:xfrm>
-            <a:off x="2749421" y="2223020"/>
-            <a:ext cx="1261871" cy="484119"/>
-          </a:xfrm>
-          <a:prstGeom prst="ellipse">
-            <a:avLst/>
-          </a:prstGeom>
-          <a:noFill/>
-          <a:ln>
-            <a:solidFill>
-              <a:srgbClr val="FF0000"/>
-            </a:solidFill>
-          </a:ln>
-        </p:spPr>
-        <p:style>
-          <a:lnRef idx="2">
-            <a:schemeClr val="accent1">
-              <a:shade val="50000"/>
-            </a:schemeClr>
-          </a:lnRef>
-          <a:fillRef idx="1">
-            <a:schemeClr val="accent1"/>
-          </a:fillRef>
-          <a:effectRef idx="0">
-            <a:schemeClr val="accent1"/>
-          </a:effectRef>
-          <a:fontRef idx="minor">
-            <a:schemeClr val="lt1"/>
-          </a:fontRef>
-        </p:style>
-        <p:txBody>
-          <a:bodyPr rtlCol="0" anchor="ctr"/>
-          <a:lstStyle/>
-          <a:p>
-            <a:pPr algn="ctr"/>
-            <a:endParaRPr lang="en-US"/>
-          </a:p>
-        </p:txBody>
-      </p:sp>
-      <p:cxnSp>
-        <p:nvCxnSpPr>
-          <p:cNvPr id="7" name="Straight Arrow Connector 6">
-            <a:extLst>
-              <a:ext uri="{FF2B5EF4-FFF2-40B4-BE49-F238E27FC236}">
-                <a16:creationId xmlns:a16="http://schemas.microsoft.com/office/drawing/2014/main" id="{944FA779-A29C-4B1D-ABE6-64C11B1F7049}"/>
-              </a:ext>
-            </a:extLst>
-          </p:cNvPr>
-          <p:cNvCxnSpPr>
-            <a:cxnSpLocks/>
-          </p:cNvCxnSpPr>
-          <p:nvPr/>
-        </p:nvCxnSpPr>
-        <p:spPr>
-          <a:xfrm>
-            <a:off x="4011292" y="2527538"/>
-            <a:ext cx="4718304" cy="450522"/>
-          </a:xfrm>
-          <a:prstGeom prst="straightConnector1">
-            <a:avLst/>
-          </a:prstGeom>
-          <a:ln w="38100">
-            <a:solidFill>
-              <a:srgbClr val="FF0000"/>
-            </a:solidFill>
-            <a:tailEnd type="triangle"/>
-          </a:ln>
-        </p:spPr>
-        <p:style>
-          <a:lnRef idx="1">
-            <a:schemeClr val="accent1"/>
-          </a:lnRef>
-          <a:fillRef idx="0">
-            <a:schemeClr val="accent1"/>
-          </a:fillRef>
-          <a:effectRef idx="0">
-            <a:schemeClr val="accent1"/>
-          </a:effectRef>
-          <a:fontRef idx="minor">
-            <a:schemeClr val="tx1"/>
-          </a:fontRef>
-        </p:style>
-      </p:cxnSp>
-      <p:sp>
-        <p:nvSpPr>
-          <p:cNvPr id="8" name="TextBox 7">
-            <a:extLst>
-              <a:ext uri="{FF2B5EF4-FFF2-40B4-BE49-F238E27FC236}">
-                <a16:creationId xmlns:a16="http://schemas.microsoft.com/office/drawing/2014/main" id="{7C2DE55F-22E5-421F-9776-D954F198D9DE}"/>
-              </a:ext>
-            </a:extLst>
-          </p:cNvPr>
-          <p:cNvSpPr txBox="1"/>
-          <p:nvPr/>
-        </p:nvSpPr>
-        <p:spPr>
-          <a:xfrm>
-            <a:off x="8955156" y="2652553"/>
-            <a:ext cx="2753139" cy="1754326"/>
-          </a:xfrm>
-          <a:prstGeom prst="rect">
-            <a:avLst/>
-          </a:prstGeom>
-          <a:noFill/>
-        </p:spPr>
-        <p:txBody>
-          <a:bodyPr wrap="square" rtlCol="0">
-            <a:spAutoFit/>
-          </a:bodyPr>
-          <a:lstStyle/>
-          <a:p>
-            <a:r>
-              <a:rPr lang="en-US" dirty="0"/>
-              <a:t>xlsx is the file extension for modern Excel files; note that modern excel files contain potentially multiple sheets with their own names</a:t>
-            </a:r>
-          </a:p>
-        </p:txBody>
-      </p:sp>
-      <p:sp>
-        <p:nvSpPr>
-          <p:cNvPr id="9" name="Oval 8">
-            <a:extLst>
-              <a:ext uri="{FF2B5EF4-FFF2-40B4-BE49-F238E27FC236}">
-                <a16:creationId xmlns:a16="http://schemas.microsoft.com/office/drawing/2014/main" id="{C8A03E41-E490-4BF6-9367-3AAE2F61BAB1}"/>
-              </a:ext>
-            </a:extLst>
-          </p:cNvPr>
-          <p:cNvSpPr/>
-          <p:nvPr/>
-        </p:nvSpPr>
-        <p:spPr>
-          <a:xfrm>
-            <a:off x="2749420" y="3030941"/>
-            <a:ext cx="2424463" cy="484119"/>
-          </a:xfrm>
-          <a:prstGeom prst="ellipse">
-            <a:avLst/>
-          </a:prstGeom>
-          <a:noFill/>
-          <a:ln>
-            <a:solidFill>
-              <a:srgbClr val="FF0000"/>
-            </a:solidFill>
-          </a:ln>
-        </p:spPr>
-        <p:style>
-          <a:lnRef idx="2">
-            <a:schemeClr val="accent1">
-              <a:shade val="50000"/>
-            </a:schemeClr>
-          </a:lnRef>
-          <a:fillRef idx="1">
-            <a:schemeClr val="accent1"/>
-          </a:fillRef>
-          <a:effectRef idx="0">
-            <a:schemeClr val="accent1"/>
-          </a:effectRef>
-          <a:fontRef idx="minor">
-            <a:schemeClr val="lt1"/>
-          </a:fontRef>
-        </p:style>
-        <p:txBody>
-          <a:bodyPr rtlCol="0" anchor="ctr"/>
-          <a:lstStyle/>
-          <a:p>
-            <a:pPr algn="ctr"/>
-            <a:endParaRPr lang="en-US"/>
-          </a:p>
-        </p:txBody>
-      </p:sp>
-      <p:cxnSp>
-        <p:nvCxnSpPr>
-          <p:cNvPr id="10" name="Straight Arrow Connector 9">
-            <a:extLst>
-              <a:ext uri="{FF2B5EF4-FFF2-40B4-BE49-F238E27FC236}">
-                <a16:creationId xmlns:a16="http://schemas.microsoft.com/office/drawing/2014/main" id="{9B7DB8DC-29B3-4D84-9D95-E3EC150922C4}"/>
-              </a:ext>
-            </a:extLst>
-          </p:cNvPr>
-          <p:cNvCxnSpPr>
-            <a:cxnSpLocks/>
-          </p:cNvCxnSpPr>
-          <p:nvPr/>
-        </p:nvCxnSpPr>
-        <p:spPr>
-          <a:xfrm>
-            <a:off x="5058754" y="3281067"/>
-            <a:ext cx="3727437" cy="1390324"/>
-          </a:xfrm>
-          <a:prstGeom prst="straightConnector1">
-            <a:avLst/>
-          </a:prstGeom>
-          <a:ln w="38100">
-            <a:solidFill>
-              <a:srgbClr val="FF0000"/>
-            </a:solidFill>
-            <a:tailEnd type="triangle"/>
-          </a:ln>
-        </p:spPr>
-        <p:style>
-          <a:lnRef idx="1">
-            <a:schemeClr val="accent1"/>
-          </a:lnRef>
-          <a:fillRef idx="0">
-            <a:schemeClr val="accent1"/>
-          </a:fillRef>
-          <a:effectRef idx="0">
-            <a:schemeClr val="accent1"/>
-          </a:effectRef>
-          <a:fontRef idx="minor">
-            <a:schemeClr val="tx1"/>
-          </a:fontRef>
-        </p:style>
-      </p:cxnSp>
-      <p:sp>
-        <p:nvSpPr>
-          <p:cNvPr id="13" name="TextBox 12">
-            <a:extLst>
-              <a:ext uri="{FF2B5EF4-FFF2-40B4-BE49-F238E27FC236}">
-                <a16:creationId xmlns:a16="http://schemas.microsoft.com/office/drawing/2014/main" id="{626738F1-13E8-4369-B8ED-459668844557}"/>
-              </a:ext>
-            </a:extLst>
-          </p:cNvPr>
-          <p:cNvSpPr txBox="1"/>
-          <p:nvPr/>
-        </p:nvSpPr>
-        <p:spPr>
-          <a:xfrm>
-            <a:off x="8955156" y="4621696"/>
-            <a:ext cx="2941983" cy="2308324"/>
-          </a:xfrm>
-          <a:prstGeom prst="rect">
-            <a:avLst/>
-          </a:prstGeom>
-          <a:noFill/>
-        </p:spPr>
-        <p:txBody>
-          <a:bodyPr wrap="square" rtlCol="0">
-            <a:spAutoFit/>
-          </a:bodyPr>
-          <a:lstStyle/>
-          <a:p>
-            <a:r>
-              <a:rPr lang="en-US" dirty="0"/>
-              <a:t>Why datahome.sheet1? </a:t>
-            </a:r>
-          </a:p>
-          <a:p>
-            <a:pPr marL="285750" indent="-285750">
-              <a:buFont typeface="Arial" panose="020B0604020202020204" pitchFamily="34" charset="0"/>
-              <a:buChar char="•"/>
-            </a:pPr>
-            <a:r>
-              <a:rPr lang="en-US" dirty="0"/>
-              <a:t>“</a:t>
-            </a:r>
-            <a:r>
-              <a:rPr lang="en-US" dirty="0" err="1"/>
-              <a:t>datahome</a:t>
-            </a:r>
-            <a:r>
-              <a:rPr lang="en-US" dirty="0"/>
-              <a:t>” because that is the </a:t>
-            </a:r>
-            <a:r>
-              <a:rPr lang="en-US" dirty="0" err="1"/>
-              <a:t>libname</a:t>
-            </a:r>
-            <a:r>
-              <a:rPr lang="en-US" dirty="0"/>
-              <a:t> I chose </a:t>
-            </a:r>
-          </a:p>
-          <a:p>
-            <a:pPr marL="285750" indent="-285750">
-              <a:buFont typeface="Arial" panose="020B0604020202020204" pitchFamily="34" charset="0"/>
-              <a:buChar char="•"/>
-            </a:pPr>
-            <a:r>
-              <a:rPr lang="en-US" dirty="0"/>
-              <a:t>sheet1 because that was the name of the sheet in the data1 Excel file (you can always look in the library in SAS to check)</a:t>
-            </a:r>
-          </a:p>
-        </p:txBody>
-      </p:sp>
-    </p:spTree>
-    <p:extLst>
-      <p:ext uri="{BB962C8B-B14F-4D97-AF65-F5344CB8AC3E}">
-        <p14:creationId xmlns:p14="http://schemas.microsoft.com/office/powerpoint/2010/main" val="1397274695"/>
-      </p:ext>
-    </p:extLst>
-  </p:cSld>
-  <p:clrMapOvr>
-    <a:masterClrMapping/>
-  </p:clrMapOvr>
-</p:sld>
-</file>
-
-<file path=ppt/slides/slide62.xml><?xml version="1.0" encoding="utf-8"?>
-<p:sld xmlns:a="http://schemas.openxmlformats.org/drawingml/2006/main" xmlns:r="http://schemas.openxmlformats.org/officeDocument/2006/relationships" xmlns:p="http://schemas.openxmlformats.org/presentationml/2006/main">
-  <p:cSld>
-    <p:spTree>
-      <p:nvGrpSpPr>
-        <p:cNvPr id="1" name=""/>
-        <p:cNvGrpSpPr/>
-        <p:nvPr/>
-      </p:nvGrpSpPr>
-      <p:grpSpPr>
-        <a:xfrm>
-          <a:off x="0" y="0"/>
-          <a:ext cx="0" cy="0"/>
-          <a:chOff x="0" y="0"/>
-          <a:chExt cx="0" cy="0"/>
-        </a:xfrm>
-      </p:grpSpPr>
-      <p:sp>
-        <p:nvSpPr>
-          <p:cNvPr id="2" name="Title 1">
-            <a:extLst>
-              <a:ext uri="{FF2B5EF4-FFF2-40B4-BE49-F238E27FC236}">
-                <a16:creationId xmlns:a16="http://schemas.microsoft.com/office/drawing/2014/main" id="{75365ECF-BE3C-4F9D-9AAE-0A74B7F23673}"/>
-              </a:ext>
-            </a:extLst>
-          </p:cNvPr>
-          <p:cNvSpPr>
-            <a:spLocks noGrp="1"/>
-          </p:cNvSpPr>
-          <p:nvPr>
-            <p:ph type="title"/>
-          </p:nvPr>
-        </p:nvSpPr>
-        <p:spPr>
-          <a:xfrm>
-            <a:off x="685801" y="346286"/>
-            <a:ext cx="10131425" cy="1456267"/>
-          </a:xfrm>
-        </p:spPr>
-        <p:txBody>
-          <a:bodyPr/>
-          <a:lstStyle/>
-          <a:p>
-            <a:r>
-              <a:rPr lang="en-US" dirty="0"/>
-              <a:t>Entering/Loading Data Option 3: Proc import</a:t>
-            </a:r>
-          </a:p>
-        </p:txBody>
-      </p:sp>
-      <p:sp>
-        <p:nvSpPr>
-          <p:cNvPr id="3" name="Content Placeholder 2">
-            <a:extLst>
-              <a:ext uri="{FF2B5EF4-FFF2-40B4-BE49-F238E27FC236}">
-                <a16:creationId xmlns:a16="http://schemas.microsoft.com/office/drawing/2014/main" id="{5E28B520-55D4-47A5-9AA8-3FF58AB5C0D8}"/>
-              </a:ext>
-            </a:extLst>
-          </p:cNvPr>
-          <p:cNvSpPr>
-            <a:spLocks noGrp="1"/>
-          </p:cNvSpPr>
-          <p:nvPr>
-            <p:ph idx="1"/>
-          </p:nvPr>
-        </p:nvSpPr>
-        <p:spPr>
-          <a:xfrm>
-            <a:off x="685801" y="1778169"/>
-            <a:ext cx="11686031" cy="4470231"/>
-          </a:xfrm>
-        </p:spPr>
-        <p:txBody>
-          <a:bodyPr>
-            <a:normAutofit/>
-          </a:bodyPr>
-          <a:lstStyle/>
-          <a:p>
-            <a:pPr marL="0" marR="0" algn="just">
-              <a:spcBef>
-                <a:spcPts val="0"/>
-              </a:spcBef>
-              <a:spcAft>
-                <a:spcPts val="0"/>
-              </a:spcAft>
-            </a:pPr>
-            <a:r>
-              <a:rPr lang="en-US" sz="1800" dirty="0">
-                <a:effectLst/>
-                <a:latin typeface="Times New Roman" panose="02020603050405020304" pitchFamily="18" charset="0"/>
-                <a:ea typeface="Times New Roman" panose="02020603050405020304" pitchFamily="18" charset="0"/>
-              </a:rPr>
-              <a:t>SAS Proc Import can import Excel data as well as other types of files such as .txt files</a:t>
-            </a:r>
-          </a:p>
-          <a:p>
-            <a:pPr marL="0" marR="0" algn="just">
-              <a:spcBef>
-                <a:spcPts val="0"/>
-              </a:spcBef>
-              <a:spcAft>
-                <a:spcPts val="0"/>
-              </a:spcAft>
-            </a:pPr>
-            <a:endParaRPr lang="en-US" sz="1800" dirty="0">
-              <a:effectLst/>
-              <a:latin typeface="Times New Roman" panose="02020603050405020304" pitchFamily="18" charset="0"/>
-              <a:ea typeface="Times New Roman" panose="02020603050405020304" pitchFamily="18" charset="0"/>
-            </a:endParaRPr>
-          </a:p>
-          <a:p>
-            <a:pPr marL="0" marR="0" algn="just">
-              <a:spcBef>
-                <a:spcPts val="0"/>
-              </a:spcBef>
-              <a:spcAft>
-                <a:spcPts val="0"/>
-              </a:spcAft>
-            </a:pPr>
-            <a:r>
-              <a:rPr lang="en-US" dirty="0">
-                <a:latin typeface="Times New Roman" panose="02020603050405020304" pitchFamily="18" charset="0"/>
-                <a:ea typeface="Times New Roman" panose="02020603050405020304" pitchFamily="18" charset="0"/>
-              </a:rPr>
-              <a:t>Importing the</a:t>
-            </a:r>
-            <a:r>
-              <a:rPr lang="en-US" sz="1800" dirty="0">
-                <a:effectLst/>
-                <a:latin typeface="Times New Roman" panose="02020603050405020304" pitchFamily="18" charset="0"/>
-                <a:ea typeface="Times New Roman" panose="02020603050405020304" pitchFamily="18" charset="0"/>
-              </a:rPr>
-              <a:t> data will still create a temporary data set in a SAS library</a:t>
-            </a:r>
-          </a:p>
-          <a:p>
-            <a:pPr marL="0" marR="0" algn="just">
-              <a:spcBef>
-                <a:spcPts val="0"/>
-              </a:spcBef>
-              <a:spcAft>
-                <a:spcPts val="0"/>
-              </a:spcAft>
-            </a:pPr>
-            <a:endParaRPr lang="en-US" dirty="0">
-              <a:latin typeface="Times New Roman" panose="02020603050405020304" pitchFamily="18" charset="0"/>
-              <a:ea typeface="Times New Roman" panose="02020603050405020304" pitchFamily="18" charset="0"/>
-            </a:endParaRPr>
-          </a:p>
-          <a:p>
-            <a:pPr marL="0" marR="0" algn="just">
-              <a:spcBef>
-                <a:spcPts val="0"/>
-              </a:spcBef>
-              <a:spcAft>
-                <a:spcPts val="0"/>
-              </a:spcAft>
-            </a:pPr>
-            <a:r>
-              <a:rPr lang="en-US" sz="1800" dirty="0">
-                <a:effectLst/>
-                <a:latin typeface="Times New Roman" panose="02020603050405020304" pitchFamily="18" charset="0"/>
-                <a:ea typeface="Times New Roman" panose="02020603050405020304" pitchFamily="18" charset="0"/>
-              </a:rPr>
-              <a:t>General Code:</a:t>
-            </a:r>
-          </a:p>
-          <a:p>
-            <a:pPr marL="0" marR="0" algn="just">
-              <a:spcBef>
-                <a:spcPts val="0"/>
-              </a:spcBef>
-              <a:spcAft>
-                <a:spcPts val="0"/>
-              </a:spcAft>
-            </a:pPr>
-            <a:endParaRPr lang="en-US" sz="1800" dirty="0">
-              <a:effectLst/>
-              <a:latin typeface="Times New Roman" panose="02020603050405020304" pitchFamily="18" charset="0"/>
-              <a:ea typeface="Times New Roman" panose="02020603050405020304" pitchFamily="18" charset="0"/>
-            </a:endParaRPr>
-          </a:p>
-          <a:p>
-            <a:pPr marL="0" marR="0" indent="0">
-              <a:spcBef>
-                <a:spcPts val="0"/>
-              </a:spcBef>
-              <a:spcAft>
-                <a:spcPts val="0"/>
-              </a:spcAft>
-              <a:buNone/>
-            </a:pPr>
-            <a:r>
-              <a:rPr lang="en-US" sz="1800" b="1" dirty="0">
-                <a:effectLst/>
-                <a:latin typeface="Courier New" panose="02070309020205020404" pitchFamily="49" charset="0"/>
-                <a:ea typeface="Times New Roman" panose="02020603050405020304" pitchFamily="18" charset="0"/>
-              </a:rPr>
-              <a:t>PROC</a:t>
-            </a:r>
-            <a:r>
-              <a:rPr lang="en-US" sz="1800" dirty="0">
-                <a:effectLst/>
-                <a:latin typeface="Courier New" panose="02070309020205020404" pitchFamily="49" charset="0"/>
-                <a:ea typeface="Times New Roman" panose="02020603050405020304" pitchFamily="18" charset="0"/>
-              </a:rPr>
-              <a:t> </a:t>
-            </a:r>
-            <a:r>
-              <a:rPr lang="en-US" sz="1800" b="1" dirty="0">
-                <a:effectLst/>
-                <a:latin typeface="Courier New" panose="02070309020205020404" pitchFamily="49" charset="0"/>
-                <a:ea typeface="Times New Roman" panose="02020603050405020304" pitchFamily="18" charset="0"/>
-              </a:rPr>
-              <a:t>IMPORT</a:t>
-            </a:r>
-            <a:r>
-              <a:rPr lang="en-US" sz="1800" dirty="0">
-                <a:effectLst/>
-                <a:latin typeface="Courier New" panose="02070309020205020404" pitchFamily="49" charset="0"/>
-                <a:ea typeface="Times New Roman" panose="02020603050405020304" pitchFamily="18" charset="0"/>
-              </a:rPr>
-              <a:t> DATAFILE = "</a:t>
-            </a:r>
-            <a:r>
-              <a:rPr lang="en-US" sz="1800" i="1" dirty="0" err="1">
-                <a:effectLst/>
-                <a:latin typeface="Courier New" panose="02070309020205020404" pitchFamily="49" charset="0"/>
-                <a:ea typeface="Times New Roman" panose="02020603050405020304" pitchFamily="18" charset="0"/>
-              </a:rPr>
-              <a:t>file_location</a:t>
-            </a:r>
-            <a:r>
-              <a:rPr lang="en-US" sz="1800" dirty="0">
-                <a:effectLst/>
-                <a:latin typeface="Courier New" panose="02070309020205020404" pitchFamily="49" charset="0"/>
-                <a:ea typeface="Times New Roman" panose="02020603050405020304" pitchFamily="18" charset="0"/>
-              </a:rPr>
-              <a:t>" </a:t>
-            </a:r>
-          </a:p>
-          <a:p>
-            <a:pPr marL="0" marR="0" indent="0">
-              <a:spcBef>
-                <a:spcPts val="0"/>
-              </a:spcBef>
-              <a:spcAft>
-                <a:spcPts val="0"/>
-              </a:spcAft>
-              <a:buNone/>
-            </a:pPr>
-            <a:r>
-              <a:rPr lang="en-US" dirty="0">
-                <a:latin typeface="Courier New" panose="02070309020205020404" pitchFamily="49" charset="0"/>
-                <a:ea typeface="Times New Roman" panose="02020603050405020304" pitchFamily="18" charset="0"/>
-              </a:rPr>
-              <a:t>	  </a:t>
-            </a:r>
-            <a:r>
-              <a:rPr lang="en-US" sz="1800" dirty="0">
-                <a:effectLst/>
-                <a:latin typeface="Courier New" panose="02070309020205020404" pitchFamily="49" charset="0"/>
-                <a:ea typeface="Times New Roman" panose="02020603050405020304" pitchFamily="18" charset="0"/>
-              </a:rPr>
-              <a:t>OUT= </a:t>
-            </a:r>
-            <a:r>
-              <a:rPr lang="en-US" sz="1800" i="1" dirty="0" err="1">
-                <a:effectLst/>
-                <a:latin typeface="Courier New" panose="02070309020205020404" pitchFamily="49" charset="0"/>
-                <a:ea typeface="Times New Roman" panose="02020603050405020304" pitchFamily="18" charset="0"/>
-              </a:rPr>
-              <a:t>dataset_name</a:t>
-            </a:r>
-            <a:r>
-              <a:rPr lang="en-US" sz="1800" dirty="0">
-                <a:effectLst/>
-                <a:latin typeface="Courier New" panose="02070309020205020404" pitchFamily="49" charset="0"/>
-                <a:ea typeface="Times New Roman" panose="02020603050405020304" pitchFamily="18" charset="0"/>
-              </a:rPr>
-              <a:t> </a:t>
-            </a:r>
-            <a:endParaRPr lang="en-US" sz="1800" dirty="0">
-              <a:effectLst/>
-              <a:latin typeface="Times New Roman" panose="02020603050405020304" pitchFamily="18" charset="0"/>
-              <a:ea typeface="Times New Roman" panose="02020603050405020304" pitchFamily="18" charset="0"/>
-            </a:endParaRPr>
-          </a:p>
-          <a:p>
-            <a:pPr marL="0" marR="0" indent="0">
-              <a:spcBef>
-                <a:spcPts val="0"/>
-              </a:spcBef>
-              <a:spcAft>
-                <a:spcPts val="0"/>
-              </a:spcAft>
-              <a:buNone/>
-            </a:pPr>
-            <a:r>
-              <a:rPr lang="en-US" sz="1800" dirty="0">
-                <a:effectLst/>
-                <a:latin typeface="Courier New" panose="02070309020205020404" pitchFamily="49" charset="0"/>
-                <a:ea typeface="Times New Roman" panose="02020603050405020304" pitchFamily="18" charset="0"/>
-              </a:rPr>
-              <a:t>     DBMS= </a:t>
-            </a:r>
-            <a:r>
-              <a:rPr lang="en-US" sz="1800" i="1" dirty="0" err="1">
-                <a:effectLst/>
-                <a:latin typeface="Courier New" panose="02070309020205020404" pitchFamily="49" charset="0"/>
-                <a:ea typeface="Times New Roman" panose="02020603050405020304" pitchFamily="18" charset="0"/>
-              </a:rPr>
-              <a:t>file_type</a:t>
-            </a:r>
-            <a:r>
-              <a:rPr lang="en-US" sz="1800" dirty="0">
-                <a:effectLst/>
-                <a:latin typeface="Courier New" panose="02070309020205020404" pitchFamily="49" charset="0"/>
-                <a:ea typeface="Times New Roman" panose="02020603050405020304" pitchFamily="18" charset="0"/>
-              </a:rPr>
-              <a:t> REPLACE;</a:t>
-            </a:r>
-            <a:endParaRPr lang="en-US" sz="1800" dirty="0">
-              <a:effectLst/>
-              <a:latin typeface="Times New Roman" panose="02020603050405020304" pitchFamily="18" charset="0"/>
-              <a:ea typeface="Times New Roman" panose="02020603050405020304" pitchFamily="18" charset="0"/>
-            </a:endParaRPr>
-          </a:p>
-          <a:p>
-            <a:pPr marL="0" marR="0" indent="0">
-              <a:spcBef>
-                <a:spcPts val="0"/>
-              </a:spcBef>
-              <a:spcAft>
-                <a:spcPts val="0"/>
-              </a:spcAft>
-              <a:buNone/>
-            </a:pPr>
-            <a:r>
-              <a:rPr lang="en-US" sz="1800" dirty="0">
-                <a:effectLst/>
-                <a:latin typeface="Courier New" panose="02070309020205020404" pitchFamily="49" charset="0"/>
-                <a:ea typeface="Times New Roman" panose="02020603050405020304" pitchFamily="18" charset="0"/>
-              </a:rPr>
-              <a:t>     /*SHEET="XXXX"; </a:t>
-            </a:r>
-            <a:r>
-              <a:rPr lang="en-US" dirty="0">
-                <a:latin typeface="Courier New" panose="02070309020205020404" pitchFamily="49" charset="0"/>
-                <a:ea typeface="Times New Roman" panose="02020603050405020304" pitchFamily="18" charset="0"/>
-                <a:sym typeface="Wingdings" panose="05000000000000000000" pitchFamily="2" charset="2"/>
-              </a:rPr>
-              <a:t>&lt;-- include this code if loading in multiple sheets */</a:t>
-            </a:r>
-            <a:r>
-              <a:rPr lang="en-US" sz="1800" dirty="0">
-                <a:effectLst/>
-                <a:latin typeface="Courier New" panose="02070309020205020404" pitchFamily="49" charset="0"/>
-                <a:ea typeface="Times New Roman" panose="02020603050405020304" pitchFamily="18" charset="0"/>
-              </a:rPr>
-              <a:t> </a:t>
-            </a:r>
-            <a:endParaRPr lang="en-US" sz="1800" dirty="0">
-              <a:effectLst/>
-              <a:latin typeface="Times New Roman" panose="02020603050405020304" pitchFamily="18" charset="0"/>
-              <a:ea typeface="Times New Roman" panose="02020603050405020304" pitchFamily="18" charset="0"/>
-            </a:endParaRPr>
-          </a:p>
-          <a:p>
-            <a:pPr marL="0" marR="0" indent="0">
-              <a:spcBef>
-                <a:spcPts val="0"/>
-              </a:spcBef>
-              <a:spcAft>
-                <a:spcPts val="0"/>
-              </a:spcAft>
-              <a:buNone/>
-            </a:pPr>
-            <a:r>
-              <a:rPr lang="en-US" sz="1800" dirty="0">
-                <a:effectLst/>
-                <a:latin typeface="Courier New" panose="02070309020205020404" pitchFamily="49" charset="0"/>
-                <a:ea typeface="Times New Roman" panose="02020603050405020304" pitchFamily="18" charset="0"/>
-              </a:rPr>
-              <a:t>     GETNAMES=YES;</a:t>
-            </a:r>
-            <a:endParaRPr lang="en-US" sz="1800" dirty="0">
-              <a:effectLst/>
-              <a:latin typeface="Times New Roman" panose="02020603050405020304" pitchFamily="18" charset="0"/>
-              <a:ea typeface="Times New Roman" panose="02020603050405020304" pitchFamily="18" charset="0"/>
-            </a:endParaRPr>
-          </a:p>
-          <a:p>
-            <a:pPr marL="0" marR="0" indent="0">
-              <a:spcBef>
-                <a:spcPts val="0"/>
-              </a:spcBef>
-              <a:spcAft>
-                <a:spcPts val="0"/>
-              </a:spcAft>
-              <a:buNone/>
-            </a:pPr>
-            <a:r>
-              <a:rPr lang="en-US" sz="1800" b="1" dirty="0">
-                <a:effectLst/>
-                <a:latin typeface="Courier New" panose="02070309020205020404" pitchFamily="49" charset="0"/>
-                <a:ea typeface="Times New Roman" panose="02020603050405020304" pitchFamily="18" charset="0"/>
-              </a:rPr>
-              <a:t>RUN</a:t>
-            </a:r>
-            <a:r>
-              <a:rPr lang="en-US" sz="1800" dirty="0">
-                <a:effectLst/>
-                <a:latin typeface="Courier New" panose="02070309020205020404" pitchFamily="49" charset="0"/>
-                <a:ea typeface="Times New Roman" panose="02020603050405020304" pitchFamily="18" charset="0"/>
-              </a:rPr>
-              <a:t>;</a:t>
-            </a:r>
-            <a:endParaRPr lang="en-US" sz="1800" dirty="0">
-              <a:effectLst/>
-              <a:latin typeface="Times New Roman" panose="02020603050405020304" pitchFamily="18" charset="0"/>
-              <a:ea typeface="Times New Roman" panose="02020603050405020304" pitchFamily="18" charset="0"/>
-            </a:endParaRPr>
-          </a:p>
-          <a:p>
-            <a:pPr marL="0" marR="0" indent="0" algn="just">
-              <a:spcBef>
-                <a:spcPts val="0"/>
-              </a:spcBef>
-              <a:spcAft>
-                <a:spcPts val="0"/>
-              </a:spcAft>
-              <a:buNone/>
-            </a:pPr>
-            <a:endParaRPr lang="en-US" sz="1800" dirty="0">
-              <a:effectLst/>
-              <a:latin typeface="Times New Roman" panose="02020603050405020304" pitchFamily="18" charset="0"/>
-              <a:ea typeface="Times New Roman" panose="02020603050405020304" pitchFamily="18" charset="0"/>
-            </a:endParaRPr>
-          </a:p>
-          <a:p>
-            <a:pPr marL="0" marR="0" algn="just">
-              <a:spcBef>
-                <a:spcPts val="0"/>
-              </a:spcBef>
-              <a:spcAft>
-                <a:spcPts val="0"/>
-              </a:spcAft>
-            </a:pPr>
-            <a:endParaRPr lang="en-US" sz="1800" dirty="0">
-              <a:effectLst/>
-              <a:latin typeface="Times New Roman" panose="02020603050405020304" pitchFamily="18" charset="0"/>
-              <a:ea typeface="Times New Roman" panose="02020603050405020304" pitchFamily="18" charset="0"/>
-            </a:endParaRPr>
-          </a:p>
-          <a:p>
-            <a:pPr marL="0" marR="0" indent="0" algn="just">
-              <a:spcBef>
-                <a:spcPts val="0"/>
-              </a:spcBef>
-              <a:spcAft>
-                <a:spcPts val="0"/>
-              </a:spcAft>
-              <a:buNone/>
-            </a:pPr>
-            <a:r>
-              <a:rPr lang="en-US" sz="1800" dirty="0">
-                <a:effectLst/>
-                <a:latin typeface="Times New Roman" panose="02020603050405020304" pitchFamily="18" charset="0"/>
-                <a:ea typeface="Times New Roman" panose="02020603050405020304" pitchFamily="18" charset="0"/>
-              </a:rPr>
-              <a:t> </a:t>
-            </a:r>
-          </a:p>
-          <a:p>
-            <a:pPr marL="0" indent="0">
-              <a:buNone/>
-            </a:pPr>
-            <a:endParaRPr lang="en-US" dirty="0"/>
-          </a:p>
-        </p:txBody>
-      </p:sp>
-    </p:spTree>
-    <p:extLst>
-      <p:ext uri="{BB962C8B-B14F-4D97-AF65-F5344CB8AC3E}">
-        <p14:creationId xmlns:p14="http://schemas.microsoft.com/office/powerpoint/2010/main" val="3716777212"/>
-      </p:ext>
-    </p:extLst>
-  </p:cSld>
-  <p:clrMapOvr>
-    <a:masterClrMapping/>
-  </p:clrMapOvr>
-</p:sld>
-</file>
-
-<file path=ppt/slides/slide63.xml><?xml version="1.0" encoding="utf-8"?>
-<p:sld xmlns:a="http://schemas.openxmlformats.org/drawingml/2006/main" xmlns:r="http://schemas.openxmlformats.org/officeDocument/2006/relationships" xmlns:p="http://schemas.openxmlformats.org/presentationml/2006/main">
-  <p:cSld>
-    <p:spTree>
-      <p:nvGrpSpPr>
-        <p:cNvPr id="1" name=""/>
-        <p:cNvGrpSpPr/>
-        <p:nvPr/>
-      </p:nvGrpSpPr>
-      <p:grpSpPr>
-        <a:xfrm>
-          <a:off x="0" y="0"/>
-          <a:ext cx="0" cy="0"/>
-          <a:chOff x="0" y="0"/>
-          <a:chExt cx="0" cy="0"/>
-        </a:xfrm>
-      </p:grpSpPr>
-      <p:sp>
-        <p:nvSpPr>
-          <p:cNvPr id="2" name="Title 1">
-            <a:extLst>
-              <a:ext uri="{FF2B5EF4-FFF2-40B4-BE49-F238E27FC236}">
-                <a16:creationId xmlns:a16="http://schemas.microsoft.com/office/drawing/2014/main" id="{75365ECF-BE3C-4F9D-9AAE-0A74B7F23673}"/>
-              </a:ext>
-            </a:extLst>
-          </p:cNvPr>
-          <p:cNvSpPr>
-            <a:spLocks noGrp="1"/>
-          </p:cNvSpPr>
-          <p:nvPr>
-            <p:ph type="title"/>
-          </p:nvPr>
-        </p:nvSpPr>
-        <p:spPr>
-          <a:xfrm>
-            <a:off x="621793" y="384473"/>
-            <a:ext cx="10131425" cy="1456267"/>
-          </a:xfrm>
-        </p:spPr>
-        <p:txBody>
-          <a:bodyPr/>
-          <a:lstStyle/>
-          <a:p>
-            <a:r>
-              <a:rPr lang="en-US" dirty="0"/>
-              <a:t>Entering/Loading Data Option 3: Proc import</a:t>
-            </a:r>
-          </a:p>
-        </p:txBody>
-      </p:sp>
-      <p:sp>
-        <p:nvSpPr>
-          <p:cNvPr id="3" name="Content Placeholder 2">
-            <a:extLst>
-              <a:ext uri="{FF2B5EF4-FFF2-40B4-BE49-F238E27FC236}">
-                <a16:creationId xmlns:a16="http://schemas.microsoft.com/office/drawing/2014/main" id="{5E28B520-55D4-47A5-9AA8-3FF58AB5C0D8}"/>
-              </a:ext>
-            </a:extLst>
-          </p:cNvPr>
-          <p:cNvSpPr>
-            <a:spLocks noGrp="1"/>
-          </p:cNvSpPr>
-          <p:nvPr>
-            <p:ph idx="1"/>
-          </p:nvPr>
-        </p:nvSpPr>
-        <p:spPr>
-          <a:xfrm>
-            <a:off x="685801" y="1976952"/>
-            <a:ext cx="11686031" cy="3909399"/>
-          </a:xfrm>
-        </p:spPr>
-        <p:txBody>
-          <a:bodyPr>
-            <a:normAutofit fontScale="92500" lnSpcReduction="10000"/>
-          </a:bodyPr>
-          <a:lstStyle/>
-          <a:p>
-            <a:pPr marL="0" marR="0" algn="just">
-              <a:spcBef>
-                <a:spcPts val="0"/>
-              </a:spcBef>
-              <a:spcAft>
-                <a:spcPts val="0"/>
-              </a:spcAft>
-            </a:pPr>
-            <a:r>
-              <a:rPr lang="en-US" sz="1800" dirty="0">
-                <a:effectLst/>
-                <a:latin typeface="Times New Roman" panose="02020603050405020304" pitchFamily="18" charset="0"/>
-                <a:ea typeface="Times New Roman" panose="02020603050405020304" pitchFamily="18" charset="0"/>
-              </a:rPr>
-              <a:t>SAS Proc Import can import Excel data as well as other types of files such as .txt files</a:t>
-            </a:r>
-          </a:p>
-          <a:p>
-            <a:pPr marL="0" marR="0" algn="just">
-              <a:spcBef>
-                <a:spcPts val="0"/>
-              </a:spcBef>
-              <a:spcAft>
-                <a:spcPts val="0"/>
-              </a:spcAft>
-            </a:pPr>
-            <a:endParaRPr lang="en-US" sz="1800" dirty="0">
-              <a:effectLst/>
-              <a:latin typeface="Times New Roman" panose="02020603050405020304" pitchFamily="18" charset="0"/>
-              <a:ea typeface="Times New Roman" panose="02020603050405020304" pitchFamily="18" charset="0"/>
-            </a:endParaRPr>
-          </a:p>
-          <a:p>
-            <a:pPr marL="0" marR="0" algn="just">
-              <a:spcBef>
-                <a:spcPts val="0"/>
-              </a:spcBef>
-              <a:spcAft>
-                <a:spcPts val="0"/>
-              </a:spcAft>
-            </a:pPr>
-            <a:r>
-              <a:rPr lang="en-US" dirty="0">
-                <a:latin typeface="Times New Roman" panose="02020603050405020304" pitchFamily="18" charset="0"/>
-                <a:ea typeface="Times New Roman" panose="02020603050405020304" pitchFamily="18" charset="0"/>
-              </a:rPr>
-              <a:t>Importing the</a:t>
-            </a:r>
-            <a:r>
-              <a:rPr lang="en-US" sz="1800" dirty="0">
-                <a:effectLst/>
-                <a:latin typeface="Times New Roman" panose="02020603050405020304" pitchFamily="18" charset="0"/>
-                <a:ea typeface="Times New Roman" panose="02020603050405020304" pitchFamily="18" charset="0"/>
-              </a:rPr>
-              <a:t> data will still create a temporary data set in a SAS library</a:t>
-            </a:r>
-          </a:p>
-          <a:p>
-            <a:pPr marL="0" marR="0" algn="just">
-              <a:spcBef>
-                <a:spcPts val="0"/>
-              </a:spcBef>
-              <a:spcAft>
-                <a:spcPts val="0"/>
-              </a:spcAft>
-            </a:pPr>
-            <a:endParaRPr lang="en-US" dirty="0">
-              <a:latin typeface="Times New Roman" panose="02020603050405020304" pitchFamily="18" charset="0"/>
-              <a:ea typeface="Times New Roman" panose="02020603050405020304" pitchFamily="18" charset="0"/>
-            </a:endParaRPr>
-          </a:p>
-          <a:p>
-            <a:pPr marL="0" marR="0" algn="just">
-              <a:spcBef>
-                <a:spcPts val="0"/>
-              </a:spcBef>
-              <a:spcAft>
-                <a:spcPts val="0"/>
-              </a:spcAft>
-            </a:pPr>
-            <a:r>
-              <a:rPr lang="en-US" sz="1800" dirty="0">
-                <a:effectLst/>
-                <a:latin typeface="Times New Roman" panose="02020603050405020304" pitchFamily="18" charset="0"/>
-                <a:ea typeface="Times New Roman" panose="02020603050405020304" pitchFamily="18" charset="0"/>
-              </a:rPr>
-              <a:t>General Code:</a:t>
-            </a:r>
-          </a:p>
-          <a:p>
-            <a:pPr marL="0" marR="0" algn="just">
-              <a:spcBef>
-                <a:spcPts val="0"/>
-              </a:spcBef>
-              <a:spcAft>
-                <a:spcPts val="0"/>
-              </a:spcAft>
-            </a:pPr>
-            <a:endParaRPr lang="en-US" sz="1800" dirty="0">
-              <a:effectLst/>
-              <a:latin typeface="Times New Roman" panose="02020603050405020304" pitchFamily="18" charset="0"/>
-              <a:ea typeface="Times New Roman" panose="02020603050405020304" pitchFamily="18" charset="0"/>
-            </a:endParaRPr>
-          </a:p>
-          <a:p>
-            <a:pPr marL="0" marR="0" indent="0">
-              <a:spcBef>
-                <a:spcPts val="0"/>
-              </a:spcBef>
-              <a:spcAft>
-                <a:spcPts val="0"/>
-              </a:spcAft>
-              <a:buNone/>
-            </a:pPr>
-            <a:r>
-              <a:rPr lang="en-US" sz="1800" b="1" dirty="0">
-                <a:effectLst/>
-                <a:latin typeface="Courier New" panose="02070309020205020404" pitchFamily="49" charset="0"/>
-                <a:ea typeface="Times New Roman" panose="02020603050405020304" pitchFamily="18" charset="0"/>
-              </a:rPr>
-              <a:t>PROC</a:t>
-            </a:r>
-            <a:r>
-              <a:rPr lang="en-US" sz="1800" dirty="0">
-                <a:effectLst/>
-                <a:latin typeface="Courier New" panose="02070309020205020404" pitchFamily="49" charset="0"/>
-                <a:ea typeface="Times New Roman" panose="02020603050405020304" pitchFamily="18" charset="0"/>
-              </a:rPr>
-              <a:t> </a:t>
-            </a:r>
-            <a:r>
-              <a:rPr lang="en-US" sz="1800" b="1" dirty="0">
-                <a:effectLst/>
-                <a:latin typeface="Courier New" panose="02070309020205020404" pitchFamily="49" charset="0"/>
-                <a:ea typeface="Times New Roman" panose="02020603050405020304" pitchFamily="18" charset="0"/>
-              </a:rPr>
-              <a:t>IMPORT</a:t>
-            </a:r>
-            <a:r>
-              <a:rPr lang="en-US" sz="1800" dirty="0">
-                <a:effectLst/>
-                <a:latin typeface="Courier New" panose="02070309020205020404" pitchFamily="49" charset="0"/>
-                <a:ea typeface="Times New Roman" panose="02020603050405020304" pitchFamily="18" charset="0"/>
-              </a:rPr>
-              <a:t> DATAFILE = "</a:t>
-            </a:r>
-            <a:r>
-              <a:rPr lang="en-US" sz="1800" i="1" dirty="0" err="1">
-                <a:effectLst/>
-                <a:latin typeface="Courier New" panose="02070309020205020404" pitchFamily="49" charset="0"/>
-                <a:ea typeface="Times New Roman" panose="02020603050405020304" pitchFamily="18" charset="0"/>
-              </a:rPr>
-              <a:t>file_location</a:t>
-            </a:r>
-            <a:r>
-              <a:rPr lang="en-US" sz="1800" dirty="0">
-                <a:effectLst/>
-                <a:latin typeface="Courier New" panose="02070309020205020404" pitchFamily="49" charset="0"/>
-                <a:ea typeface="Times New Roman" panose="02020603050405020304" pitchFamily="18" charset="0"/>
-              </a:rPr>
-              <a:t>" </a:t>
-            </a:r>
-            <a:endParaRPr lang="en-US" sz="1800" dirty="0">
-              <a:effectLst/>
-              <a:latin typeface="Times New Roman" panose="02020603050405020304" pitchFamily="18" charset="0"/>
-              <a:ea typeface="Times New Roman" panose="02020603050405020304" pitchFamily="18" charset="0"/>
-            </a:endParaRPr>
-          </a:p>
-          <a:p>
-            <a:pPr marL="0" marR="0" indent="0">
-              <a:spcBef>
-                <a:spcPts val="0"/>
-              </a:spcBef>
-              <a:spcAft>
-                <a:spcPts val="0"/>
-              </a:spcAft>
-              <a:buNone/>
-            </a:pPr>
-            <a:r>
-              <a:rPr lang="en-US" sz="1800" dirty="0">
-                <a:effectLst/>
-                <a:latin typeface="Courier New" panose="02070309020205020404" pitchFamily="49" charset="0"/>
-                <a:ea typeface="Times New Roman" panose="02020603050405020304" pitchFamily="18" charset="0"/>
-              </a:rPr>
-              <a:t>	  OUT= </a:t>
-            </a:r>
-            <a:r>
-              <a:rPr lang="en-US" sz="1800" i="1" dirty="0" err="1">
-                <a:effectLst/>
-                <a:latin typeface="Courier New" panose="02070309020205020404" pitchFamily="49" charset="0"/>
-                <a:ea typeface="Times New Roman" panose="02020603050405020304" pitchFamily="18" charset="0"/>
-              </a:rPr>
-              <a:t>dataset_name</a:t>
-            </a:r>
-            <a:r>
-              <a:rPr lang="en-US" sz="1800" dirty="0">
-                <a:effectLst/>
-                <a:latin typeface="Courier New" panose="02070309020205020404" pitchFamily="49" charset="0"/>
-                <a:ea typeface="Times New Roman" panose="02020603050405020304" pitchFamily="18" charset="0"/>
-              </a:rPr>
-              <a:t> </a:t>
-            </a:r>
-          </a:p>
-          <a:p>
-            <a:pPr marL="0" marR="0" indent="0">
-              <a:spcBef>
-                <a:spcPts val="0"/>
-              </a:spcBef>
-              <a:spcAft>
-                <a:spcPts val="0"/>
-              </a:spcAft>
-              <a:buNone/>
-            </a:pPr>
-            <a:r>
-              <a:rPr lang="en-US" sz="1800" dirty="0">
-                <a:effectLst/>
-                <a:latin typeface="Courier New" panose="02070309020205020404" pitchFamily="49" charset="0"/>
-                <a:ea typeface="Times New Roman" panose="02020603050405020304" pitchFamily="18" charset="0"/>
-              </a:rPr>
-              <a:t>	  DBMS= </a:t>
-            </a:r>
-            <a:r>
-              <a:rPr lang="en-US" sz="1800" i="1" dirty="0" err="1">
-                <a:effectLst/>
-                <a:latin typeface="Courier New" panose="02070309020205020404" pitchFamily="49" charset="0"/>
-                <a:ea typeface="Times New Roman" panose="02020603050405020304" pitchFamily="18" charset="0"/>
-              </a:rPr>
-              <a:t>file_type</a:t>
-            </a:r>
-            <a:r>
-              <a:rPr lang="en-US" sz="1800" dirty="0">
-                <a:effectLst/>
-                <a:latin typeface="Courier New" panose="02070309020205020404" pitchFamily="49" charset="0"/>
-                <a:ea typeface="Times New Roman" panose="02020603050405020304" pitchFamily="18" charset="0"/>
-              </a:rPr>
-              <a:t> </a:t>
-            </a:r>
-          </a:p>
-          <a:p>
-            <a:pPr marL="0" marR="0" indent="0">
-              <a:spcBef>
-                <a:spcPts val="0"/>
-              </a:spcBef>
-              <a:spcAft>
-                <a:spcPts val="0"/>
-              </a:spcAft>
-              <a:buNone/>
-            </a:pPr>
-            <a:r>
-              <a:rPr lang="en-US" sz="1800" dirty="0">
-                <a:effectLst/>
-                <a:latin typeface="Courier New" panose="02070309020205020404" pitchFamily="49" charset="0"/>
-                <a:ea typeface="Times New Roman" panose="02020603050405020304" pitchFamily="18" charset="0"/>
-              </a:rPr>
-              <a:t>	  REPLACE;</a:t>
-            </a:r>
-            <a:endParaRPr lang="en-US" sz="1800" dirty="0">
-              <a:effectLst/>
-              <a:latin typeface="Times New Roman" panose="02020603050405020304" pitchFamily="18" charset="0"/>
-              <a:ea typeface="Times New Roman" panose="02020603050405020304" pitchFamily="18" charset="0"/>
-            </a:endParaRPr>
-          </a:p>
-          <a:p>
-            <a:pPr marL="0" marR="0" indent="0">
-              <a:spcBef>
-                <a:spcPts val="0"/>
-              </a:spcBef>
-              <a:spcAft>
-                <a:spcPts val="0"/>
-              </a:spcAft>
-              <a:buNone/>
-            </a:pPr>
-            <a:r>
-              <a:rPr lang="en-US" sz="1800" dirty="0">
-                <a:effectLst/>
-                <a:latin typeface="Courier New" panose="02070309020205020404" pitchFamily="49" charset="0"/>
-                <a:ea typeface="Times New Roman" panose="02020603050405020304" pitchFamily="18" charset="0"/>
-              </a:rPr>
-              <a:t>     /*SHEET="XXXX"; </a:t>
-            </a:r>
-            <a:r>
-              <a:rPr lang="en-US" dirty="0">
-                <a:latin typeface="Courier New" panose="02070309020205020404" pitchFamily="49" charset="0"/>
-                <a:ea typeface="Times New Roman" panose="02020603050405020304" pitchFamily="18" charset="0"/>
-                <a:sym typeface="Wingdings" panose="05000000000000000000" pitchFamily="2" charset="2"/>
-              </a:rPr>
-              <a:t>&lt;-- include this code if loading in multiple sheets */</a:t>
-            </a:r>
-            <a:r>
-              <a:rPr lang="en-US" sz="1800" dirty="0">
-                <a:effectLst/>
-                <a:latin typeface="Courier New" panose="02070309020205020404" pitchFamily="49" charset="0"/>
-                <a:ea typeface="Times New Roman" panose="02020603050405020304" pitchFamily="18" charset="0"/>
-              </a:rPr>
-              <a:t> </a:t>
-            </a:r>
-            <a:endParaRPr lang="en-US" sz="1800" dirty="0">
-              <a:effectLst/>
-              <a:latin typeface="Times New Roman" panose="02020603050405020304" pitchFamily="18" charset="0"/>
-              <a:ea typeface="Times New Roman" panose="02020603050405020304" pitchFamily="18" charset="0"/>
-            </a:endParaRPr>
-          </a:p>
-          <a:p>
-            <a:pPr marL="0" marR="0" indent="0">
-              <a:spcBef>
-                <a:spcPts val="0"/>
-              </a:spcBef>
-              <a:spcAft>
-                <a:spcPts val="0"/>
-              </a:spcAft>
-              <a:buNone/>
-            </a:pPr>
-            <a:r>
-              <a:rPr lang="en-US" sz="1800" dirty="0">
-                <a:effectLst/>
-                <a:latin typeface="Courier New" panose="02070309020205020404" pitchFamily="49" charset="0"/>
-                <a:ea typeface="Times New Roman" panose="02020603050405020304" pitchFamily="18" charset="0"/>
-              </a:rPr>
-              <a:t>     GETNAMES=YES;</a:t>
-            </a:r>
-            <a:endParaRPr lang="en-US" sz="1800" dirty="0">
-              <a:effectLst/>
-              <a:latin typeface="Times New Roman" panose="02020603050405020304" pitchFamily="18" charset="0"/>
-              <a:ea typeface="Times New Roman" panose="02020603050405020304" pitchFamily="18" charset="0"/>
-            </a:endParaRPr>
-          </a:p>
-          <a:p>
-            <a:pPr marL="0" marR="0" indent="0">
-              <a:spcBef>
-                <a:spcPts val="0"/>
-              </a:spcBef>
-              <a:spcAft>
-                <a:spcPts val="0"/>
-              </a:spcAft>
-              <a:buNone/>
-            </a:pPr>
-            <a:r>
-              <a:rPr lang="en-US" sz="1800" b="1" dirty="0">
-                <a:effectLst/>
-                <a:latin typeface="Courier New" panose="02070309020205020404" pitchFamily="49" charset="0"/>
-                <a:ea typeface="Times New Roman" panose="02020603050405020304" pitchFamily="18" charset="0"/>
-              </a:rPr>
-              <a:t>RUN</a:t>
-            </a:r>
-            <a:r>
-              <a:rPr lang="en-US" sz="1800" dirty="0">
-                <a:effectLst/>
-                <a:latin typeface="Courier New" panose="02070309020205020404" pitchFamily="49" charset="0"/>
-                <a:ea typeface="Times New Roman" panose="02020603050405020304" pitchFamily="18" charset="0"/>
-              </a:rPr>
-              <a:t>;</a:t>
-            </a:r>
-            <a:endParaRPr lang="en-US" sz="1800" dirty="0">
-              <a:effectLst/>
-              <a:latin typeface="Times New Roman" panose="02020603050405020304" pitchFamily="18" charset="0"/>
-              <a:ea typeface="Times New Roman" panose="02020603050405020304" pitchFamily="18" charset="0"/>
-            </a:endParaRPr>
-          </a:p>
-          <a:p>
-            <a:pPr marL="0" marR="0" indent="0" algn="just">
-              <a:spcBef>
-                <a:spcPts val="0"/>
-              </a:spcBef>
-              <a:spcAft>
-                <a:spcPts val="0"/>
-              </a:spcAft>
-              <a:buNone/>
-            </a:pPr>
-            <a:endParaRPr lang="en-US" sz="1800" dirty="0">
-              <a:effectLst/>
-              <a:latin typeface="Times New Roman" panose="02020603050405020304" pitchFamily="18" charset="0"/>
-              <a:ea typeface="Times New Roman" panose="02020603050405020304" pitchFamily="18" charset="0"/>
-            </a:endParaRPr>
-          </a:p>
-          <a:p>
-            <a:pPr marL="0" marR="0" algn="just">
-              <a:spcBef>
-                <a:spcPts val="0"/>
-              </a:spcBef>
-              <a:spcAft>
-                <a:spcPts val="0"/>
-              </a:spcAft>
-            </a:pPr>
-            <a:endParaRPr lang="en-US" sz="1800" dirty="0">
-              <a:effectLst/>
-              <a:latin typeface="Times New Roman" panose="02020603050405020304" pitchFamily="18" charset="0"/>
-              <a:ea typeface="Times New Roman" panose="02020603050405020304" pitchFamily="18" charset="0"/>
-            </a:endParaRPr>
-          </a:p>
-          <a:p>
-            <a:pPr marL="0" marR="0" indent="0" algn="just">
-              <a:spcBef>
-                <a:spcPts val="0"/>
-              </a:spcBef>
-              <a:spcAft>
-                <a:spcPts val="0"/>
-              </a:spcAft>
-              <a:buNone/>
-            </a:pPr>
-            <a:r>
-              <a:rPr lang="en-US" sz="1800" dirty="0">
-                <a:effectLst/>
-                <a:latin typeface="Times New Roman" panose="02020603050405020304" pitchFamily="18" charset="0"/>
-                <a:ea typeface="Times New Roman" panose="02020603050405020304" pitchFamily="18" charset="0"/>
-              </a:rPr>
-              <a:t> </a:t>
-            </a:r>
-          </a:p>
-          <a:p>
-            <a:pPr marL="0" indent="0">
-              <a:buNone/>
-            </a:pPr>
-            <a:endParaRPr lang="en-US" dirty="0"/>
-          </a:p>
-        </p:txBody>
-      </p:sp>
-      <p:sp>
-        <p:nvSpPr>
-          <p:cNvPr id="7" name="Oval 6">
-            <a:extLst>
-              <a:ext uri="{FF2B5EF4-FFF2-40B4-BE49-F238E27FC236}">
-                <a16:creationId xmlns:a16="http://schemas.microsoft.com/office/drawing/2014/main" id="{55FAE82C-7051-419E-AE77-796AAEEF54C3}"/>
-              </a:ext>
-            </a:extLst>
-          </p:cNvPr>
-          <p:cNvSpPr/>
-          <p:nvPr/>
-        </p:nvSpPr>
-        <p:spPr>
-          <a:xfrm>
-            <a:off x="1206449" y="3520440"/>
-            <a:ext cx="2643173" cy="348909"/>
-          </a:xfrm>
-          <a:prstGeom prst="ellipse">
-            <a:avLst/>
-          </a:prstGeom>
-          <a:noFill/>
-          <a:ln>
-            <a:solidFill>
-              <a:srgbClr val="FF0000"/>
-            </a:solidFill>
-          </a:ln>
-        </p:spPr>
-        <p:style>
-          <a:lnRef idx="2">
-            <a:schemeClr val="accent1">
-              <a:shade val="50000"/>
-            </a:schemeClr>
-          </a:lnRef>
-          <a:fillRef idx="1">
-            <a:schemeClr val="accent1"/>
-          </a:fillRef>
-          <a:effectRef idx="0">
-            <a:schemeClr val="accent1"/>
-          </a:effectRef>
-          <a:fontRef idx="minor">
-            <a:schemeClr val="lt1"/>
-          </a:fontRef>
-        </p:style>
-        <p:txBody>
-          <a:bodyPr rtlCol="0" anchor="ctr"/>
-          <a:lstStyle/>
-          <a:p>
-            <a:pPr algn="ctr"/>
-            <a:endParaRPr lang="en-US"/>
-          </a:p>
-        </p:txBody>
-      </p:sp>
-      <p:cxnSp>
-        <p:nvCxnSpPr>
-          <p:cNvPr id="8" name="Straight Arrow Connector 7">
-            <a:extLst>
-              <a:ext uri="{FF2B5EF4-FFF2-40B4-BE49-F238E27FC236}">
-                <a16:creationId xmlns:a16="http://schemas.microsoft.com/office/drawing/2014/main" id="{BE5974BA-FA32-4113-BD49-7459B2C626B9}"/>
-              </a:ext>
-            </a:extLst>
-          </p:cNvPr>
-          <p:cNvCxnSpPr>
-            <a:cxnSpLocks/>
-          </p:cNvCxnSpPr>
-          <p:nvPr/>
-        </p:nvCxnSpPr>
-        <p:spPr>
-          <a:xfrm flipH="1">
-            <a:off x="2563220" y="3877545"/>
-            <a:ext cx="1" cy="1405360"/>
-          </a:xfrm>
-          <a:prstGeom prst="straightConnector1">
-            <a:avLst/>
-          </a:prstGeom>
-          <a:ln w="38100">
-            <a:solidFill>
-              <a:srgbClr val="FF0000"/>
-            </a:solidFill>
-            <a:tailEnd type="triangle"/>
-          </a:ln>
-        </p:spPr>
-        <p:style>
-          <a:lnRef idx="1">
-            <a:schemeClr val="accent1"/>
-          </a:lnRef>
-          <a:fillRef idx="0">
-            <a:schemeClr val="accent1"/>
-          </a:fillRef>
-          <a:effectRef idx="0">
-            <a:schemeClr val="accent1"/>
-          </a:effectRef>
-          <a:fontRef idx="minor">
-            <a:schemeClr val="tx1"/>
-          </a:fontRef>
-        </p:style>
-      </p:cxnSp>
-      <p:sp>
-        <p:nvSpPr>
-          <p:cNvPr id="11" name="TextBox 10">
-            <a:extLst>
-              <a:ext uri="{FF2B5EF4-FFF2-40B4-BE49-F238E27FC236}">
-                <a16:creationId xmlns:a16="http://schemas.microsoft.com/office/drawing/2014/main" id="{D696B3B1-F16B-42D6-B2A2-CF8FF356012C}"/>
-              </a:ext>
-            </a:extLst>
-          </p:cNvPr>
-          <p:cNvSpPr txBox="1"/>
-          <p:nvPr/>
-        </p:nvSpPr>
-        <p:spPr>
-          <a:xfrm>
-            <a:off x="1315157" y="5376232"/>
-            <a:ext cx="3779244" cy="646331"/>
-          </a:xfrm>
-          <a:prstGeom prst="rect">
-            <a:avLst/>
-          </a:prstGeom>
-          <a:noFill/>
-        </p:spPr>
-        <p:txBody>
-          <a:bodyPr wrap="square" rtlCol="0">
-            <a:spAutoFit/>
-          </a:bodyPr>
-          <a:lstStyle/>
-          <a:p>
-            <a:r>
-              <a:rPr lang="en-US" dirty="0"/>
-              <a:t>The </a:t>
-            </a:r>
-            <a:r>
-              <a:rPr lang="en-US" i="1" dirty="0"/>
-              <a:t>out</a:t>
-            </a:r>
-            <a:r>
-              <a:rPr lang="en-US" dirty="0"/>
-              <a:t> statement creates the dataset with the name you give. </a:t>
-            </a:r>
-          </a:p>
-        </p:txBody>
-      </p:sp>
-    </p:spTree>
-    <p:extLst>
-      <p:ext uri="{BB962C8B-B14F-4D97-AF65-F5344CB8AC3E}">
-        <p14:creationId xmlns:p14="http://schemas.microsoft.com/office/powerpoint/2010/main" val="2451382011"/>
-      </p:ext>
-    </p:extLst>
-  </p:cSld>
-  <p:clrMapOvr>
-    <a:masterClrMapping/>
-  </p:clrMapOvr>
-</p:sld>
-</file>
-
-<file path=ppt/slides/slide64.xml><?xml version="1.0" encoding="utf-8"?>
-<p:sld xmlns:a="http://schemas.openxmlformats.org/drawingml/2006/main" xmlns:r="http://schemas.openxmlformats.org/officeDocument/2006/relationships" xmlns:p="http://schemas.openxmlformats.org/presentationml/2006/main">
-  <p:cSld>
-    <p:spTree>
-      <p:nvGrpSpPr>
-        <p:cNvPr id="1" name=""/>
-        <p:cNvGrpSpPr/>
-        <p:nvPr/>
-      </p:nvGrpSpPr>
-      <p:grpSpPr>
-        <a:xfrm>
-          <a:off x="0" y="0"/>
-          <a:ext cx="0" cy="0"/>
-          <a:chOff x="0" y="0"/>
-          <a:chExt cx="0" cy="0"/>
-        </a:xfrm>
-      </p:grpSpPr>
-      <p:sp>
-        <p:nvSpPr>
-          <p:cNvPr id="2" name="Title 1">
-            <a:extLst>
-              <a:ext uri="{FF2B5EF4-FFF2-40B4-BE49-F238E27FC236}">
-                <a16:creationId xmlns:a16="http://schemas.microsoft.com/office/drawing/2014/main" id="{75365ECF-BE3C-4F9D-9AAE-0A74B7F23673}"/>
-              </a:ext>
-            </a:extLst>
-          </p:cNvPr>
-          <p:cNvSpPr>
-            <a:spLocks noGrp="1"/>
-          </p:cNvSpPr>
-          <p:nvPr>
-            <p:ph type="title"/>
-          </p:nvPr>
-        </p:nvSpPr>
-        <p:spPr/>
-        <p:txBody>
-          <a:bodyPr/>
-          <a:lstStyle/>
-          <a:p>
-            <a:r>
-              <a:rPr lang="en-US" dirty="0"/>
-              <a:t>Entering/Loading Data Option 3: Proc import</a:t>
-            </a:r>
-          </a:p>
-        </p:txBody>
-      </p:sp>
-      <p:sp>
-        <p:nvSpPr>
-          <p:cNvPr id="3" name="Content Placeholder 2">
-            <a:extLst>
-              <a:ext uri="{FF2B5EF4-FFF2-40B4-BE49-F238E27FC236}">
-                <a16:creationId xmlns:a16="http://schemas.microsoft.com/office/drawing/2014/main" id="{5E28B520-55D4-47A5-9AA8-3FF58AB5C0D8}"/>
-              </a:ext>
-            </a:extLst>
-          </p:cNvPr>
-          <p:cNvSpPr>
-            <a:spLocks noGrp="1"/>
-          </p:cNvSpPr>
-          <p:nvPr>
-            <p:ph idx="1"/>
-          </p:nvPr>
-        </p:nvSpPr>
-        <p:spPr>
-          <a:xfrm>
-            <a:off x="685801" y="1778169"/>
-            <a:ext cx="11686031" cy="3909399"/>
-          </a:xfrm>
-        </p:spPr>
-        <p:txBody>
-          <a:bodyPr>
-            <a:normAutofit fontScale="92500" lnSpcReduction="10000"/>
-          </a:bodyPr>
-          <a:lstStyle/>
-          <a:p>
-            <a:pPr marL="0" marR="0" algn="just">
-              <a:spcBef>
-                <a:spcPts val="0"/>
-              </a:spcBef>
-              <a:spcAft>
-                <a:spcPts val="0"/>
-              </a:spcAft>
-            </a:pPr>
-            <a:r>
-              <a:rPr lang="en-US" sz="1800" dirty="0">
-                <a:effectLst/>
-                <a:latin typeface="Times New Roman" panose="02020603050405020304" pitchFamily="18" charset="0"/>
-                <a:ea typeface="Times New Roman" panose="02020603050405020304" pitchFamily="18" charset="0"/>
-              </a:rPr>
-              <a:t>SAS Proc Import can import Excel data as well as other types of files such as .txt files</a:t>
-            </a:r>
-          </a:p>
-          <a:p>
-            <a:pPr marL="0" marR="0" algn="just">
-              <a:spcBef>
-                <a:spcPts val="0"/>
-              </a:spcBef>
-              <a:spcAft>
-                <a:spcPts val="0"/>
-              </a:spcAft>
-            </a:pPr>
-            <a:endParaRPr lang="en-US" sz="1800" dirty="0">
-              <a:effectLst/>
-              <a:latin typeface="Times New Roman" panose="02020603050405020304" pitchFamily="18" charset="0"/>
-              <a:ea typeface="Times New Roman" panose="02020603050405020304" pitchFamily="18" charset="0"/>
-            </a:endParaRPr>
-          </a:p>
-          <a:p>
-            <a:pPr marL="0" marR="0" algn="just">
-              <a:spcBef>
-                <a:spcPts val="0"/>
-              </a:spcBef>
-              <a:spcAft>
-                <a:spcPts val="0"/>
-              </a:spcAft>
-            </a:pPr>
-            <a:r>
-              <a:rPr lang="en-US" dirty="0">
-                <a:latin typeface="Times New Roman" panose="02020603050405020304" pitchFamily="18" charset="0"/>
-                <a:ea typeface="Times New Roman" panose="02020603050405020304" pitchFamily="18" charset="0"/>
-              </a:rPr>
-              <a:t>Importing the</a:t>
-            </a:r>
-            <a:r>
-              <a:rPr lang="en-US" sz="1800" dirty="0">
-                <a:effectLst/>
-                <a:latin typeface="Times New Roman" panose="02020603050405020304" pitchFamily="18" charset="0"/>
-                <a:ea typeface="Times New Roman" panose="02020603050405020304" pitchFamily="18" charset="0"/>
-              </a:rPr>
-              <a:t> data will still create a temporary data set in a SAS library</a:t>
-            </a:r>
-          </a:p>
-          <a:p>
-            <a:pPr marL="0" marR="0" algn="just">
-              <a:spcBef>
-                <a:spcPts val="0"/>
-              </a:spcBef>
-              <a:spcAft>
-                <a:spcPts val="0"/>
-              </a:spcAft>
-            </a:pPr>
-            <a:endParaRPr lang="en-US" dirty="0">
-              <a:latin typeface="Times New Roman" panose="02020603050405020304" pitchFamily="18" charset="0"/>
-              <a:ea typeface="Times New Roman" panose="02020603050405020304" pitchFamily="18" charset="0"/>
-            </a:endParaRPr>
-          </a:p>
-          <a:p>
-            <a:pPr marL="0" marR="0" algn="just">
-              <a:spcBef>
-                <a:spcPts val="0"/>
-              </a:spcBef>
-              <a:spcAft>
-                <a:spcPts val="0"/>
-              </a:spcAft>
-            </a:pPr>
-            <a:r>
-              <a:rPr lang="en-US" sz="1800" dirty="0">
-                <a:effectLst/>
-                <a:latin typeface="Times New Roman" panose="02020603050405020304" pitchFamily="18" charset="0"/>
-                <a:ea typeface="Times New Roman" panose="02020603050405020304" pitchFamily="18" charset="0"/>
-              </a:rPr>
-              <a:t>General Code:</a:t>
-            </a:r>
-          </a:p>
-          <a:p>
-            <a:pPr marL="0" marR="0" algn="just">
-              <a:spcBef>
-                <a:spcPts val="0"/>
-              </a:spcBef>
-              <a:spcAft>
-                <a:spcPts val="0"/>
-              </a:spcAft>
-            </a:pPr>
-            <a:endParaRPr lang="en-US" sz="1800" dirty="0">
-              <a:effectLst/>
-              <a:latin typeface="Times New Roman" panose="02020603050405020304" pitchFamily="18" charset="0"/>
-              <a:ea typeface="Times New Roman" panose="02020603050405020304" pitchFamily="18" charset="0"/>
-            </a:endParaRPr>
-          </a:p>
-          <a:p>
-            <a:pPr marL="0" marR="0" indent="0">
-              <a:spcBef>
-                <a:spcPts val="0"/>
-              </a:spcBef>
-              <a:spcAft>
-                <a:spcPts val="0"/>
-              </a:spcAft>
-              <a:buNone/>
-            </a:pPr>
-            <a:r>
-              <a:rPr lang="en-US" sz="1800" b="1" dirty="0">
-                <a:effectLst/>
-                <a:latin typeface="Courier New" panose="02070309020205020404" pitchFamily="49" charset="0"/>
-                <a:ea typeface="Times New Roman" panose="02020603050405020304" pitchFamily="18" charset="0"/>
-              </a:rPr>
-              <a:t>PROC</a:t>
-            </a:r>
-            <a:r>
-              <a:rPr lang="en-US" sz="1800" dirty="0">
-                <a:effectLst/>
-                <a:latin typeface="Courier New" panose="02070309020205020404" pitchFamily="49" charset="0"/>
-                <a:ea typeface="Times New Roman" panose="02020603050405020304" pitchFamily="18" charset="0"/>
-              </a:rPr>
-              <a:t> </a:t>
-            </a:r>
-            <a:r>
-              <a:rPr lang="en-US" sz="1800" b="1" dirty="0">
-                <a:effectLst/>
-                <a:latin typeface="Courier New" panose="02070309020205020404" pitchFamily="49" charset="0"/>
-                <a:ea typeface="Times New Roman" panose="02020603050405020304" pitchFamily="18" charset="0"/>
-              </a:rPr>
-              <a:t>IMPORT</a:t>
-            </a:r>
-            <a:r>
-              <a:rPr lang="en-US" sz="1800" dirty="0">
-                <a:effectLst/>
-                <a:latin typeface="Courier New" panose="02070309020205020404" pitchFamily="49" charset="0"/>
-                <a:ea typeface="Times New Roman" panose="02020603050405020304" pitchFamily="18" charset="0"/>
-              </a:rPr>
-              <a:t> DATAFILE = "</a:t>
-            </a:r>
-            <a:r>
-              <a:rPr lang="en-US" sz="1800" i="1" dirty="0" err="1">
-                <a:effectLst/>
-                <a:latin typeface="Courier New" panose="02070309020205020404" pitchFamily="49" charset="0"/>
-                <a:ea typeface="Times New Roman" panose="02020603050405020304" pitchFamily="18" charset="0"/>
-              </a:rPr>
-              <a:t>file_location</a:t>
-            </a:r>
-            <a:r>
-              <a:rPr lang="en-US" sz="1800" dirty="0">
-                <a:effectLst/>
-                <a:latin typeface="Courier New" panose="02070309020205020404" pitchFamily="49" charset="0"/>
-                <a:ea typeface="Times New Roman" panose="02020603050405020304" pitchFamily="18" charset="0"/>
-              </a:rPr>
-              <a:t>" </a:t>
-            </a:r>
-            <a:endParaRPr lang="en-US" sz="1800" dirty="0">
-              <a:effectLst/>
-              <a:latin typeface="Times New Roman" panose="02020603050405020304" pitchFamily="18" charset="0"/>
-              <a:ea typeface="Times New Roman" panose="02020603050405020304" pitchFamily="18" charset="0"/>
-            </a:endParaRPr>
-          </a:p>
-          <a:p>
-            <a:pPr marL="0" marR="0" indent="0">
-              <a:spcBef>
-                <a:spcPts val="0"/>
-              </a:spcBef>
-              <a:spcAft>
-                <a:spcPts val="0"/>
-              </a:spcAft>
-              <a:buNone/>
-            </a:pPr>
-            <a:r>
-              <a:rPr lang="en-US" sz="1800" dirty="0">
-                <a:effectLst/>
-                <a:latin typeface="Courier New" panose="02070309020205020404" pitchFamily="49" charset="0"/>
-                <a:ea typeface="Times New Roman" panose="02020603050405020304" pitchFamily="18" charset="0"/>
-              </a:rPr>
-              <a:t>	  OUT= </a:t>
-            </a:r>
-            <a:r>
-              <a:rPr lang="en-US" sz="1800" i="1" dirty="0" err="1">
-                <a:effectLst/>
-                <a:latin typeface="Courier New" panose="02070309020205020404" pitchFamily="49" charset="0"/>
-                <a:ea typeface="Times New Roman" panose="02020603050405020304" pitchFamily="18" charset="0"/>
-              </a:rPr>
-              <a:t>dataset_name</a:t>
-            </a:r>
-            <a:r>
-              <a:rPr lang="en-US" sz="1800" dirty="0">
-                <a:effectLst/>
-                <a:latin typeface="Courier New" panose="02070309020205020404" pitchFamily="49" charset="0"/>
-                <a:ea typeface="Times New Roman" panose="02020603050405020304" pitchFamily="18" charset="0"/>
-              </a:rPr>
-              <a:t> </a:t>
-            </a:r>
-          </a:p>
-          <a:p>
-            <a:pPr marL="0" marR="0" indent="0">
-              <a:spcBef>
-                <a:spcPts val="0"/>
-              </a:spcBef>
-              <a:spcAft>
-                <a:spcPts val="0"/>
-              </a:spcAft>
-              <a:buNone/>
-            </a:pPr>
-            <a:r>
-              <a:rPr lang="en-US" sz="1800" dirty="0">
-                <a:effectLst/>
-                <a:latin typeface="Courier New" panose="02070309020205020404" pitchFamily="49" charset="0"/>
-                <a:ea typeface="Times New Roman" panose="02020603050405020304" pitchFamily="18" charset="0"/>
-              </a:rPr>
-              <a:t>	  DBMS= </a:t>
-            </a:r>
-            <a:r>
-              <a:rPr lang="en-US" sz="1800" i="1" dirty="0" err="1">
-                <a:effectLst/>
-                <a:latin typeface="Courier New" panose="02070309020205020404" pitchFamily="49" charset="0"/>
-                <a:ea typeface="Times New Roman" panose="02020603050405020304" pitchFamily="18" charset="0"/>
-              </a:rPr>
-              <a:t>file_type</a:t>
-            </a:r>
-            <a:r>
-              <a:rPr lang="en-US" sz="1800" dirty="0">
-                <a:effectLst/>
-                <a:latin typeface="Courier New" panose="02070309020205020404" pitchFamily="49" charset="0"/>
-                <a:ea typeface="Times New Roman" panose="02020603050405020304" pitchFamily="18" charset="0"/>
-              </a:rPr>
-              <a:t> </a:t>
-            </a:r>
-          </a:p>
-          <a:p>
-            <a:pPr marL="0" marR="0" indent="0">
-              <a:spcBef>
-                <a:spcPts val="0"/>
-              </a:spcBef>
-              <a:spcAft>
-                <a:spcPts val="0"/>
-              </a:spcAft>
-              <a:buNone/>
-            </a:pPr>
-            <a:r>
-              <a:rPr lang="en-US" sz="1800" dirty="0">
-                <a:effectLst/>
-                <a:latin typeface="Courier New" panose="02070309020205020404" pitchFamily="49" charset="0"/>
-                <a:ea typeface="Times New Roman" panose="02020603050405020304" pitchFamily="18" charset="0"/>
-              </a:rPr>
-              <a:t>	  REPLACE;</a:t>
-            </a:r>
-            <a:endParaRPr lang="en-US" sz="1800" dirty="0">
-              <a:effectLst/>
-              <a:latin typeface="Times New Roman" panose="02020603050405020304" pitchFamily="18" charset="0"/>
-              <a:ea typeface="Times New Roman" panose="02020603050405020304" pitchFamily="18" charset="0"/>
-            </a:endParaRPr>
-          </a:p>
-          <a:p>
-            <a:pPr marL="0" marR="0" indent="0">
-              <a:spcBef>
-                <a:spcPts val="0"/>
-              </a:spcBef>
-              <a:spcAft>
-                <a:spcPts val="0"/>
-              </a:spcAft>
-              <a:buNone/>
-            </a:pPr>
-            <a:r>
-              <a:rPr lang="en-US" sz="1800" dirty="0">
-                <a:effectLst/>
-                <a:latin typeface="Courier New" panose="02070309020205020404" pitchFamily="49" charset="0"/>
-                <a:ea typeface="Times New Roman" panose="02020603050405020304" pitchFamily="18" charset="0"/>
-              </a:rPr>
-              <a:t>     /*SHEET="XXXX"; </a:t>
-            </a:r>
-            <a:r>
-              <a:rPr lang="en-US" dirty="0">
-                <a:latin typeface="Courier New" panose="02070309020205020404" pitchFamily="49" charset="0"/>
-                <a:ea typeface="Times New Roman" panose="02020603050405020304" pitchFamily="18" charset="0"/>
-                <a:sym typeface="Wingdings" panose="05000000000000000000" pitchFamily="2" charset="2"/>
-              </a:rPr>
-              <a:t>&lt;-- include this code if loading in multiple sheets */</a:t>
-            </a:r>
-            <a:r>
-              <a:rPr lang="en-US" sz="1800" dirty="0">
-                <a:effectLst/>
-                <a:latin typeface="Courier New" panose="02070309020205020404" pitchFamily="49" charset="0"/>
-                <a:ea typeface="Times New Roman" panose="02020603050405020304" pitchFamily="18" charset="0"/>
-              </a:rPr>
-              <a:t> </a:t>
-            </a:r>
-            <a:endParaRPr lang="en-US" sz="1800" dirty="0">
-              <a:effectLst/>
-              <a:latin typeface="Times New Roman" panose="02020603050405020304" pitchFamily="18" charset="0"/>
-              <a:ea typeface="Times New Roman" panose="02020603050405020304" pitchFamily="18" charset="0"/>
-            </a:endParaRPr>
-          </a:p>
-          <a:p>
-            <a:pPr marL="0" marR="0" indent="0">
-              <a:spcBef>
-                <a:spcPts val="0"/>
-              </a:spcBef>
-              <a:spcAft>
-                <a:spcPts val="0"/>
-              </a:spcAft>
-              <a:buNone/>
-            </a:pPr>
-            <a:r>
-              <a:rPr lang="en-US" sz="1800" dirty="0">
-                <a:effectLst/>
-                <a:latin typeface="Courier New" panose="02070309020205020404" pitchFamily="49" charset="0"/>
-                <a:ea typeface="Times New Roman" panose="02020603050405020304" pitchFamily="18" charset="0"/>
-              </a:rPr>
-              <a:t>     GETNAMES=YES;</a:t>
-            </a:r>
-            <a:endParaRPr lang="en-US" sz="1800" dirty="0">
-              <a:effectLst/>
-              <a:latin typeface="Times New Roman" panose="02020603050405020304" pitchFamily="18" charset="0"/>
-              <a:ea typeface="Times New Roman" panose="02020603050405020304" pitchFamily="18" charset="0"/>
-            </a:endParaRPr>
-          </a:p>
-          <a:p>
-            <a:pPr marL="0" marR="0" indent="0">
-              <a:spcBef>
-                <a:spcPts val="0"/>
-              </a:spcBef>
-              <a:spcAft>
-                <a:spcPts val="0"/>
-              </a:spcAft>
-              <a:buNone/>
-            </a:pPr>
-            <a:r>
-              <a:rPr lang="en-US" sz="1800" b="1" dirty="0">
-                <a:effectLst/>
-                <a:latin typeface="Courier New" panose="02070309020205020404" pitchFamily="49" charset="0"/>
-                <a:ea typeface="Times New Roman" panose="02020603050405020304" pitchFamily="18" charset="0"/>
-              </a:rPr>
-              <a:t>RUN</a:t>
-            </a:r>
-            <a:r>
-              <a:rPr lang="en-US" sz="1800" dirty="0">
-                <a:effectLst/>
-                <a:latin typeface="Courier New" panose="02070309020205020404" pitchFamily="49" charset="0"/>
-                <a:ea typeface="Times New Roman" panose="02020603050405020304" pitchFamily="18" charset="0"/>
-              </a:rPr>
-              <a:t>;</a:t>
-            </a:r>
-            <a:endParaRPr lang="en-US" sz="1800" dirty="0">
-              <a:effectLst/>
-              <a:latin typeface="Times New Roman" panose="02020603050405020304" pitchFamily="18" charset="0"/>
-              <a:ea typeface="Times New Roman" panose="02020603050405020304" pitchFamily="18" charset="0"/>
-            </a:endParaRPr>
-          </a:p>
-          <a:p>
-            <a:pPr marL="0" marR="0" indent="0" algn="just">
-              <a:spcBef>
-                <a:spcPts val="0"/>
-              </a:spcBef>
-              <a:spcAft>
-                <a:spcPts val="0"/>
-              </a:spcAft>
-              <a:buNone/>
-            </a:pPr>
-            <a:endParaRPr lang="en-US" sz="1800" dirty="0">
-              <a:effectLst/>
-              <a:latin typeface="Times New Roman" panose="02020603050405020304" pitchFamily="18" charset="0"/>
-              <a:ea typeface="Times New Roman" panose="02020603050405020304" pitchFamily="18" charset="0"/>
-            </a:endParaRPr>
-          </a:p>
-          <a:p>
-            <a:pPr marL="0" marR="0" algn="just">
-              <a:spcBef>
-                <a:spcPts val="0"/>
-              </a:spcBef>
-              <a:spcAft>
-                <a:spcPts val="0"/>
-              </a:spcAft>
-            </a:pPr>
-            <a:endParaRPr lang="en-US" sz="1800" dirty="0">
-              <a:effectLst/>
-              <a:latin typeface="Times New Roman" panose="02020603050405020304" pitchFamily="18" charset="0"/>
-              <a:ea typeface="Times New Roman" panose="02020603050405020304" pitchFamily="18" charset="0"/>
-            </a:endParaRPr>
-          </a:p>
-          <a:p>
-            <a:pPr marL="0" marR="0" indent="0" algn="just">
-              <a:spcBef>
-                <a:spcPts val="0"/>
-              </a:spcBef>
-              <a:spcAft>
-                <a:spcPts val="0"/>
-              </a:spcAft>
-              <a:buNone/>
-            </a:pPr>
-            <a:r>
-              <a:rPr lang="en-US" sz="1800" dirty="0">
-                <a:effectLst/>
-                <a:latin typeface="Times New Roman" panose="02020603050405020304" pitchFamily="18" charset="0"/>
-                <a:ea typeface="Times New Roman" panose="02020603050405020304" pitchFamily="18" charset="0"/>
-              </a:rPr>
-              <a:t> </a:t>
-            </a:r>
-          </a:p>
-          <a:p>
-            <a:pPr marL="0" indent="0">
-              <a:buNone/>
-            </a:pPr>
-            <a:endParaRPr lang="en-US" dirty="0"/>
-          </a:p>
-        </p:txBody>
-      </p:sp>
-      <p:sp>
-        <p:nvSpPr>
-          <p:cNvPr id="7" name="Oval 6">
-            <a:extLst>
-              <a:ext uri="{FF2B5EF4-FFF2-40B4-BE49-F238E27FC236}">
-                <a16:creationId xmlns:a16="http://schemas.microsoft.com/office/drawing/2014/main" id="{55FAE82C-7051-419E-AE77-796AAEEF54C3}"/>
-              </a:ext>
-            </a:extLst>
-          </p:cNvPr>
-          <p:cNvSpPr/>
-          <p:nvPr/>
-        </p:nvSpPr>
-        <p:spPr>
-          <a:xfrm>
-            <a:off x="1302396" y="3596133"/>
-            <a:ext cx="2400923" cy="247748"/>
-          </a:xfrm>
-          <a:prstGeom prst="ellipse">
-            <a:avLst/>
-          </a:prstGeom>
-          <a:noFill/>
-          <a:ln>
-            <a:solidFill>
-              <a:srgbClr val="FF0000"/>
-            </a:solidFill>
-          </a:ln>
-        </p:spPr>
-        <p:style>
-          <a:lnRef idx="2">
-            <a:schemeClr val="accent1">
-              <a:shade val="50000"/>
-            </a:schemeClr>
-          </a:lnRef>
-          <a:fillRef idx="1">
-            <a:schemeClr val="accent1"/>
-          </a:fillRef>
-          <a:effectRef idx="0">
-            <a:schemeClr val="accent1"/>
-          </a:effectRef>
-          <a:fontRef idx="minor">
-            <a:schemeClr val="lt1"/>
-          </a:fontRef>
-        </p:style>
-        <p:txBody>
-          <a:bodyPr rtlCol="0" anchor="ctr"/>
-          <a:lstStyle/>
-          <a:p>
-            <a:pPr algn="ctr"/>
-            <a:endParaRPr lang="en-US"/>
-          </a:p>
-        </p:txBody>
-      </p:sp>
-      <p:cxnSp>
-        <p:nvCxnSpPr>
-          <p:cNvPr id="8" name="Straight Arrow Connector 7">
-            <a:extLst>
-              <a:ext uri="{FF2B5EF4-FFF2-40B4-BE49-F238E27FC236}">
-                <a16:creationId xmlns:a16="http://schemas.microsoft.com/office/drawing/2014/main" id="{BE5974BA-FA32-4113-BD49-7459B2C626B9}"/>
-              </a:ext>
-            </a:extLst>
-          </p:cNvPr>
-          <p:cNvCxnSpPr>
-            <a:cxnSpLocks/>
-          </p:cNvCxnSpPr>
-          <p:nvPr/>
-        </p:nvCxnSpPr>
-        <p:spPr>
-          <a:xfrm flipH="1">
-            <a:off x="1995365" y="4200928"/>
-            <a:ext cx="1" cy="1103218"/>
-          </a:xfrm>
-          <a:prstGeom prst="straightConnector1">
-            <a:avLst/>
-          </a:prstGeom>
-          <a:ln w="38100">
-            <a:solidFill>
-              <a:srgbClr val="FF0000"/>
-            </a:solidFill>
-            <a:tailEnd type="triangle"/>
-          </a:ln>
-        </p:spPr>
-        <p:style>
-          <a:lnRef idx="1">
-            <a:schemeClr val="accent1"/>
-          </a:lnRef>
-          <a:fillRef idx="0">
-            <a:schemeClr val="accent1"/>
-          </a:fillRef>
-          <a:effectRef idx="0">
-            <a:schemeClr val="accent1"/>
-          </a:effectRef>
-          <a:fontRef idx="minor">
-            <a:schemeClr val="tx1"/>
-          </a:fontRef>
-        </p:style>
-      </p:cxnSp>
-      <p:sp>
-        <p:nvSpPr>
-          <p:cNvPr id="11" name="TextBox 10">
-            <a:extLst>
-              <a:ext uri="{FF2B5EF4-FFF2-40B4-BE49-F238E27FC236}">
-                <a16:creationId xmlns:a16="http://schemas.microsoft.com/office/drawing/2014/main" id="{D696B3B1-F16B-42D6-B2A2-CF8FF356012C}"/>
-              </a:ext>
-            </a:extLst>
-          </p:cNvPr>
-          <p:cNvSpPr txBox="1"/>
-          <p:nvPr/>
-        </p:nvSpPr>
-        <p:spPr>
-          <a:xfrm>
-            <a:off x="4911292" y="4699573"/>
-            <a:ext cx="4333291" cy="646331"/>
-          </a:xfrm>
-          <a:prstGeom prst="rect">
-            <a:avLst/>
-          </a:prstGeom>
-          <a:noFill/>
-        </p:spPr>
-        <p:txBody>
-          <a:bodyPr wrap="square" rtlCol="0">
-            <a:spAutoFit/>
-          </a:bodyPr>
-          <a:lstStyle/>
-          <a:p>
-            <a:r>
-              <a:rPr lang="en-US" dirty="0"/>
-              <a:t>Common file extensions include txt (though SAS requires “</a:t>
-            </a:r>
-            <a:r>
-              <a:rPr lang="en-US" dirty="0" err="1"/>
-              <a:t>dlm</a:t>
-            </a:r>
-            <a:r>
-              <a:rPr lang="en-US" dirty="0"/>
-              <a:t>”), </a:t>
-            </a:r>
-            <a:r>
-              <a:rPr lang="en-US" dirty="0" err="1"/>
-              <a:t>xls</a:t>
-            </a:r>
-            <a:r>
-              <a:rPr lang="en-US" dirty="0"/>
-              <a:t>, xlsx, csv</a:t>
-            </a:r>
-          </a:p>
-        </p:txBody>
-      </p:sp>
-      <p:sp>
-        <p:nvSpPr>
-          <p:cNvPr id="9" name="Oval 8">
-            <a:extLst>
-              <a:ext uri="{FF2B5EF4-FFF2-40B4-BE49-F238E27FC236}">
-                <a16:creationId xmlns:a16="http://schemas.microsoft.com/office/drawing/2014/main" id="{F747B125-5BD6-4B38-BAD1-C49DF9FB7A2C}"/>
-              </a:ext>
-            </a:extLst>
-          </p:cNvPr>
-          <p:cNvSpPr/>
-          <p:nvPr/>
-        </p:nvSpPr>
-        <p:spPr>
-          <a:xfrm>
-            <a:off x="1302396" y="3849814"/>
-            <a:ext cx="1385940" cy="247748"/>
-          </a:xfrm>
-          <a:prstGeom prst="ellipse">
-            <a:avLst/>
-          </a:prstGeom>
-          <a:noFill/>
-          <a:ln>
-            <a:solidFill>
-              <a:srgbClr val="FF0000"/>
-            </a:solidFill>
-          </a:ln>
-        </p:spPr>
-        <p:style>
-          <a:lnRef idx="2">
-            <a:schemeClr val="accent1">
-              <a:shade val="50000"/>
-            </a:schemeClr>
-          </a:lnRef>
-          <a:fillRef idx="1">
-            <a:schemeClr val="accent1"/>
-          </a:fillRef>
-          <a:effectRef idx="0">
-            <a:schemeClr val="accent1"/>
-          </a:effectRef>
-          <a:fontRef idx="minor">
-            <a:schemeClr val="lt1"/>
-          </a:fontRef>
-        </p:style>
-        <p:txBody>
-          <a:bodyPr rtlCol="0" anchor="ctr"/>
-          <a:lstStyle/>
-          <a:p>
-            <a:pPr algn="ctr"/>
-            <a:endParaRPr lang="en-US"/>
-          </a:p>
-        </p:txBody>
-      </p:sp>
-      <p:cxnSp>
-        <p:nvCxnSpPr>
-          <p:cNvPr id="10" name="Straight Arrow Connector 9">
-            <a:extLst>
-              <a:ext uri="{FF2B5EF4-FFF2-40B4-BE49-F238E27FC236}">
-                <a16:creationId xmlns:a16="http://schemas.microsoft.com/office/drawing/2014/main" id="{F06D1CA5-7D41-404E-998D-67B4093B5847}"/>
-              </a:ext>
-            </a:extLst>
-          </p:cNvPr>
-          <p:cNvCxnSpPr>
-            <a:cxnSpLocks/>
-          </p:cNvCxnSpPr>
-          <p:nvPr/>
-        </p:nvCxnSpPr>
-        <p:spPr>
-          <a:xfrm>
-            <a:off x="3703319" y="3732868"/>
-            <a:ext cx="1207974" cy="1117058"/>
-          </a:xfrm>
-          <a:prstGeom prst="straightConnector1">
-            <a:avLst/>
-          </a:prstGeom>
-          <a:ln w="38100">
-            <a:solidFill>
-              <a:srgbClr val="FF0000"/>
-            </a:solidFill>
-            <a:tailEnd type="triangle"/>
-          </a:ln>
-        </p:spPr>
-        <p:style>
-          <a:lnRef idx="1">
-            <a:schemeClr val="accent1"/>
-          </a:lnRef>
-          <a:fillRef idx="0">
-            <a:schemeClr val="accent1"/>
-          </a:fillRef>
-          <a:effectRef idx="0">
-            <a:schemeClr val="accent1"/>
-          </a:effectRef>
-          <a:fontRef idx="minor">
-            <a:schemeClr val="tx1"/>
-          </a:fontRef>
-        </p:style>
-      </p:cxnSp>
-      <p:sp>
-        <p:nvSpPr>
-          <p:cNvPr id="12" name="TextBox 11">
-            <a:extLst>
-              <a:ext uri="{FF2B5EF4-FFF2-40B4-BE49-F238E27FC236}">
-                <a16:creationId xmlns:a16="http://schemas.microsoft.com/office/drawing/2014/main" id="{4D456DAA-6265-4307-BA85-3517563A7A40}"/>
-              </a:ext>
-            </a:extLst>
-          </p:cNvPr>
-          <p:cNvSpPr txBox="1"/>
-          <p:nvPr/>
-        </p:nvSpPr>
-        <p:spPr>
-          <a:xfrm>
-            <a:off x="285851" y="5476959"/>
-            <a:ext cx="4804970" cy="923330"/>
-          </a:xfrm>
-          <a:prstGeom prst="rect">
-            <a:avLst/>
-          </a:prstGeom>
-          <a:noFill/>
-        </p:spPr>
-        <p:txBody>
-          <a:bodyPr wrap="none" rtlCol="0">
-            <a:spAutoFit/>
-          </a:bodyPr>
-          <a:lstStyle/>
-          <a:p>
-            <a:r>
-              <a:rPr lang="en-US" dirty="0"/>
-              <a:t>Only need if replacing a data set with same name</a:t>
-            </a:r>
-          </a:p>
-          <a:p>
-            <a:r>
-              <a:rPr lang="en-US" dirty="0"/>
-              <a:t>(a good idea to include if you may reload several</a:t>
-            </a:r>
-          </a:p>
-          <a:p>
-            <a:r>
-              <a:rPr lang="en-US" dirty="0"/>
-              <a:t>times after making changes)</a:t>
-            </a:r>
-          </a:p>
-        </p:txBody>
-      </p:sp>
-    </p:spTree>
-    <p:extLst>
-      <p:ext uri="{BB962C8B-B14F-4D97-AF65-F5344CB8AC3E}">
-        <p14:creationId xmlns:p14="http://schemas.microsoft.com/office/powerpoint/2010/main" val="4190073491"/>
-      </p:ext>
-    </p:extLst>
-  </p:cSld>
-  <p:clrMapOvr>
-    <a:masterClrMapping/>
-  </p:clrMapOvr>
-</p:sld>
-</file>
-
-<file path=ppt/slides/slide65.xml><?xml version="1.0" encoding="utf-8"?>
-<p:sld xmlns:a="http://schemas.openxmlformats.org/drawingml/2006/main" xmlns:r="http://schemas.openxmlformats.org/officeDocument/2006/relationships" xmlns:p="http://schemas.openxmlformats.org/presentationml/2006/main">
-  <p:cSld>
-    <p:spTree>
-      <p:nvGrpSpPr>
-        <p:cNvPr id="1" name=""/>
-        <p:cNvGrpSpPr/>
-        <p:nvPr/>
-      </p:nvGrpSpPr>
-      <p:grpSpPr>
-        <a:xfrm>
-          <a:off x="0" y="0"/>
-          <a:ext cx="0" cy="0"/>
-          <a:chOff x="0" y="0"/>
-          <a:chExt cx="0" cy="0"/>
-        </a:xfrm>
-      </p:grpSpPr>
-      <p:sp>
-        <p:nvSpPr>
-          <p:cNvPr id="2" name="Title 1">
-            <a:extLst>
-              <a:ext uri="{FF2B5EF4-FFF2-40B4-BE49-F238E27FC236}">
-                <a16:creationId xmlns:a16="http://schemas.microsoft.com/office/drawing/2014/main" id="{75365ECF-BE3C-4F9D-9AAE-0A74B7F23673}"/>
-              </a:ext>
-            </a:extLst>
-          </p:cNvPr>
-          <p:cNvSpPr>
-            <a:spLocks noGrp="1"/>
-          </p:cNvSpPr>
-          <p:nvPr>
-            <p:ph type="title"/>
-          </p:nvPr>
-        </p:nvSpPr>
-        <p:spPr/>
-        <p:txBody>
-          <a:bodyPr/>
-          <a:lstStyle/>
-          <a:p>
-            <a:r>
-              <a:rPr lang="en-US" dirty="0"/>
-              <a:t>Entering/Loading Data Option 3: Proc import</a:t>
-            </a:r>
-          </a:p>
-        </p:txBody>
-      </p:sp>
-      <p:sp>
-        <p:nvSpPr>
-          <p:cNvPr id="3" name="Content Placeholder 2">
-            <a:extLst>
-              <a:ext uri="{FF2B5EF4-FFF2-40B4-BE49-F238E27FC236}">
-                <a16:creationId xmlns:a16="http://schemas.microsoft.com/office/drawing/2014/main" id="{5E28B520-55D4-47A5-9AA8-3FF58AB5C0D8}"/>
-              </a:ext>
-            </a:extLst>
-          </p:cNvPr>
-          <p:cNvSpPr>
-            <a:spLocks noGrp="1"/>
-          </p:cNvSpPr>
-          <p:nvPr>
-            <p:ph idx="1"/>
-          </p:nvPr>
-        </p:nvSpPr>
-        <p:spPr>
-          <a:xfrm>
-            <a:off x="685801" y="1778169"/>
-            <a:ext cx="11686031" cy="3909399"/>
-          </a:xfrm>
-        </p:spPr>
-        <p:txBody>
-          <a:bodyPr>
-            <a:normAutofit fontScale="92500" lnSpcReduction="10000"/>
-          </a:bodyPr>
-          <a:lstStyle/>
-          <a:p>
-            <a:pPr marL="0" marR="0" algn="just">
-              <a:spcBef>
-                <a:spcPts val="0"/>
-              </a:spcBef>
-              <a:spcAft>
-                <a:spcPts val="0"/>
-              </a:spcAft>
-            </a:pPr>
-            <a:r>
-              <a:rPr lang="en-US" sz="1800" dirty="0">
-                <a:effectLst/>
-                <a:latin typeface="Times New Roman" panose="02020603050405020304" pitchFamily="18" charset="0"/>
-                <a:ea typeface="Times New Roman" panose="02020603050405020304" pitchFamily="18" charset="0"/>
-              </a:rPr>
-              <a:t>SAS Proc Import can import Excel data as well as other types of files such as .txt files</a:t>
-            </a:r>
-          </a:p>
-          <a:p>
-            <a:pPr marL="0" marR="0" algn="just">
-              <a:spcBef>
-                <a:spcPts val="0"/>
-              </a:spcBef>
-              <a:spcAft>
-                <a:spcPts val="0"/>
-              </a:spcAft>
-            </a:pPr>
-            <a:endParaRPr lang="en-US" sz="1800" dirty="0">
-              <a:effectLst/>
-              <a:latin typeface="Times New Roman" panose="02020603050405020304" pitchFamily="18" charset="0"/>
-              <a:ea typeface="Times New Roman" panose="02020603050405020304" pitchFamily="18" charset="0"/>
-            </a:endParaRPr>
-          </a:p>
-          <a:p>
-            <a:pPr marL="0" marR="0" algn="just">
-              <a:spcBef>
-                <a:spcPts val="0"/>
-              </a:spcBef>
-              <a:spcAft>
-                <a:spcPts val="0"/>
-              </a:spcAft>
-            </a:pPr>
-            <a:r>
-              <a:rPr lang="en-US" dirty="0">
-                <a:latin typeface="Times New Roman" panose="02020603050405020304" pitchFamily="18" charset="0"/>
-                <a:ea typeface="Times New Roman" panose="02020603050405020304" pitchFamily="18" charset="0"/>
-              </a:rPr>
-              <a:t>Importing the</a:t>
-            </a:r>
-            <a:r>
-              <a:rPr lang="en-US" sz="1800" dirty="0">
-                <a:effectLst/>
-                <a:latin typeface="Times New Roman" panose="02020603050405020304" pitchFamily="18" charset="0"/>
-                <a:ea typeface="Times New Roman" panose="02020603050405020304" pitchFamily="18" charset="0"/>
-              </a:rPr>
-              <a:t> data will still create a temporary data set in a SAS library</a:t>
-            </a:r>
-          </a:p>
-          <a:p>
-            <a:pPr marL="0" marR="0" algn="just">
-              <a:spcBef>
-                <a:spcPts val="0"/>
-              </a:spcBef>
-              <a:spcAft>
-                <a:spcPts val="0"/>
-              </a:spcAft>
-            </a:pPr>
-            <a:endParaRPr lang="en-US" dirty="0">
-              <a:latin typeface="Times New Roman" panose="02020603050405020304" pitchFamily="18" charset="0"/>
-              <a:ea typeface="Times New Roman" panose="02020603050405020304" pitchFamily="18" charset="0"/>
-            </a:endParaRPr>
-          </a:p>
-          <a:p>
-            <a:pPr marL="0" marR="0" algn="just">
-              <a:spcBef>
-                <a:spcPts val="0"/>
-              </a:spcBef>
-              <a:spcAft>
-                <a:spcPts val="0"/>
-              </a:spcAft>
-            </a:pPr>
-            <a:r>
-              <a:rPr lang="en-US" sz="1800" dirty="0">
-                <a:effectLst/>
-                <a:latin typeface="Times New Roman" panose="02020603050405020304" pitchFamily="18" charset="0"/>
-                <a:ea typeface="Times New Roman" panose="02020603050405020304" pitchFamily="18" charset="0"/>
-              </a:rPr>
-              <a:t>General Code:</a:t>
-            </a:r>
-          </a:p>
-          <a:p>
-            <a:pPr marL="0" marR="0" algn="just">
-              <a:spcBef>
-                <a:spcPts val="0"/>
-              </a:spcBef>
-              <a:spcAft>
-                <a:spcPts val="0"/>
-              </a:spcAft>
-            </a:pPr>
-            <a:endParaRPr lang="en-US" sz="1800" dirty="0">
-              <a:effectLst/>
-              <a:latin typeface="Times New Roman" panose="02020603050405020304" pitchFamily="18" charset="0"/>
-              <a:ea typeface="Times New Roman" panose="02020603050405020304" pitchFamily="18" charset="0"/>
-            </a:endParaRPr>
-          </a:p>
-          <a:p>
-            <a:pPr marL="0" marR="0" indent="0">
-              <a:spcBef>
-                <a:spcPts val="0"/>
-              </a:spcBef>
-              <a:spcAft>
-                <a:spcPts val="0"/>
-              </a:spcAft>
-              <a:buNone/>
-            </a:pPr>
-            <a:r>
-              <a:rPr lang="en-US" sz="1800" b="1" dirty="0">
-                <a:effectLst/>
-                <a:latin typeface="Courier New" panose="02070309020205020404" pitchFamily="49" charset="0"/>
-                <a:ea typeface="Times New Roman" panose="02020603050405020304" pitchFamily="18" charset="0"/>
-              </a:rPr>
-              <a:t>PROC</a:t>
-            </a:r>
-            <a:r>
-              <a:rPr lang="en-US" sz="1800" dirty="0">
-                <a:effectLst/>
-                <a:latin typeface="Courier New" panose="02070309020205020404" pitchFamily="49" charset="0"/>
-                <a:ea typeface="Times New Roman" panose="02020603050405020304" pitchFamily="18" charset="0"/>
-              </a:rPr>
-              <a:t> </a:t>
-            </a:r>
-            <a:r>
-              <a:rPr lang="en-US" sz="1800" b="1" dirty="0">
-                <a:effectLst/>
-                <a:latin typeface="Courier New" panose="02070309020205020404" pitchFamily="49" charset="0"/>
-                <a:ea typeface="Times New Roman" panose="02020603050405020304" pitchFamily="18" charset="0"/>
-              </a:rPr>
-              <a:t>IMPORT</a:t>
-            </a:r>
-            <a:r>
-              <a:rPr lang="en-US" sz="1800" dirty="0">
-                <a:effectLst/>
-                <a:latin typeface="Courier New" panose="02070309020205020404" pitchFamily="49" charset="0"/>
-                <a:ea typeface="Times New Roman" panose="02020603050405020304" pitchFamily="18" charset="0"/>
-              </a:rPr>
-              <a:t> DATAFILE = "</a:t>
-            </a:r>
-            <a:r>
-              <a:rPr lang="en-US" sz="1800" i="1" dirty="0" err="1">
-                <a:effectLst/>
-                <a:latin typeface="Courier New" panose="02070309020205020404" pitchFamily="49" charset="0"/>
-                <a:ea typeface="Times New Roman" panose="02020603050405020304" pitchFamily="18" charset="0"/>
-              </a:rPr>
-              <a:t>file_location</a:t>
-            </a:r>
-            <a:r>
-              <a:rPr lang="en-US" sz="1800" dirty="0">
-                <a:effectLst/>
-                <a:latin typeface="Courier New" panose="02070309020205020404" pitchFamily="49" charset="0"/>
-                <a:ea typeface="Times New Roman" panose="02020603050405020304" pitchFamily="18" charset="0"/>
-              </a:rPr>
-              <a:t>" </a:t>
-            </a:r>
-            <a:endParaRPr lang="en-US" sz="1800" dirty="0">
-              <a:effectLst/>
-              <a:latin typeface="Times New Roman" panose="02020603050405020304" pitchFamily="18" charset="0"/>
-              <a:ea typeface="Times New Roman" panose="02020603050405020304" pitchFamily="18" charset="0"/>
-            </a:endParaRPr>
-          </a:p>
-          <a:p>
-            <a:pPr marL="0" marR="0" indent="0">
-              <a:spcBef>
-                <a:spcPts val="0"/>
-              </a:spcBef>
-              <a:spcAft>
-                <a:spcPts val="0"/>
-              </a:spcAft>
-              <a:buNone/>
-            </a:pPr>
-            <a:r>
-              <a:rPr lang="en-US" sz="1800" dirty="0">
-                <a:effectLst/>
-                <a:latin typeface="Courier New" panose="02070309020205020404" pitchFamily="49" charset="0"/>
-                <a:ea typeface="Times New Roman" panose="02020603050405020304" pitchFamily="18" charset="0"/>
-              </a:rPr>
-              <a:t>	  OUT= </a:t>
-            </a:r>
-            <a:r>
-              <a:rPr lang="en-US" sz="1800" i="1" dirty="0" err="1">
-                <a:effectLst/>
-                <a:latin typeface="Courier New" panose="02070309020205020404" pitchFamily="49" charset="0"/>
-                <a:ea typeface="Times New Roman" panose="02020603050405020304" pitchFamily="18" charset="0"/>
-              </a:rPr>
-              <a:t>dataset_name</a:t>
-            </a:r>
-            <a:r>
-              <a:rPr lang="en-US" sz="1800" dirty="0">
-                <a:effectLst/>
-                <a:latin typeface="Courier New" panose="02070309020205020404" pitchFamily="49" charset="0"/>
-                <a:ea typeface="Times New Roman" panose="02020603050405020304" pitchFamily="18" charset="0"/>
-              </a:rPr>
-              <a:t> </a:t>
-            </a:r>
-          </a:p>
-          <a:p>
-            <a:pPr marL="0" marR="0" indent="0">
-              <a:spcBef>
-                <a:spcPts val="0"/>
-              </a:spcBef>
-              <a:spcAft>
-                <a:spcPts val="0"/>
-              </a:spcAft>
-              <a:buNone/>
-            </a:pPr>
-            <a:r>
-              <a:rPr lang="en-US" sz="1800" dirty="0">
-                <a:effectLst/>
-                <a:latin typeface="Courier New" panose="02070309020205020404" pitchFamily="49" charset="0"/>
-                <a:ea typeface="Times New Roman" panose="02020603050405020304" pitchFamily="18" charset="0"/>
-              </a:rPr>
-              <a:t>	  DBMS= </a:t>
-            </a:r>
-            <a:r>
-              <a:rPr lang="en-US" sz="1800" i="1" dirty="0" err="1">
-                <a:effectLst/>
-                <a:latin typeface="Courier New" panose="02070309020205020404" pitchFamily="49" charset="0"/>
-                <a:ea typeface="Times New Roman" panose="02020603050405020304" pitchFamily="18" charset="0"/>
-              </a:rPr>
-              <a:t>file_type</a:t>
-            </a:r>
-            <a:r>
-              <a:rPr lang="en-US" sz="1800" dirty="0">
-                <a:effectLst/>
-                <a:latin typeface="Courier New" panose="02070309020205020404" pitchFamily="49" charset="0"/>
-                <a:ea typeface="Times New Roman" panose="02020603050405020304" pitchFamily="18" charset="0"/>
-              </a:rPr>
-              <a:t> </a:t>
-            </a:r>
-          </a:p>
-          <a:p>
-            <a:pPr marL="0" marR="0" indent="0">
-              <a:spcBef>
-                <a:spcPts val="0"/>
-              </a:spcBef>
-              <a:spcAft>
-                <a:spcPts val="0"/>
-              </a:spcAft>
-              <a:buNone/>
-            </a:pPr>
-            <a:r>
-              <a:rPr lang="en-US" sz="1800" dirty="0">
-                <a:effectLst/>
-                <a:latin typeface="Courier New" panose="02070309020205020404" pitchFamily="49" charset="0"/>
-                <a:ea typeface="Times New Roman" panose="02020603050405020304" pitchFamily="18" charset="0"/>
-              </a:rPr>
-              <a:t>	  REPLACE;</a:t>
-            </a:r>
-            <a:endParaRPr lang="en-US" sz="1800" dirty="0">
-              <a:effectLst/>
-              <a:latin typeface="Times New Roman" panose="02020603050405020304" pitchFamily="18" charset="0"/>
-              <a:ea typeface="Times New Roman" panose="02020603050405020304" pitchFamily="18" charset="0"/>
-            </a:endParaRPr>
-          </a:p>
-          <a:p>
-            <a:pPr marL="0" marR="0" indent="0">
-              <a:spcBef>
-                <a:spcPts val="0"/>
-              </a:spcBef>
-              <a:spcAft>
-                <a:spcPts val="0"/>
-              </a:spcAft>
-              <a:buNone/>
-            </a:pPr>
-            <a:r>
-              <a:rPr lang="en-US" sz="1800" dirty="0">
-                <a:effectLst/>
-                <a:latin typeface="Courier New" panose="02070309020205020404" pitchFamily="49" charset="0"/>
-                <a:ea typeface="Times New Roman" panose="02020603050405020304" pitchFamily="18" charset="0"/>
-              </a:rPr>
-              <a:t>     /*SHEET="XXXX"; </a:t>
-            </a:r>
-            <a:r>
-              <a:rPr lang="en-US" dirty="0">
-                <a:latin typeface="Courier New" panose="02070309020205020404" pitchFamily="49" charset="0"/>
-                <a:ea typeface="Times New Roman" panose="02020603050405020304" pitchFamily="18" charset="0"/>
-                <a:sym typeface="Wingdings" panose="05000000000000000000" pitchFamily="2" charset="2"/>
-              </a:rPr>
-              <a:t>&lt;-- include this code if loading in multiple sheets */</a:t>
-            </a:r>
-            <a:r>
-              <a:rPr lang="en-US" sz="1800" dirty="0">
-                <a:effectLst/>
-                <a:latin typeface="Courier New" panose="02070309020205020404" pitchFamily="49" charset="0"/>
-                <a:ea typeface="Times New Roman" panose="02020603050405020304" pitchFamily="18" charset="0"/>
-              </a:rPr>
-              <a:t> </a:t>
-            </a:r>
-            <a:endParaRPr lang="en-US" sz="1800" dirty="0">
-              <a:effectLst/>
-              <a:latin typeface="Times New Roman" panose="02020603050405020304" pitchFamily="18" charset="0"/>
-              <a:ea typeface="Times New Roman" panose="02020603050405020304" pitchFamily="18" charset="0"/>
-            </a:endParaRPr>
-          </a:p>
-          <a:p>
-            <a:pPr marL="0" marR="0" indent="0">
-              <a:spcBef>
-                <a:spcPts val="0"/>
-              </a:spcBef>
-              <a:spcAft>
-                <a:spcPts val="0"/>
-              </a:spcAft>
-              <a:buNone/>
-            </a:pPr>
-            <a:r>
-              <a:rPr lang="en-US" sz="1800" dirty="0">
-                <a:effectLst/>
-                <a:latin typeface="Courier New" panose="02070309020205020404" pitchFamily="49" charset="0"/>
-                <a:ea typeface="Times New Roman" panose="02020603050405020304" pitchFamily="18" charset="0"/>
-              </a:rPr>
-              <a:t>     GETNAMES=YES;</a:t>
-            </a:r>
-            <a:endParaRPr lang="en-US" sz="1800" dirty="0">
-              <a:effectLst/>
-              <a:latin typeface="Times New Roman" panose="02020603050405020304" pitchFamily="18" charset="0"/>
-              <a:ea typeface="Times New Roman" panose="02020603050405020304" pitchFamily="18" charset="0"/>
-            </a:endParaRPr>
-          </a:p>
-          <a:p>
-            <a:pPr marL="0" marR="0" indent="0">
-              <a:spcBef>
-                <a:spcPts val="0"/>
-              </a:spcBef>
-              <a:spcAft>
-                <a:spcPts val="0"/>
-              </a:spcAft>
-              <a:buNone/>
-            </a:pPr>
-            <a:r>
-              <a:rPr lang="en-US" sz="1800" b="1" dirty="0">
-                <a:effectLst/>
-                <a:latin typeface="Courier New" panose="02070309020205020404" pitchFamily="49" charset="0"/>
-                <a:ea typeface="Times New Roman" panose="02020603050405020304" pitchFamily="18" charset="0"/>
-              </a:rPr>
-              <a:t>RUN</a:t>
-            </a:r>
-            <a:r>
-              <a:rPr lang="en-US" sz="1800" dirty="0">
-                <a:effectLst/>
-                <a:latin typeface="Courier New" panose="02070309020205020404" pitchFamily="49" charset="0"/>
-                <a:ea typeface="Times New Roman" panose="02020603050405020304" pitchFamily="18" charset="0"/>
-              </a:rPr>
-              <a:t>;</a:t>
-            </a:r>
-            <a:endParaRPr lang="en-US" sz="1800" dirty="0">
-              <a:effectLst/>
-              <a:latin typeface="Times New Roman" panose="02020603050405020304" pitchFamily="18" charset="0"/>
-              <a:ea typeface="Times New Roman" panose="02020603050405020304" pitchFamily="18" charset="0"/>
-            </a:endParaRPr>
-          </a:p>
-          <a:p>
-            <a:pPr marL="0" marR="0" indent="0" algn="just">
-              <a:spcBef>
-                <a:spcPts val="0"/>
-              </a:spcBef>
-              <a:spcAft>
-                <a:spcPts val="0"/>
-              </a:spcAft>
-              <a:buNone/>
-            </a:pPr>
-            <a:endParaRPr lang="en-US" sz="1800" dirty="0">
-              <a:effectLst/>
-              <a:latin typeface="Times New Roman" panose="02020603050405020304" pitchFamily="18" charset="0"/>
-              <a:ea typeface="Times New Roman" panose="02020603050405020304" pitchFamily="18" charset="0"/>
-            </a:endParaRPr>
-          </a:p>
-          <a:p>
-            <a:pPr marL="0" marR="0" algn="just">
-              <a:spcBef>
-                <a:spcPts val="0"/>
-              </a:spcBef>
-              <a:spcAft>
-                <a:spcPts val="0"/>
-              </a:spcAft>
-            </a:pPr>
-            <a:endParaRPr lang="en-US" sz="1800" dirty="0">
-              <a:effectLst/>
-              <a:latin typeface="Times New Roman" panose="02020603050405020304" pitchFamily="18" charset="0"/>
-              <a:ea typeface="Times New Roman" panose="02020603050405020304" pitchFamily="18" charset="0"/>
-            </a:endParaRPr>
-          </a:p>
-          <a:p>
-            <a:pPr marL="0" marR="0" indent="0" algn="just">
-              <a:spcBef>
-                <a:spcPts val="0"/>
-              </a:spcBef>
-              <a:spcAft>
-                <a:spcPts val="0"/>
-              </a:spcAft>
-              <a:buNone/>
-            </a:pPr>
-            <a:r>
-              <a:rPr lang="en-US" sz="1800" dirty="0">
-                <a:effectLst/>
-                <a:latin typeface="Times New Roman" panose="02020603050405020304" pitchFamily="18" charset="0"/>
-                <a:ea typeface="Times New Roman" panose="02020603050405020304" pitchFamily="18" charset="0"/>
-              </a:rPr>
-              <a:t> </a:t>
-            </a:r>
-          </a:p>
-          <a:p>
-            <a:pPr marL="0" indent="0">
-              <a:buNone/>
-            </a:pPr>
-            <a:endParaRPr lang="en-US" dirty="0"/>
-          </a:p>
-        </p:txBody>
-      </p:sp>
-      <p:sp>
-        <p:nvSpPr>
-          <p:cNvPr id="7" name="Oval 6">
-            <a:extLst>
-              <a:ext uri="{FF2B5EF4-FFF2-40B4-BE49-F238E27FC236}">
-                <a16:creationId xmlns:a16="http://schemas.microsoft.com/office/drawing/2014/main" id="{55FAE82C-7051-419E-AE77-796AAEEF54C3}"/>
-              </a:ext>
-            </a:extLst>
-          </p:cNvPr>
-          <p:cNvSpPr/>
-          <p:nvPr/>
-        </p:nvSpPr>
-        <p:spPr>
-          <a:xfrm>
-            <a:off x="1491564" y="3949762"/>
-            <a:ext cx="1869120" cy="484119"/>
-          </a:xfrm>
-          <a:prstGeom prst="ellipse">
-            <a:avLst/>
-          </a:prstGeom>
-          <a:noFill/>
-          <a:ln>
-            <a:solidFill>
-              <a:srgbClr val="FF0000"/>
-            </a:solidFill>
-          </a:ln>
-        </p:spPr>
-        <p:style>
-          <a:lnRef idx="2">
-            <a:schemeClr val="accent1">
-              <a:shade val="50000"/>
-            </a:schemeClr>
-          </a:lnRef>
-          <a:fillRef idx="1">
-            <a:schemeClr val="accent1"/>
-          </a:fillRef>
-          <a:effectRef idx="0">
-            <a:schemeClr val="accent1"/>
-          </a:effectRef>
-          <a:fontRef idx="minor">
-            <a:schemeClr val="lt1"/>
-          </a:fontRef>
-        </p:style>
-        <p:txBody>
-          <a:bodyPr rtlCol="0" anchor="ctr"/>
-          <a:lstStyle/>
-          <a:p>
-            <a:pPr algn="ctr"/>
-            <a:endParaRPr lang="en-US"/>
-          </a:p>
-        </p:txBody>
-      </p:sp>
-      <p:cxnSp>
-        <p:nvCxnSpPr>
-          <p:cNvPr id="8" name="Straight Arrow Connector 7">
-            <a:extLst>
-              <a:ext uri="{FF2B5EF4-FFF2-40B4-BE49-F238E27FC236}">
-                <a16:creationId xmlns:a16="http://schemas.microsoft.com/office/drawing/2014/main" id="{BE5974BA-FA32-4113-BD49-7459B2C626B9}"/>
-              </a:ext>
-            </a:extLst>
-          </p:cNvPr>
-          <p:cNvCxnSpPr>
-            <a:cxnSpLocks/>
-          </p:cNvCxnSpPr>
-          <p:nvPr/>
-        </p:nvCxnSpPr>
-        <p:spPr>
-          <a:xfrm>
-            <a:off x="2856809" y="4573488"/>
-            <a:ext cx="437522" cy="841248"/>
-          </a:xfrm>
-          <a:prstGeom prst="straightConnector1">
-            <a:avLst/>
-          </a:prstGeom>
-          <a:ln w="38100">
-            <a:solidFill>
-              <a:srgbClr val="FF0000"/>
-            </a:solidFill>
-            <a:tailEnd type="triangle"/>
-          </a:ln>
-        </p:spPr>
-        <p:style>
-          <a:lnRef idx="1">
-            <a:schemeClr val="accent1"/>
-          </a:lnRef>
-          <a:fillRef idx="0">
-            <a:schemeClr val="accent1"/>
-          </a:fillRef>
-          <a:effectRef idx="0">
-            <a:schemeClr val="accent1"/>
-          </a:effectRef>
-          <a:fontRef idx="minor">
-            <a:schemeClr val="tx1"/>
-          </a:fontRef>
-        </p:style>
-      </p:cxnSp>
-      <p:sp>
-        <p:nvSpPr>
-          <p:cNvPr id="11" name="TextBox 10">
-            <a:extLst>
-              <a:ext uri="{FF2B5EF4-FFF2-40B4-BE49-F238E27FC236}">
-                <a16:creationId xmlns:a16="http://schemas.microsoft.com/office/drawing/2014/main" id="{D696B3B1-F16B-42D6-B2A2-CF8FF356012C}"/>
-              </a:ext>
-            </a:extLst>
-          </p:cNvPr>
-          <p:cNvSpPr txBox="1"/>
-          <p:nvPr/>
-        </p:nvSpPr>
-        <p:spPr>
-          <a:xfrm>
-            <a:off x="1185948" y="5336821"/>
-            <a:ext cx="3779244" cy="646331"/>
-          </a:xfrm>
-          <a:prstGeom prst="rect">
-            <a:avLst/>
-          </a:prstGeom>
-          <a:noFill/>
-        </p:spPr>
-        <p:txBody>
-          <a:bodyPr wrap="square" rtlCol="0">
-            <a:spAutoFit/>
-          </a:bodyPr>
-          <a:lstStyle/>
-          <a:p>
-            <a:r>
-              <a:rPr lang="en-US" dirty="0"/>
-              <a:t>Only needs for xlsx formats when you are choosing a particular sheet.</a:t>
-            </a:r>
-          </a:p>
-        </p:txBody>
-      </p:sp>
-    </p:spTree>
-    <p:extLst>
-      <p:ext uri="{BB962C8B-B14F-4D97-AF65-F5344CB8AC3E}">
-        <p14:creationId xmlns:p14="http://schemas.microsoft.com/office/powerpoint/2010/main" val="2309926911"/>
-      </p:ext>
-    </p:extLst>
-  </p:cSld>
-  <p:clrMapOvr>
-    <a:masterClrMapping/>
-  </p:clrMapOvr>
-</p:sld>
-</file>
-
-<file path=ppt/slides/slide66.xml><?xml version="1.0" encoding="utf-8"?>
-<p:sld xmlns:a="http://schemas.openxmlformats.org/drawingml/2006/main" xmlns:r="http://schemas.openxmlformats.org/officeDocument/2006/relationships" xmlns:p="http://schemas.openxmlformats.org/presentationml/2006/main">
-  <p:cSld>
-    <p:spTree>
-      <p:nvGrpSpPr>
-        <p:cNvPr id="1" name=""/>
-        <p:cNvGrpSpPr/>
-        <p:nvPr/>
-      </p:nvGrpSpPr>
-      <p:grpSpPr>
-        <a:xfrm>
-          <a:off x="0" y="0"/>
-          <a:ext cx="0" cy="0"/>
-          <a:chOff x="0" y="0"/>
-          <a:chExt cx="0" cy="0"/>
-        </a:xfrm>
-      </p:grpSpPr>
-      <p:sp>
-        <p:nvSpPr>
-          <p:cNvPr id="2" name="Title 1">
-            <a:extLst>
-              <a:ext uri="{FF2B5EF4-FFF2-40B4-BE49-F238E27FC236}">
-                <a16:creationId xmlns:a16="http://schemas.microsoft.com/office/drawing/2014/main" id="{75365ECF-BE3C-4F9D-9AAE-0A74B7F23673}"/>
-              </a:ext>
-            </a:extLst>
-          </p:cNvPr>
-          <p:cNvSpPr>
-            <a:spLocks noGrp="1"/>
-          </p:cNvSpPr>
-          <p:nvPr>
-            <p:ph type="title"/>
-          </p:nvPr>
-        </p:nvSpPr>
-        <p:spPr/>
-        <p:txBody>
-          <a:bodyPr/>
-          <a:lstStyle/>
-          <a:p>
-            <a:r>
-              <a:rPr lang="en-US" dirty="0"/>
-              <a:t>Entering/Loading Data Option 3: Proc import</a:t>
-            </a:r>
-          </a:p>
-        </p:txBody>
-      </p:sp>
-      <p:sp>
-        <p:nvSpPr>
-          <p:cNvPr id="3" name="Content Placeholder 2">
-            <a:extLst>
-              <a:ext uri="{FF2B5EF4-FFF2-40B4-BE49-F238E27FC236}">
-                <a16:creationId xmlns:a16="http://schemas.microsoft.com/office/drawing/2014/main" id="{5E28B520-55D4-47A5-9AA8-3FF58AB5C0D8}"/>
-              </a:ext>
-            </a:extLst>
-          </p:cNvPr>
-          <p:cNvSpPr>
-            <a:spLocks noGrp="1"/>
-          </p:cNvSpPr>
-          <p:nvPr>
-            <p:ph idx="1"/>
-          </p:nvPr>
-        </p:nvSpPr>
-        <p:spPr>
-          <a:xfrm>
-            <a:off x="685801" y="1778169"/>
-            <a:ext cx="11686031" cy="3909399"/>
-          </a:xfrm>
-        </p:spPr>
-        <p:txBody>
-          <a:bodyPr>
-            <a:normAutofit fontScale="92500" lnSpcReduction="10000"/>
-          </a:bodyPr>
-          <a:lstStyle/>
-          <a:p>
-            <a:pPr marL="0" marR="0" algn="just">
-              <a:spcBef>
-                <a:spcPts val="0"/>
-              </a:spcBef>
-              <a:spcAft>
-                <a:spcPts val="0"/>
-              </a:spcAft>
-            </a:pPr>
-            <a:r>
-              <a:rPr lang="en-US" sz="1800" dirty="0">
-                <a:effectLst/>
-                <a:latin typeface="Times New Roman" panose="02020603050405020304" pitchFamily="18" charset="0"/>
-                <a:ea typeface="Times New Roman" panose="02020603050405020304" pitchFamily="18" charset="0"/>
-              </a:rPr>
-              <a:t>SAS Proc Import can import Excel data as well as other types of files such as .txt files</a:t>
-            </a:r>
-          </a:p>
-          <a:p>
-            <a:pPr marL="0" marR="0" algn="just">
-              <a:spcBef>
-                <a:spcPts val="0"/>
-              </a:spcBef>
-              <a:spcAft>
-                <a:spcPts val="0"/>
-              </a:spcAft>
-            </a:pPr>
-            <a:endParaRPr lang="en-US" sz="1800" dirty="0">
-              <a:effectLst/>
-              <a:latin typeface="Times New Roman" panose="02020603050405020304" pitchFamily="18" charset="0"/>
-              <a:ea typeface="Times New Roman" panose="02020603050405020304" pitchFamily="18" charset="0"/>
-            </a:endParaRPr>
-          </a:p>
-          <a:p>
-            <a:pPr marL="0" marR="0" algn="just">
-              <a:spcBef>
-                <a:spcPts val="0"/>
-              </a:spcBef>
-              <a:spcAft>
-                <a:spcPts val="0"/>
-              </a:spcAft>
-            </a:pPr>
-            <a:r>
-              <a:rPr lang="en-US" dirty="0">
-                <a:latin typeface="Times New Roman" panose="02020603050405020304" pitchFamily="18" charset="0"/>
-                <a:ea typeface="Times New Roman" panose="02020603050405020304" pitchFamily="18" charset="0"/>
-              </a:rPr>
-              <a:t>Importing the</a:t>
-            </a:r>
-            <a:r>
-              <a:rPr lang="en-US" sz="1800" dirty="0">
-                <a:effectLst/>
-                <a:latin typeface="Times New Roman" panose="02020603050405020304" pitchFamily="18" charset="0"/>
-                <a:ea typeface="Times New Roman" panose="02020603050405020304" pitchFamily="18" charset="0"/>
-              </a:rPr>
-              <a:t> data will still create a temporary data set in a SAS library</a:t>
-            </a:r>
-          </a:p>
-          <a:p>
-            <a:pPr marL="0" marR="0" algn="just">
-              <a:spcBef>
-                <a:spcPts val="0"/>
-              </a:spcBef>
-              <a:spcAft>
-                <a:spcPts val="0"/>
-              </a:spcAft>
-            </a:pPr>
-            <a:endParaRPr lang="en-US" dirty="0">
-              <a:latin typeface="Times New Roman" panose="02020603050405020304" pitchFamily="18" charset="0"/>
-              <a:ea typeface="Times New Roman" panose="02020603050405020304" pitchFamily="18" charset="0"/>
-            </a:endParaRPr>
-          </a:p>
-          <a:p>
-            <a:pPr marL="0" marR="0" algn="just">
-              <a:spcBef>
-                <a:spcPts val="0"/>
-              </a:spcBef>
-              <a:spcAft>
-                <a:spcPts val="0"/>
-              </a:spcAft>
-            </a:pPr>
-            <a:r>
-              <a:rPr lang="en-US" sz="1800" dirty="0">
-                <a:effectLst/>
-                <a:latin typeface="Times New Roman" panose="02020603050405020304" pitchFamily="18" charset="0"/>
-                <a:ea typeface="Times New Roman" panose="02020603050405020304" pitchFamily="18" charset="0"/>
-              </a:rPr>
-              <a:t>General Code:</a:t>
-            </a:r>
-          </a:p>
-          <a:p>
-            <a:pPr marL="0" marR="0" algn="just">
-              <a:spcBef>
-                <a:spcPts val="0"/>
-              </a:spcBef>
-              <a:spcAft>
-                <a:spcPts val="0"/>
-              </a:spcAft>
-            </a:pPr>
-            <a:endParaRPr lang="en-US" sz="1800" dirty="0">
-              <a:effectLst/>
-              <a:latin typeface="Times New Roman" panose="02020603050405020304" pitchFamily="18" charset="0"/>
-              <a:ea typeface="Times New Roman" panose="02020603050405020304" pitchFamily="18" charset="0"/>
-            </a:endParaRPr>
-          </a:p>
-          <a:p>
-            <a:pPr marL="0" marR="0" indent="0">
-              <a:spcBef>
-                <a:spcPts val="0"/>
-              </a:spcBef>
-              <a:spcAft>
-                <a:spcPts val="0"/>
-              </a:spcAft>
-              <a:buNone/>
-            </a:pPr>
-            <a:r>
-              <a:rPr lang="en-US" sz="1800" b="1" dirty="0">
-                <a:effectLst/>
-                <a:latin typeface="Courier New" panose="02070309020205020404" pitchFamily="49" charset="0"/>
-                <a:ea typeface="Times New Roman" panose="02020603050405020304" pitchFamily="18" charset="0"/>
-              </a:rPr>
-              <a:t>PROC</a:t>
-            </a:r>
-            <a:r>
-              <a:rPr lang="en-US" sz="1800" dirty="0">
-                <a:effectLst/>
-                <a:latin typeface="Courier New" panose="02070309020205020404" pitchFamily="49" charset="0"/>
-                <a:ea typeface="Times New Roman" panose="02020603050405020304" pitchFamily="18" charset="0"/>
-              </a:rPr>
-              <a:t> </a:t>
-            </a:r>
-            <a:r>
-              <a:rPr lang="en-US" sz="1800" b="1" dirty="0">
-                <a:effectLst/>
-                <a:latin typeface="Courier New" panose="02070309020205020404" pitchFamily="49" charset="0"/>
-                <a:ea typeface="Times New Roman" panose="02020603050405020304" pitchFamily="18" charset="0"/>
-              </a:rPr>
-              <a:t>IMPORT</a:t>
-            </a:r>
-            <a:r>
-              <a:rPr lang="en-US" sz="1800" dirty="0">
-                <a:effectLst/>
-                <a:latin typeface="Courier New" panose="02070309020205020404" pitchFamily="49" charset="0"/>
-                <a:ea typeface="Times New Roman" panose="02020603050405020304" pitchFamily="18" charset="0"/>
-              </a:rPr>
-              <a:t> DATAFILE = "</a:t>
-            </a:r>
-            <a:r>
-              <a:rPr lang="en-US" sz="1800" i="1" dirty="0" err="1">
-                <a:effectLst/>
-                <a:latin typeface="Courier New" panose="02070309020205020404" pitchFamily="49" charset="0"/>
-                <a:ea typeface="Times New Roman" panose="02020603050405020304" pitchFamily="18" charset="0"/>
-              </a:rPr>
-              <a:t>file_location</a:t>
-            </a:r>
-            <a:r>
-              <a:rPr lang="en-US" sz="1800" dirty="0">
-                <a:effectLst/>
-                <a:latin typeface="Courier New" panose="02070309020205020404" pitchFamily="49" charset="0"/>
-                <a:ea typeface="Times New Roman" panose="02020603050405020304" pitchFamily="18" charset="0"/>
-              </a:rPr>
-              <a:t>" </a:t>
-            </a:r>
-          </a:p>
-          <a:p>
-            <a:pPr marL="0" marR="0" indent="0">
-              <a:spcBef>
-                <a:spcPts val="0"/>
-              </a:spcBef>
-              <a:spcAft>
-                <a:spcPts val="0"/>
-              </a:spcAft>
-              <a:buNone/>
-            </a:pPr>
-            <a:r>
-              <a:rPr lang="en-US" dirty="0">
-                <a:latin typeface="Courier New" panose="02070309020205020404" pitchFamily="49" charset="0"/>
-                <a:ea typeface="Times New Roman" panose="02020603050405020304" pitchFamily="18" charset="0"/>
-              </a:rPr>
-              <a:t>	  </a:t>
-            </a:r>
-            <a:r>
-              <a:rPr lang="en-US" sz="1800" dirty="0">
-                <a:effectLst/>
-                <a:latin typeface="Courier New" panose="02070309020205020404" pitchFamily="49" charset="0"/>
-                <a:ea typeface="Times New Roman" panose="02020603050405020304" pitchFamily="18" charset="0"/>
-              </a:rPr>
-              <a:t>OUT= </a:t>
-            </a:r>
-            <a:r>
-              <a:rPr lang="en-US" sz="1800" i="1" dirty="0" err="1">
-                <a:effectLst/>
-                <a:latin typeface="Courier New" panose="02070309020205020404" pitchFamily="49" charset="0"/>
-                <a:ea typeface="Times New Roman" panose="02020603050405020304" pitchFamily="18" charset="0"/>
-              </a:rPr>
-              <a:t>dataset_name</a:t>
-            </a:r>
-            <a:r>
-              <a:rPr lang="en-US" sz="1800" dirty="0">
-                <a:effectLst/>
-                <a:latin typeface="Courier New" panose="02070309020205020404" pitchFamily="49" charset="0"/>
-                <a:ea typeface="Times New Roman" panose="02020603050405020304" pitchFamily="18" charset="0"/>
-              </a:rPr>
-              <a:t> </a:t>
-            </a:r>
-            <a:endParaRPr lang="en-US" sz="1800" dirty="0">
-              <a:effectLst/>
-              <a:latin typeface="Times New Roman" panose="02020603050405020304" pitchFamily="18" charset="0"/>
-              <a:ea typeface="Times New Roman" panose="02020603050405020304" pitchFamily="18" charset="0"/>
-            </a:endParaRPr>
-          </a:p>
-          <a:p>
-            <a:pPr marL="0" marR="0" indent="0">
-              <a:spcBef>
-                <a:spcPts val="0"/>
-              </a:spcBef>
-              <a:spcAft>
-                <a:spcPts val="0"/>
-              </a:spcAft>
-              <a:buNone/>
-            </a:pPr>
-            <a:r>
-              <a:rPr lang="en-US" sz="1800" dirty="0">
-                <a:effectLst/>
-                <a:latin typeface="Courier New" panose="02070309020205020404" pitchFamily="49" charset="0"/>
-                <a:ea typeface="Times New Roman" panose="02020603050405020304" pitchFamily="18" charset="0"/>
-              </a:rPr>
-              <a:t>     DBMS= </a:t>
-            </a:r>
-            <a:r>
-              <a:rPr lang="en-US" sz="1800" i="1" dirty="0" err="1">
-                <a:effectLst/>
-                <a:latin typeface="Courier New" panose="02070309020205020404" pitchFamily="49" charset="0"/>
-                <a:ea typeface="Times New Roman" panose="02020603050405020304" pitchFamily="18" charset="0"/>
-              </a:rPr>
-              <a:t>file_type</a:t>
-            </a:r>
-            <a:r>
-              <a:rPr lang="en-US" sz="1800" dirty="0">
-                <a:effectLst/>
-                <a:latin typeface="Courier New" panose="02070309020205020404" pitchFamily="49" charset="0"/>
-                <a:ea typeface="Times New Roman" panose="02020603050405020304" pitchFamily="18" charset="0"/>
-              </a:rPr>
-              <a:t> </a:t>
-            </a:r>
-          </a:p>
-          <a:p>
-            <a:pPr marL="0" marR="0" indent="0">
-              <a:spcBef>
-                <a:spcPts val="0"/>
-              </a:spcBef>
-              <a:spcAft>
-                <a:spcPts val="0"/>
-              </a:spcAft>
-              <a:buNone/>
-            </a:pPr>
-            <a:r>
-              <a:rPr lang="en-US" sz="1800" dirty="0">
-                <a:effectLst/>
-                <a:latin typeface="Courier New" panose="02070309020205020404" pitchFamily="49" charset="0"/>
-                <a:ea typeface="Times New Roman" panose="02020603050405020304" pitchFamily="18" charset="0"/>
-              </a:rPr>
-              <a:t>     REPLACE;</a:t>
-            </a:r>
-            <a:endParaRPr lang="en-US" sz="1800" dirty="0">
-              <a:effectLst/>
-              <a:latin typeface="Times New Roman" panose="02020603050405020304" pitchFamily="18" charset="0"/>
-              <a:ea typeface="Times New Roman" panose="02020603050405020304" pitchFamily="18" charset="0"/>
-            </a:endParaRPr>
-          </a:p>
-          <a:p>
-            <a:pPr marL="0" marR="0" indent="0">
-              <a:spcBef>
-                <a:spcPts val="0"/>
-              </a:spcBef>
-              <a:spcAft>
-                <a:spcPts val="0"/>
-              </a:spcAft>
-              <a:buNone/>
-            </a:pPr>
-            <a:r>
-              <a:rPr lang="en-US" sz="1800" dirty="0">
-                <a:effectLst/>
-                <a:latin typeface="Courier New" panose="02070309020205020404" pitchFamily="49" charset="0"/>
-                <a:ea typeface="Times New Roman" panose="02020603050405020304" pitchFamily="18" charset="0"/>
-              </a:rPr>
-              <a:t>     /*SHEET="XXXX"; </a:t>
-            </a:r>
-            <a:r>
-              <a:rPr lang="en-US" dirty="0">
-                <a:latin typeface="Courier New" panose="02070309020205020404" pitchFamily="49" charset="0"/>
-                <a:ea typeface="Times New Roman" panose="02020603050405020304" pitchFamily="18" charset="0"/>
-                <a:sym typeface="Wingdings" panose="05000000000000000000" pitchFamily="2" charset="2"/>
-              </a:rPr>
-              <a:t>&lt;-- include this code if loading in multiple sheets */</a:t>
-            </a:r>
-            <a:r>
-              <a:rPr lang="en-US" sz="1800" dirty="0">
-                <a:effectLst/>
-                <a:latin typeface="Courier New" panose="02070309020205020404" pitchFamily="49" charset="0"/>
-                <a:ea typeface="Times New Roman" panose="02020603050405020304" pitchFamily="18" charset="0"/>
-              </a:rPr>
-              <a:t> </a:t>
-            </a:r>
-            <a:endParaRPr lang="en-US" sz="1800" dirty="0">
-              <a:effectLst/>
-              <a:latin typeface="Times New Roman" panose="02020603050405020304" pitchFamily="18" charset="0"/>
-              <a:ea typeface="Times New Roman" panose="02020603050405020304" pitchFamily="18" charset="0"/>
-            </a:endParaRPr>
-          </a:p>
-          <a:p>
-            <a:pPr marL="0" marR="0" indent="0">
-              <a:spcBef>
-                <a:spcPts val="0"/>
-              </a:spcBef>
-              <a:spcAft>
-                <a:spcPts val="0"/>
-              </a:spcAft>
-              <a:buNone/>
-            </a:pPr>
-            <a:r>
-              <a:rPr lang="en-US" sz="1800" dirty="0">
-                <a:effectLst/>
-                <a:latin typeface="Courier New" panose="02070309020205020404" pitchFamily="49" charset="0"/>
-                <a:ea typeface="Times New Roman" panose="02020603050405020304" pitchFamily="18" charset="0"/>
-              </a:rPr>
-              <a:t>     GETNAMES=YES;</a:t>
-            </a:r>
-            <a:endParaRPr lang="en-US" sz="1800" dirty="0">
-              <a:effectLst/>
-              <a:latin typeface="Times New Roman" panose="02020603050405020304" pitchFamily="18" charset="0"/>
-              <a:ea typeface="Times New Roman" panose="02020603050405020304" pitchFamily="18" charset="0"/>
-            </a:endParaRPr>
-          </a:p>
-          <a:p>
-            <a:pPr marL="0" marR="0" indent="0">
-              <a:spcBef>
-                <a:spcPts val="0"/>
-              </a:spcBef>
-              <a:spcAft>
-                <a:spcPts val="0"/>
-              </a:spcAft>
-              <a:buNone/>
-            </a:pPr>
-            <a:r>
-              <a:rPr lang="en-US" sz="1800" b="1" dirty="0">
-                <a:effectLst/>
-                <a:latin typeface="Courier New" panose="02070309020205020404" pitchFamily="49" charset="0"/>
-                <a:ea typeface="Times New Roman" panose="02020603050405020304" pitchFamily="18" charset="0"/>
-              </a:rPr>
-              <a:t>RUN</a:t>
-            </a:r>
-            <a:r>
-              <a:rPr lang="en-US" sz="1800" dirty="0">
-                <a:effectLst/>
-                <a:latin typeface="Courier New" panose="02070309020205020404" pitchFamily="49" charset="0"/>
-                <a:ea typeface="Times New Roman" panose="02020603050405020304" pitchFamily="18" charset="0"/>
-              </a:rPr>
-              <a:t>;</a:t>
-            </a:r>
-            <a:endParaRPr lang="en-US" sz="1800" dirty="0">
-              <a:effectLst/>
-              <a:latin typeface="Times New Roman" panose="02020603050405020304" pitchFamily="18" charset="0"/>
-              <a:ea typeface="Times New Roman" panose="02020603050405020304" pitchFamily="18" charset="0"/>
-            </a:endParaRPr>
-          </a:p>
-          <a:p>
-            <a:pPr marL="0" marR="0" indent="0" algn="just">
-              <a:spcBef>
-                <a:spcPts val="0"/>
-              </a:spcBef>
-              <a:spcAft>
-                <a:spcPts val="0"/>
-              </a:spcAft>
-              <a:buNone/>
-            </a:pPr>
-            <a:endParaRPr lang="en-US" sz="1800" dirty="0">
-              <a:effectLst/>
-              <a:latin typeface="Times New Roman" panose="02020603050405020304" pitchFamily="18" charset="0"/>
-              <a:ea typeface="Times New Roman" panose="02020603050405020304" pitchFamily="18" charset="0"/>
-            </a:endParaRPr>
-          </a:p>
-          <a:p>
-            <a:pPr marL="0" marR="0" algn="just">
-              <a:spcBef>
-                <a:spcPts val="0"/>
-              </a:spcBef>
-              <a:spcAft>
-                <a:spcPts val="0"/>
-              </a:spcAft>
-            </a:pPr>
-            <a:endParaRPr lang="en-US" sz="1800" dirty="0">
-              <a:effectLst/>
-              <a:latin typeface="Times New Roman" panose="02020603050405020304" pitchFamily="18" charset="0"/>
-              <a:ea typeface="Times New Roman" panose="02020603050405020304" pitchFamily="18" charset="0"/>
-            </a:endParaRPr>
-          </a:p>
-          <a:p>
-            <a:pPr marL="0" marR="0" indent="0" algn="just">
-              <a:spcBef>
-                <a:spcPts val="0"/>
-              </a:spcBef>
-              <a:spcAft>
-                <a:spcPts val="0"/>
-              </a:spcAft>
-              <a:buNone/>
-            </a:pPr>
-            <a:r>
-              <a:rPr lang="en-US" sz="1800" dirty="0">
-                <a:effectLst/>
-                <a:latin typeface="Times New Roman" panose="02020603050405020304" pitchFamily="18" charset="0"/>
-                <a:ea typeface="Times New Roman" panose="02020603050405020304" pitchFamily="18" charset="0"/>
-              </a:rPr>
-              <a:t> </a:t>
-            </a:r>
-          </a:p>
-          <a:p>
-            <a:pPr marL="0" indent="0">
-              <a:buNone/>
-            </a:pPr>
-            <a:endParaRPr lang="en-US" dirty="0"/>
-          </a:p>
-        </p:txBody>
-      </p:sp>
-      <p:sp>
-        <p:nvSpPr>
-          <p:cNvPr id="7" name="Oval 6">
-            <a:extLst>
-              <a:ext uri="{FF2B5EF4-FFF2-40B4-BE49-F238E27FC236}">
-                <a16:creationId xmlns:a16="http://schemas.microsoft.com/office/drawing/2014/main" id="{55FAE82C-7051-419E-AE77-796AAEEF54C3}"/>
-              </a:ext>
-            </a:extLst>
-          </p:cNvPr>
-          <p:cNvSpPr/>
-          <p:nvPr/>
-        </p:nvSpPr>
-        <p:spPr>
-          <a:xfrm>
-            <a:off x="1293313" y="4233672"/>
-            <a:ext cx="1869120" cy="386533"/>
-          </a:xfrm>
-          <a:prstGeom prst="ellipse">
-            <a:avLst/>
-          </a:prstGeom>
-          <a:noFill/>
-          <a:ln>
-            <a:solidFill>
-              <a:srgbClr val="FF0000"/>
-            </a:solidFill>
-          </a:ln>
-        </p:spPr>
-        <p:style>
-          <a:lnRef idx="2">
-            <a:schemeClr val="accent1">
-              <a:shade val="50000"/>
-            </a:schemeClr>
-          </a:lnRef>
-          <a:fillRef idx="1">
-            <a:schemeClr val="accent1"/>
-          </a:fillRef>
-          <a:effectRef idx="0">
-            <a:schemeClr val="accent1"/>
-          </a:effectRef>
-          <a:fontRef idx="minor">
-            <a:schemeClr val="lt1"/>
-          </a:fontRef>
-        </p:style>
-        <p:txBody>
-          <a:bodyPr rtlCol="0" anchor="ctr"/>
-          <a:lstStyle/>
-          <a:p>
-            <a:pPr algn="ctr"/>
-            <a:endParaRPr lang="en-US"/>
-          </a:p>
-        </p:txBody>
-      </p:sp>
-      <p:cxnSp>
-        <p:nvCxnSpPr>
-          <p:cNvPr id="8" name="Straight Arrow Connector 7">
-            <a:extLst>
-              <a:ext uri="{FF2B5EF4-FFF2-40B4-BE49-F238E27FC236}">
-                <a16:creationId xmlns:a16="http://schemas.microsoft.com/office/drawing/2014/main" id="{BE5974BA-FA32-4113-BD49-7459B2C626B9}"/>
-              </a:ext>
-            </a:extLst>
-          </p:cNvPr>
-          <p:cNvCxnSpPr>
-            <a:cxnSpLocks/>
-          </p:cNvCxnSpPr>
-          <p:nvPr/>
-        </p:nvCxnSpPr>
-        <p:spPr>
-          <a:xfrm>
-            <a:off x="2743200" y="4599432"/>
-            <a:ext cx="483242" cy="630936"/>
-          </a:xfrm>
-          <a:prstGeom prst="straightConnector1">
-            <a:avLst/>
-          </a:prstGeom>
-          <a:ln w="38100">
-            <a:solidFill>
-              <a:srgbClr val="FF0000"/>
-            </a:solidFill>
-            <a:tailEnd type="triangle"/>
-          </a:ln>
-        </p:spPr>
-        <p:style>
-          <a:lnRef idx="1">
-            <a:schemeClr val="accent1"/>
-          </a:lnRef>
-          <a:fillRef idx="0">
-            <a:schemeClr val="accent1"/>
-          </a:fillRef>
-          <a:effectRef idx="0">
-            <a:schemeClr val="accent1"/>
-          </a:effectRef>
-          <a:fontRef idx="minor">
-            <a:schemeClr val="tx1"/>
-          </a:fontRef>
-        </p:style>
-      </p:cxnSp>
-      <p:sp>
-        <p:nvSpPr>
-          <p:cNvPr id="11" name="TextBox 10">
-            <a:extLst>
-              <a:ext uri="{FF2B5EF4-FFF2-40B4-BE49-F238E27FC236}">
-                <a16:creationId xmlns:a16="http://schemas.microsoft.com/office/drawing/2014/main" id="{D696B3B1-F16B-42D6-B2A2-CF8FF356012C}"/>
-              </a:ext>
-            </a:extLst>
-          </p:cNvPr>
-          <p:cNvSpPr txBox="1"/>
-          <p:nvPr/>
-        </p:nvSpPr>
-        <p:spPr>
-          <a:xfrm>
-            <a:off x="1185948" y="5336821"/>
-            <a:ext cx="3779244" cy="646331"/>
-          </a:xfrm>
-          <a:prstGeom prst="rect">
-            <a:avLst/>
-          </a:prstGeom>
-          <a:noFill/>
-        </p:spPr>
-        <p:txBody>
-          <a:bodyPr wrap="square" rtlCol="0">
-            <a:spAutoFit/>
-          </a:bodyPr>
-          <a:lstStyle/>
-          <a:p>
-            <a:r>
-              <a:rPr lang="en-US" dirty="0"/>
-              <a:t>Tells SAS that the first line of the data are variable names; the default is yes</a:t>
-            </a:r>
-          </a:p>
-        </p:txBody>
-      </p:sp>
-    </p:spTree>
-    <p:extLst>
-      <p:ext uri="{BB962C8B-B14F-4D97-AF65-F5344CB8AC3E}">
-        <p14:creationId xmlns:p14="http://schemas.microsoft.com/office/powerpoint/2010/main" val="1877044937"/>
-      </p:ext>
-    </p:extLst>
-  </p:cSld>
-  <p:clrMapOvr>
-    <a:masterClrMapping/>
-  </p:clrMapOvr>
-</p:sld>
-</file>
-
-<file path=ppt/slides/slide67.xml><?xml version="1.0" encoding="utf-8"?>
-<p:sld xmlns:a="http://schemas.openxmlformats.org/drawingml/2006/main" xmlns:r="http://schemas.openxmlformats.org/officeDocument/2006/relationships" xmlns:p="http://schemas.openxmlformats.org/presentationml/2006/main">
-  <p:cSld>
-    <p:spTree>
-      <p:nvGrpSpPr>
-        <p:cNvPr id="1" name=""/>
-        <p:cNvGrpSpPr/>
-        <p:nvPr/>
-      </p:nvGrpSpPr>
-      <p:grpSpPr>
-        <a:xfrm>
-          <a:off x="0" y="0"/>
-          <a:ext cx="0" cy="0"/>
-          <a:chOff x="0" y="0"/>
-          <a:chExt cx="0" cy="0"/>
-        </a:xfrm>
-      </p:grpSpPr>
-      <p:sp>
-        <p:nvSpPr>
-          <p:cNvPr id="2" name="Title 1">
-            <a:extLst>
-              <a:ext uri="{FF2B5EF4-FFF2-40B4-BE49-F238E27FC236}">
-                <a16:creationId xmlns:a16="http://schemas.microsoft.com/office/drawing/2014/main" id="{86F67F76-EEDB-443B-9641-90AB8F23C1EF}"/>
-              </a:ext>
-            </a:extLst>
-          </p:cNvPr>
-          <p:cNvSpPr>
-            <a:spLocks noGrp="1"/>
-          </p:cNvSpPr>
-          <p:nvPr>
-            <p:ph type="title"/>
-          </p:nvPr>
-        </p:nvSpPr>
-        <p:spPr>
-          <a:xfrm>
-            <a:off x="685800" y="228600"/>
-            <a:ext cx="10131425" cy="1456267"/>
-          </a:xfrm>
-        </p:spPr>
-        <p:txBody>
-          <a:bodyPr/>
-          <a:lstStyle/>
-          <a:p>
-            <a:r>
-              <a:rPr lang="en-US" dirty="0"/>
-              <a:t>Proc import Example (XLSX)</a:t>
-            </a:r>
-          </a:p>
-        </p:txBody>
-      </p:sp>
-      <p:sp>
-        <p:nvSpPr>
-          <p:cNvPr id="3" name="Content Placeholder 2">
-            <a:extLst>
-              <a:ext uri="{FF2B5EF4-FFF2-40B4-BE49-F238E27FC236}">
-                <a16:creationId xmlns:a16="http://schemas.microsoft.com/office/drawing/2014/main" id="{00F04248-F22F-411C-A1EF-396FFA366CE2}"/>
-              </a:ext>
-            </a:extLst>
-          </p:cNvPr>
-          <p:cNvSpPr>
-            <a:spLocks noGrp="1"/>
-          </p:cNvSpPr>
-          <p:nvPr>
-            <p:ph idx="1"/>
-          </p:nvPr>
-        </p:nvSpPr>
-        <p:spPr>
-          <a:xfrm>
-            <a:off x="685799" y="1812883"/>
-            <a:ext cx="10131425" cy="3649133"/>
-          </a:xfrm>
-        </p:spPr>
-        <p:txBody>
-          <a:bodyPr>
-            <a:normAutofit fontScale="92500" lnSpcReduction="10000"/>
-          </a:bodyPr>
-          <a:lstStyle/>
-          <a:p>
-            <a:pPr marL="0" indent="0">
-              <a:buNone/>
-            </a:pPr>
-            <a:r>
-              <a:rPr lang="en-US" dirty="0"/>
-              <a:t>PROC IMPORT DATAFILE = "/home/u59616451/STAT_7500/data1.xlsx" </a:t>
-            </a:r>
-          </a:p>
-          <a:p>
-            <a:pPr marL="0" indent="0">
-              <a:buNone/>
-            </a:pPr>
-            <a:r>
-              <a:rPr lang="en-US" dirty="0"/>
-              <a:t>     OUT = club </a:t>
-            </a:r>
-          </a:p>
-          <a:p>
-            <a:pPr marL="0" indent="0">
-              <a:buNone/>
-            </a:pPr>
-            <a:r>
-              <a:rPr lang="en-US" dirty="0"/>
-              <a:t>     DBMS= xlsx </a:t>
-            </a:r>
-          </a:p>
-          <a:p>
-            <a:pPr marL="0" indent="0">
-              <a:buNone/>
-            </a:pPr>
-            <a:r>
-              <a:rPr lang="en-US" dirty="0"/>
-              <a:t>     REPLACE;</a:t>
-            </a:r>
-          </a:p>
-          <a:p>
-            <a:pPr marL="0" indent="0">
-              <a:buNone/>
-            </a:pPr>
-            <a:r>
-              <a:rPr lang="en-US" dirty="0"/>
-              <a:t>     SHEET="SHEET1"; *not needed since only one sheet;</a:t>
-            </a:r>
-          </a:p>
-          <a:p>
-            <a:pPr marL="0" indent="0">
-              <a:buNone/>
-            </a:pPr>
-            <a:r>
-              <a:rPr lang="en-US" dirty="0"/>
-              <a:t>     GETNAMES=YES; </a:t>
-            </a:r>
-          </a:p>
-          <a:p>
-            <a:pPr marL="0" indent="0">
-              <a:buNone/>
-            </a:pPr>
-            <a:r>
-              <a:rPr lang="en-US" dirty="0"/>
-              <a:t>RUN;</a:t>
-            </a:r>
-          </a:p>
-          <a:p>
-            <a:pPr marL="0" indent="0">
-              <a:buNone/>
-            </a:pPr>
-            <a:endParaRPr lang="en-US" dirty="0"/>
-          </a:p>
-          <a:p>
-            <a:pPr marL="0" indent="0">
-              <a:buNone/>
-            </a:pPr>
-            <a:r>
-              <a:rPr lang="en-US" dirty="0"/>
-              <a:t>proc print data=club;</a:t>
-            </a:r>
-          </a:p>
-          <a:p>
-            <a:pPr marL="0" indent="0">
-              <a:buNone/>
-            </a:pPr>
-            <a:r>
-              <a:rPr lang="en-US" dirty="0"/>
-              <a:t>run;</a:t>
-            </a:r>
-          </a:p>
-        </p:txBody>
-      </p:sp>
-      <p:pic>
-        <p:nvPicPr>
-          <p:cNvPr id="5" name="Picture 4">
-            <a:extLst>
-              <a:ext uri="{FF2B5EF4-FFF2-40B4-BE49-F238E27FC236}">
-                <a16:creationId xmlns:a16="http://schemas.microsoft.com/office/drawing/2014/main" id="{DD8FF98E-793F-42D9-A992-1EC80009A442}"/>
-              </a:ext>
-            </a:extLst>
-          </p:cNvPr>
-          <p:cNvPicPr>
-            <a:picLocks noChangeAspect="1"/>
-          </p:cNvPicPr>
-          <p:nvPr/>
-        </p:nvPicPr>
-        <p:blipFill>
-          <a:blip r:embed="rId2"/>
-          <a:stretch>
-            <a:fillRect/>
-          </a:stretch>
-        </p:blipFill>
-        <p:spPr>
-          <a:xfrm>
-            <a:off x="6317367" y="4026881"/>
-            <a:ext cx="5188834" cy="2477551"/>
-          </a:xfrm>
-          <a:prstGeom prst="rect">
-            <a:avLst/>
-          </a:prstGeom>
-        </p:spPr>
-      </p:pic>
-    </p:spTree>
-    <p:extLst>
-      <p:ext uri="{BB962C8B-B14F-4D97-AF65-F5344CB8AC3E}">
-        <p14:creationId xmlns:p14="http://schemas.microsoft.com/office/powerpoint/2010/main" val="106555921"/>
-      </p:ext>
-    </p:extLst>
-  </p:cSld>
-  <p:clrMapOvr>
-    <a:masterClrMapping/>
-  </p:clrMapOvr>
-</p:sld>
-</file>
-
-<file path=ppt/slides/slide68.xml><?xml version="1.0" encoding="utf-8"?>
-<p:sld xmlns:a="http://schemas.openxmlformats.org/drawingml/2006/main" xmlns:r="http://schemas.openxmlformats.org/officeDocument/2006/relationships" xmlns:p="http://schemas.openxmlformats.org/presentationml/2006/main">
-  <p:cSld>
-    <p:spTree>
-      <p:nvGrpSpPr>
-        <p:cNvPr id="1" name=""/>
-        <p:cNvGrpSpPr/>
-        <p:nvPr/>
-      </p:nvGrpSpPr>
-      <p:grpSpPr>
-        <a:xfrm>
-          <a:off x="0" y="0"/>
-          <a:ext cx="0" cy="0"/>
-          <a:chOff x="0" y="0"/>
-          <a:chExt cx="0" cy="0"/>
-        </a:xfrm>
-      </p:grpSpPr>
-      <p:sp>
-        <p:nvSpPr>
-          <p:cNvPr id="2" name="Title 1">
-            <a:extLst>
-              <a:ext uri="{FF2B5EF4-FFF2-40B4-BE49-F238E27FC236}">
-                <a16:creationId xmlns:a16="http://schemas.microsoft.com/office/drawing/2014/main" id="{E0AC3147-A150-41D3-980F-1FE2613D7FBD}"/>
-              </a:ext>
-            </a:extLst>
-          </p:cNvPr>
-          <p:cNvSpPr>
-            <a:spLocks noGrp="1"/>
-          </p:cNvSpPr>
-          <p:nvPr>
-            <p:ph type="title"/>
-          </p:nvPr>
-        </p:nvSpPr>
-        <p:spPr/>
-        <p:txBody>
-          <a:bodyPr/>
-          <a:lstStyle/>
-          <a:p>
-            <a:r>
-              <a:rPr lang="en-US" dirty="0"/>
-              <a:t>Your Turn</a:t>
-            </a:r>
-          </a:p>
-        </p:txBody>
-      </p:sp>
-      <p:sp>
-        <p:nvSpPr>
-          <p:cNvPr id="3" name="Content Placeholder 2">
-            <a:extLst>
-              <a:ext uri="{FF2B5EF4-FFF2-40B4-BE49-F238E27FC236}">
-                <a16:creationId xmlns:a16="http://schemas.microsoft.com/office/drawing/2014/main" id="{3714CE9D-4AB1-49BE-828F-299C06C5FCB9}"/>
-              </a:ext>
-            </a:extLst>
-          </p:cNvPr>
-          <p:cNvSpPr>
-            <a:spLocks noGrp="1"/>
-          </p:cNvSpPr>
-          <p:nvPr>
-            <p:ph idx="1"/>
-          </p:nvPr>
-        </p:nvSpPr>
-        <p:spPr>
-          <a:xfrm>
-            <a:off x="685801" y="2142067"/>
-            <a:ext cx="10671047" cy="3649133"/>
-          </a:xfrm>
-        </p:spPr>
-        <p:txBody>
-          <a:bodyPr>
-            <a:normAutofit/>
-          </a:bodyPr>
-          <a:lstStyle/>
-          <a:p>
-            <a:pPr marL="342900" indent="-342900">
-              <a:buAutoNum type="arabicPeriod"/>
-            </a:pPr>
-            <a:r>
-              <a:rPr lang="en-US" sz="2500" dirty="0"/>
-              <a:t>Try on your own to upload the older excel data1 file (extension .</a:t>
-            </a:r>
-            <a:r>
-              <a:rPr lang="en-US" sz="2500" dirty="0" err="1"/>
-              <a:t>xls</a:t>
-            </a:r>
-            <a:r>
-              <a:rPr lang="en-US" sz="2500" dirty="0"/>
-              <a:t>)</a:t>
-            </a:r>
-          </a:p>
-          <a:p>
-            <a:pPr marL="342900" indent="-342900">
-              <a:buAutoNum type="arabicPeriod"/>
-            </a:pPr>
-            <a:endParaRPr lang="en-US" sz="2500" dirty="0"/>
-          </a:p>
-          <a:p>
-            <a:pPr marL="342900" indent="-342900">
-              <a:buAutoNum type="arabicPeriod"/>
-            </a:pPr>
-            <a:r>
-              <a:rPr lang="en-US" sz="2500" dirty="0"/>
-              <a:t>Verify that dropping the </a:t>
-            </a:r>
-            <a:r>
-              <a:rPr lang="en-US" sz="2500" dirty="0" err="1"/>
-              <a:t>getnames</a:t>
-            </a:r>
-            <a:r>
-              <a:rPr lang="en-US" sz="2500" dirty="0"/>
-              <a:t> statement does not affect the output</a:t>
-            </a:r>
-          </a:p>
-        </p:txBody>
-      </p:sp>
-    </p:spTree>
-    <p:extLst>
-      <p:ext uri="{BB962C8B-B14F-4D97-AF65-F5344CB8AC3E}">
-        <p14:creationId xmlns:p14="http://schemas.microsoft.com/office/powerpoint/2010/main" val="3506893750"/>
-      </p:ext>
-    </p:extLst>
-  </p:cSld>
-  <p:clrMapOvr>
-    <a:masterClrMapping/>
-  </p:clrMapOvr>
-</p:sld>
-</file>
-
-<file path=ppt/slides/slide69.xml><?xml version="1.0" encoding="utf-8"?>
-<p:sld xmlns:a="http://schemas.openxmlformats.org/drawingml/2006/main" xmlns:r="http://schemas.openxmlformats.org/officeDocument/2006/relationships" xmlns:p="http://schemas.openxmlformats.org/presentationml/2006/main">
-  <p:cSld>
-    <p:spTree>
-      <p:nvGrpSpPr>
-        <p:cNvPr id="1" name=""/>
-        <p:cNvGrpSpPr/>
-        <p:nvPr/>
-      </p:nvGrpSpPr>
-      <p:grpSpPr>
-        <a:xfrm>
-          <a:off x="0" y="0"/>
-          <a:ext cx="0" cy="0"/>
-          <a:chOff x="0" y="0"/>
-          <a:chExt cx="0" cy="0"/>
-        </a:xfrm>
-      </p:grpSpPr>
-      <p:sp>
-        <p:nvSpPr>
-          <p:cNvPr id="2" name="Title 1">
-            <a:extLst>
-              <a:ext uri="{FF2B5EF4-FFF2-40B4-BE49-F238E27FC236}">
-                <a16:creationId xmlns:a16="http://schemas.microsoft.com/office/drawing/2014/main" id="{F97D7E0D-CE79-4CAF-B9E4-C414A4EA0EA8}"/>
-              </a:ext>
-            </a:extLst>
-          </p:cNvPr>
-          <p:cNvSpPr>
-            <a:spLocks noGrp="1"/>
-          </p:cNvSpPr>
-          <p:nvPr>
-            <p:ph type="title"/>
-          </p:nvPr>
-        </p:nvSpPr>
-        <p:spPr/>
-        <p:txBody>
-          <a:bodyPr/>
-          <a:lstStyle/>
-          <a:p>
-            <a:r>
-              <a:rPr lang="en-US" dirty="0"/>
-              <a:t>Your Turn Code</a:t>
-            </a:r>
-          </a:p>
-        </p:txBody>
-      </p:sp>
-      <p:sp>
-        <p:nvSpPr>
-          <p:cNvPr id="3" name="Content Placeholder 2">
-            <a:extLst>
-              <a:ext uri="{FF2B5EF4-FFF2-40B4-BE49-F238E27FC236}">
-                <a16:creationId xmlns:a16="http://schemas.microsoft.com/office/drawing/2014/main" id="{4C29615D-FB77-4D3B-BBBA-A6FA7D647320}"/>
-              </a:ext>
-            </a:extLst>
-          </p:cNvPr>
-          <p:cNvSpPr>
-            <a:spLocks noGrp="1"/>
-          </p:cNvSpPr>
-          <p:nvPr>
-            <p:ph idx="1"/>
-          </p:nvPr>
-        </p:nvSpPr>
-        <p:spPr/>
-        <p:txBody>
-          <a:bodyPr>
-            <a:normAutofit/>
-          </a:bodyPr>
-          <a:lstStyle/>
-          <a:p>
-            <a:pPr marL="0" indent="0">
-              <a:buNone/>
-            </a:pPr>
-            <a:r>
-              <a:rPr lang="en-US" dirty="0"/>
-              <a:t>PROC IMPORT DATAFILE = "/home/u59616451/STAT_7500/data1.xls" </a:t>
-            </a:r>
-          </a:p>
-          <a:p>
-            <a:pPr marL="0" indent="0">
-              <a:buNone/>
-            </a:pPr>
-            <a:r>
-              <a:rPr lang="en-US" dirty="0"/>
-              <a:t>     OUT = club </a:t>
-            </a:r>
-          </a:p>
-          <a:p>
-            <a:pPr marL="0" indent="0">
-              <a:buNone/>
-            </a:pPr>
-            <a:r>
-              <a:rPr lang="en-US" dirty="0"/>
-              <a:t>     DBMS= </a:t>
-            </a:r>
-            <a:r>
-              <a:rPr lang="en-US" dirty="0" err="1"/>
-              <a:t>xls</a:t>
-            </a:r>
-            <a:endParaRPr lang="en-US" dirty="0"/>
-          </a:p>
-          <a:p>
-            <a:pPr marL="0" indent="0">
-              <a:buNone/>
-            </a:pPr>
-            <a:r>
-              <a:rPr lang="en-US" dirty="0"/>
-              <a:t>     REPLACE;</a:t>
-            </a:r>
-          </a:p>
-          <a:p>
-            <a:pPr marL="0" indent="0">
-              <a:buNone/>
-            </a:pPr>
-            <a:r>
-              <a:rPr lang="en-US" dirty="0"/>
-              <a:t>RUN;</a:t>
-            </a:r>
-          </a:p>
-          <a:p>
-            <a:pPr marL="0" indent="0">
-              <a:buNone/>
-            </a:pPr>
-            <a:endParaRPr lang="en-US" dirty="0"/>
-          </a:p>
-          <a:p>
-            <a:pPr marL="0" indent="0">
-              <a:buNone/>
-            </a:pPr>
-            <a:r>
-              <a:rPr lang="en-US" dirty="0"/>
-              <a:t>proc print data=club;</a:t>
-            </a:r>
-          </a:p>
-          <a:p>
-            <a:pPr marL="0" indent="0">
-              <a:buNone/>
-            </a:pPr>
-            <a:r>
-              <a:rPr lang="en-US" dirty="0"/>
-              <a:t>run;</a:t>
-            </a:r>
-          </a:p>
-        </p:txBody>
-      </p:sp>
-    </p:spTree>
-    <p:extLst>
-      <p:ext uri="{BB962C8B-B14F-4D97-AF65-F5344CB8AC3E}">
-        <p14:creationId xmlns:p14="http://schemas.microsoft.com/office/powerpoint/2010/main" val="1446279482"/>
-      </p:ext>
-    </p:extLst>
-  </p:cSld>
-  <p:clrMapOvr>
-    <a:masterClrMapping/>
-  </p:clrMapOvr>
-</p:sld>
-</file>
-
 <file path=ppt/slides/slide7.xml><?xml version="1.0" encoding="utf-8"?>
 <p:sld xmlns:a="http://schemas.openxmlformats.org/drawingml/2006/main" xmlns:r="http://schemas.openxmlformats.org/officeDocument/2006/relationships" xmlns:p="http://schemas.openxmlformats.org/presentationml/2006/main">
   <p:cSld>
@@ -41303,910 +37031,6 @@
     <p:extLst>
       <p:ext uri="{BB962C8B-B14F-4D97-AF65-F5344CB8AC3E}">
         <p14:creationId xmlns:p14="http://schemas.microsoft.com/office/powerpoint/2010/main" val="1758750220"/>
-      </p:ext>
-    </p:extLst>
-  </p:cSld>
-  <p:clrMapOvr>
-    <a:masterClrMapping/>
-  </p:clrMapOvr>
-</p:sld>
-</file>
-
-<file path=ppt/slides/slide70.xml><?xml version="1.0" encoding="utf-8"?>
-<p:sld xmlns:a="http://schemas.openxmlformats.org/drawingml/2006/main" xmlns:r="http://schemas.openxmlformats.org/officeDocument/2006/relationships" xmlns:p="http://schemas.openxmlformats.org/presentationml/2006/main">
-  <p:cSld>
-    <p:spTree>
-      <p:nvGrpSpPr>
-        <p:cNvPr id="1" name=""/>
-        <p:cNvGrpSpPr/>
-        <p:nvPr/>
-      </p:nvGrpSpPr>
-      <p:grpSpPr>
-        <a:xfrm>
-          <a:off x="0" y="0"/>
-          <a:ext cx="0" cy="0"/>
-          <a:chOff x="0" y="0"/>
-          <a:chExt cx="0" cy="0"/>
-        </a:xfrm>
-      </p:grpSpPr>
-      <p:sp>
-        <p:nvSpPr>
-          <p:cNvPr id="2" name="Title 1">
-            <a:extLst>
-              <a:ext uri="{FF2B5EF4-FFF2-40B4-BE49-F238E27FC236}">
-                <a16:creationId xmlns:a16="http://schemas.microsoft.com/office/drawing/2014/main" id="{988631CA-8901-4CB5-B7CE-6F3DE5D16DC5}"/>
-              </a:ext>
-            </a:extLst>
-          </p:cNvPr>
-          <p:cNvSpPr>
-            <a:spLocks noGrp="1"/>
-          </p:cNvSpPr>
-          <p:nvPr>
-            <p:ph type="title"/>
-          </p:nvPr>
-        </p:nvSpPr>
-        <p:spPr/>
-        <p:txBody>
-          <a:bodyPr/>
-          <a:lstStyle/>
-          <a:p>
-            <a:r>
-              <a:rPr lang="en-US" dirty="0"/>
-              <a:t>.txt files &amp; Delimiters	</a:t>
-            </a:r>
-          </a:p>
-        </p:txBody>
-      </p:sp>
-      <p:sp>
-        <p:nvSpPr>
-          <p:cNvPr id="3" name="Content Placeholder 2">
-            <a:extLst>
-              <a:ext uri="{FF2B5EF4-FFF2-40B4-BE49-F238E27FC236}">
-                <a16:creationId xmlns:a16="http://schemas.microsoft.com/office/drawing/2014/main" id="{5E082F13-90AA-4676-8142-2B41161C6B1E}"/>
-              </a:ext>
-            </a:extLst>
-          </p:cNvPr>
-          <p:cNvSpPr>
-            <a:spLocks noGrp="1"/>
-          </p:cNvSpPr>
-          <p:nvPr>
-            <p:ph idx="1"/>
-          </p:nvPr>
-        </p:nvSpPr>
-        <p:spPr/>
-        <p:txBody>
-          <a:bodyPr>
-            <a:normAutofit fontScale="77500" lnSpcReduction="20000"/>
-          </a:bodyPr>
-          <a:lstStyle/>
-          <a:p>
-            <a:pPr marL="0" indent="0">
-              <a:buNone/>
-            </a:pPr>
-            <a:r>
-              <a:rPr lang="en-US" sz="3000" dirty="0"/>
-              <a:t>When loading a “text” file, you need to specify </a:t>
-            </a:r>
-            <a:r>
-              <a:rPr lang="en-US" sz="3000" i="1" dirty="0" err="1"/>
-              <a:t>dmbs</a:t>
-            </a:r>
-            <a:r>
-              <a:rPr lang="en-US" sz="3000" i="1" dirty="0"/>
-              <a:t>=</a:t>
-            </a:r>
-            <a:r>
-              <a:rPr lang="en-US" sz="3000" i="1" dirty="0" err="1"/>
-              <a:t>dlm</a:t>
-            </a:r>
-            <a:r>
-              <a:rPr lang="en-US" sz="3000" i="1" dirty="0"/>
-              <a:t> </a:t>
-            </a:r>
-            <a:r>
-              <a:rPr lang="en-US" sz="3000" dirty="0"/>
-              <a:t>and </a:t>
-            </a:r>
-            <a:r>
-              <a:rPr lang="en-US" sz="3000" i="1" dirty="0"/>
-              <a:t>delimiter=&lt;delimiter&gt; </a:t>
-            </a:r>
-            <a:r>
-              <a:rPr lang="en-US" sz="3000" dirty="0"/>
-              <a:t>(many options for delimiter; for tab and space delimited files – the most common – use ‘</a:t>
-            </a:r>
-            <a:r>
-              <a:rPr lang="en-US" sz="3200" dirty="0"/>
-              <a:t>09’x and ‘20x’ respectively)</a:t>
-            </a:r>
-            <a:endParaRPr lang="en-US" sz="3000" i="1" dirty="0"/>
-          </a:p>
-          <a:p>
-            <a:pPr marL="0" indent="0">
-              <a:buNone/>
-            </a:pPr>
-            <a:endParaRPr lang="en-US" sz="3000" i="1" dirty="0"/>
-          </a:p>
-          <a:p>
-            <a:pPr marL="0" indent="0">
-              <a:buNone/>
-            </a:pPr>
-            <a:r>
-              <a:rPr lang="en-US" sz="3000" i="1" dirty="0"/>
-              <a:t> </a:t>
-            </a:r>
-            <a:r>
-              <a:rPr lang="en-US" sz="3000" u="sng" dirty="0"/>
-              <a:t>OR</a:t>
-            </a:r>
-          </a:p>
-          <a:p>
-            <a:pPr marL="0" indent="0">
-              <a:buNone/>
-            </a:pPr>
-            <a:endParaRPr lang="en-US" sz="3000" dirty="0"/>
-          </a:p>
-          <a:p>
-            <a:pPr marL="0" indent="0">
-              <a:buNone/>
-            </a:pPr>
-            <a:r>
-              <a:rPr lang="en-US" sz="3000" dirty="0"/>
-              <a:t> for tab delimited files, simply</a:t>
-            </a:r>
-            <a:r>
-              <a:rPr lang="en-US" sz="3000" i="1" dirty="0"/>
-              <a:t> </a:t>
-            </a:r>
-            <a:r>
-              <a:rPr lang="en-US" sz="3000" i="1" dirty="0" err="1"/>
-              <a:t>dmbs</a:t>
-            </a:r>
-            <a:r>
-              <a:rPr lang="en-US" sz="3000" i="1" dirty="0"/>
-              <a:t>=tab</a:t>
-            </a:r>
-          </a:p>
-          <a:p>
-            <a:pPr marL="0" indent="0">
-              <a:buNone/>
-            </a:pPr>
-            <a:endParaRPr lang="en-US" sz="3000" i="1" dirty="0"/>
-          </a:p>
-          <a:p>
-            <a:pPr marL="0" indent="0">
-              <a:buNone/>
-            </a:pPr>
-            <a:r>
-              <a:rPr lang="en-US" sz="3000" dirty="0"/>
-              <a:t>Here are some </a:t>
-            </a:r>
-            <a:r>
-              <a:rPr lang="en-US" sz="3000" dirty="0">
-                <a:hlinkClick r:id="rId2"/>
-              </a:rPr>
-              <a:t>examples</a:t>
-            </a:r>
-            <a:r>
-              <a:rPr lang="en-US" sz="3000" dirty="0"/>
-              <a:t> in SAS Documentation</a:t>
-            </a:r>
-          </a:p>
-        </p:txBody>
-      </p:sp>
-    </p:spTree>
-    <p:extLst>
-      <p:ext uri="{BB962C8B-B14F-4D97-AF65-F5344CB8AC3E}">
-        <p14:creationId xmlns:p14="http://schemas.microsoft.com/office/powerpoint/2010/main" val="2057441664"/>
-      </p:ext>
-    </p:extLst>
-  </p:cSld>
-  <p:clrMapOvr>
-    <a:masterClrMapping/>
-  </p:clrMapOvr>
-</p:sld>
-</file>
-
-<file path=ppt/slides/slide71.xml><?xml version="1.0" encoding="utf-8"?>
-<p:sld xmlns:a="http://schemas.openxmlformats.org/drawingml/2006/main" xmlns:r="http://schemas.openxmlformats.org/officeDocument/2006/relationships" xmlns:p="http://schemas.openxmlformats.org/presentationml/2006/main">
-  <p:cSld>
-    <p:spTree>
-      <p:nvGrpSpPr>
-        <p:cNvPr id="1" name=""/>
-        <p:cNvGrpSpPr/>
-        <p:nvPr/>
-      </p:nvGrpSpPr>
-      <p:grpSpPr>
-        <a:xfrm>
-          <a:off x="0" y="0"/>
-          <a:ext cx="0" cy="0"/>
-          <a:chOff x="0" y="0"/>
-          <a:chExt cx="0" cy="0"/>
-        </a:xfrm>
-      </p:grpSpPr>
-      <p:sp>
-        <p:nvSpPr>
-          <p:cNvPr id="2" name="Title 1">
-            <a:extLst>
-              <a:ext uri="{FF2B5EF4-FFF2-40B4-BE49-F238E27FC236}">
-                <a16:creationId xmlns:a16="http://schemas.microsoft.com/office/drawing/2014/main" id="{89518ADE-326D-41EB-8F74-D7715966734A}"/>
-              </a:ext>
-            </a:extLst>
-          </p:cNvPr>
-          <p:cNvSpPr>
-            <a:spLocks noGrp="1"/>
-          </p:cNvSpPr>
-          <p:nvPr>
-            <p:ph type="title"/>
-          </p:nvPr>
-        </p:nvSpPr>
-        <p:spPr>
-          <a:xfrm>
-            <a:off x="685801" y="116502"/>
-            <a:ext cx="10131425" cy="1456267"/>
-          </a:xfrm>
-        </p:spPr>
-        <p:txBody>
-          <a:bodyPr/>
-          <a:lstStyle/>
-          <a:p>
-            <a:r>
-              <a:rPr lang="en-US" dirty="0"/>
-              <a:t>With tab delimited files, two options:</a:t>
-            </a:r>
-          </a:p>
-        </p:txBody>
-      </p:sp>
-      <p:sp>
-        <p:nvSpPr>
-          <p:cNvPr id="3" name="Content Placeholder 2">
-            <a:extLst>
-              <a:ext uri="{FF2B5EF4-FFF2-40B4-BE49-F238E27FC236}">
-                <a16:creationId xmlns:a16="http://schemas.microsoft.com/office/drawing/2014/main" id="{54CB7D73-4D20-46BD-AB86-85BFA5E89B69}"/>
-              </a:ext>
-            </a:extLst>
-          </p:cNvPr>
-          <p:cNvSpPr>
-            <a:spLocks noGrp="1"/>
-          </p:cNvSpPr>
-          <p:nvPr>
-            <p:ph idx="1"/>
-          </p:nvPr>
-        </p:nvSpPr>
-        <p:spPr>
-          <a:xfrm>
-            <a:off x="685801" y="1572769"/>
-            <a:ext cx="10131425" cy="4892040"/>
-          </a:xfrm>
-        </p:spPr>
-        <p:txBody>
-          <a:bodyPr>
-            <a:normAutofit fontScale="92500" lnSpcReduction="20000"/>
-          </a:bodyPr>
-          <a:lstStyle/>
-          <a:p>
-            <a:pPr marL="0" indent="0">
-              <a:buNone/>
-            </a:pPr>
-            <a:r>
-              <a:rPr lang="en-US" dirty="0"/>
-              <a:t>/* Option 1 – space delimited file*/</a:t>
-            </a:r>
-          </a:p>
-          <a:p>
-            <a:pPr marL="0" indent="0">
-              <a:buNone/>
-            </a:pPr>
-            <a:r>
-              <a:rPr lang="en-US" dirty="0"/>
-              <a:t>PROC IMPORT  DATAFILE = "/home/u59616451/STAT_7500/data1.txt" </a:t>
-            </a:r>
-          </a:p>
-          <a:p>
-            <a:pPr marL="0" indent="0">
-              <a:buNone/>
-            </a:pPr>
-            <a:r>
-              <a:rPr lang="en-US" dirty="0"/>
-              <a:t>     OUT = club</a:t>
-            </a:r>
-          </a:p>
-          <a:p>
-            <a:pPr marL="0" indent="0">
-              <a:buNone/>
-            </a:pPr>
-            <a:r>
-              <a:rPr lang="en-US" dirty="0"/>
-              <a:t>     DBMS= </a:t>
-            </a:r>
-            <a:r>
-              <a:rPr lang="en-US" dirty="0" err="1"/>
-              <a:t>dlm</a:t>
-            </a:r>
-            <a:endParaRPr lang="en-US" dirty="0"/>
-          </a:p>
-          <a:p>
-            <a:pPr marL="0" indent="0">
-              <a:buNone/>
-            </a:pPr>
-            <a:r>
-              <a:rPr lang="en-US" dirty="0"/>
-              <a:t>     REPLACE;</a:t>
-            </a:r>
-          </a:p>
-          <a:p>
-            <a:pPr marL="0" indent="0">
-              <a:buNone/>
-            </a:pPr>
-            <a:r>
-              <a:rPr lang="en-US" dirty="0"/>
-              <a:t>     DELIMITER = '09'x;</a:t>
-            </a:r>
-          </a:p>
-          <a:p>
-            <a:pPr marL="0" indent="0">
-              <a:buNone/>
-            </a:pPr>
-            <a:r>
-              <a:rPr lang="en-US" dirty="0"/>
-              <a:t>RUN;</a:t>
-            </a:r>
-          </a:p>
-          <a:p>
-            <a:pPr marL="0" indent="0">
-              <a:buNone/>
-            </a:pPr>
-            <a:endParaRPr lang="en-US" dirty="0"/>
-          </a:p>
-          <a:p>
-            <a:pPr marL="0" indent="0">
-              <a:buNone/>
-            </a:pPr>
-            <a:r>
-              <a:rPr lang="en-US" dirty="0"/>
-              <a:t>/* Option 2 – tab delimited file*/</a:t>
-            </a:r>
-          </a:p>
-          <a:p>
-            <a:pPr marL="0" indent="0">
-              <a:buNone/>
-            </a:pPr>
-            <a:r>
-              <a:rPr lang="en-US" dirty="0"/>
-              <a:t>PROC IMPORT  DATAFILE = "/home/u59616451/STAT_7500/data1.txt" </a:t>
-            </a:r>
-          </a:p>
-          <a:p>
-            <a:pPr marL="0" indent="0">
-              <a:buNone/>
-            </a:pPr>
-            <a:r>
-              <a:rPr lang="en-US" dirty="0"/>
-              <a:t>     OUT = club</a:t>
-            </a:r>
-          </a:p>
-          <a:p>
-            <a:pPr marL="0" indent="0">
-              <a:buNone/>
-            </a:pPr>
-            <a:r>
-              <a:rPr lang="en-US" dirty="0"/>
-              <a:t>     DBMS= tab</a:t>
-            </a:r>
-          </a:p>
-          <a:p>
-            <a:pPr marL="0" indent="0">
-              <a:buNone/>
-            </a:pPr>
-            <a:r>
-              <a:rPr lang="en-US" dirty="0"/>
-              <a:t>     REPLACE;</a:t>
-            </a:r>
-          </a:p>
-          <a:p>
-            <a:pPr marL="0" indent="0">
-              <a:buNone/>
-            </a:pPr>
-            <a:r>
-              <a:rPr lang="en-US" dirty="0"/>
-              <a:t>RUN;</a:t>
-            </a:r>
-          </a:p>
-          <a:p>
-            <a:pPr marL="0" indent="0">
-              <a:buNone/>
-            </a:pPr>
-            <a:endParaRPr lang="en-US" dirty="0"/>
-          </a:p>
-        </p:txBody>
-      </p:sp>
-    </p:spTree>
-    <p:extLst>
-      <p:ext uri="{BB962C8B-B14F-4D97-AF65-F5344CB8AC3E}">
-        <p14:creationId xmlns:p14="http://schemas.microsoft.com/office/powerpoint/2010/main" val="190571764"/>
-      </p:ext>
-    </p:extLst>
-  </p:cSld>
-  <p:clrMapOvr>
-    <a:masterClrMapping/>
-  </p:clrMapOvr>
-</p:sld>
-</file>
-
-<file path=ppt/slides/slide72.xml><?xml version="1.0" encoding="utf-8"?>
-<p:sld xmlns:a="http://schemas.openxmlformats.org/drawingml/2006/main" xmlns:r="http://schemas.openxmlformats.org/officeDocument/2006/relationships" xmlns:p="http://schemas.openxmlformats.org/presentationml/2006/main">
-  <p:cSld>
-    <p:spTree>
-      <p:nvGrpSpPr>
-        <p:cNvPr id="1" name=""/>
-        <p:cNvGrpSpPr/>
-        <p:nvPr/>
-      </p:nvGrpSpPr>
-      <p:grpSpPr>
-        <a:xfrm>
-          <a:off x="0" y="0"/>
-          <a:ext cx="0" cy="0"/>
-          <a:chOff x="0" y="0"/>
-          <a:chExt cx="0" cy="0"/>
-        </a:xfrm>
-      </p:grpSpPr>
-      <p:sp>
-        <p:nvSpPr>
-          <p:cNvPr id="2" name="Title 1">
-            <a:extLst>
-              <a:ext uri="{FF2B5EF4-FFF2-40B4-BE49-F238E27FC236}">
-                <a16:creationId xmlns:a16="http://schemas.microsoft.com/office/drawing/2014/main" id="{2F3B68EA-F849-4BB5-AAD9-17C8807D89FA}"/>
-              </a:ext>
-            </a:extLst>
-          </p:cNvPr>
-          <p:cNvSpPr>
-            <a:spLocks noGrp="1"/>
-          </p:cNvSpPr>
-          <p:nvPr>
-            <p:ph type="title"/>
-          </p:nvPr>
-        </p:nvSpPr>
-        <p:spPr>
-          <a:xfrm>
-            <a:off x="685801" y="370671"/>
-            <a:ext cx="10131425" cy="1456267"/>
-          </a:xfrm>
-        </p:spPr>
-        <p:txBody>
-          <a:bodyPr/>
-          <a:lstStyle/>
-          <a:p>
-            <a:r>
-              <a:rPr lang="en-US" dirty="0"/>
-              <a:t>What can go Wrong…</a:t>
-            </a:r>
-          </a:p>
-        </p:txBody>
-      </p:sp>
-      <p:sp>
-        <p:nvSpPr>
-          <p:cNvPr id="3" name="Content Placeholder 2">
-            <a:extLst>
-              <a:ext uri="{FF2B5EF4-FFF2-40B4-BE49-F238E27FC236}">
-                <a16:creationId xmlns:a16="http://schemas.microsoft.com/office/drawing/2014/main" id="{506E5AA5-0D75-46A9-91E3-6CC82C3A11CC}"/>
-              </a:ext>
-            </a:extLst>
-          </p:cNvPr>
-          <p:cNvSpPr>
-            <a:spLocks noGrp="1"/>
-          </p:cNvSpPr>
-          <p:nvPr>
-            <p:ph idx="1"/>
-          </p:nvPr>
-        </p:nvSpPr>
-        <p:spPr>
-          <a:xfrm>
-            <a:off x="685801" y="2169499"/>
-            <a:ext cx="10131425" cy="3649133"/>
-          </a:xfrm>
-        </p:spPr>
-        <p:txBody>
-          <a:bodyPr>
-            <a:normAutofit lnSpcReduction="10000"/>
-          </a:bodyPr>
-          <a:lstStyle/>
-          <a:p>
-            <a:pPr marL="0" indent="0">
-              <a:buNone/>
-            </a:pPr>
-            <a:r>
-              <a:rPr lang="en-US" dirty="0"/>
-              <a:t>With the wrong delimiter or without one given…</a:t>
-            </a:r>
-          </a:p>
-          <a:p>
-            <a:pPr marL="0" indent="0">
-              <a:buNone/>
-            </a:pPr>
-            <a:r>
-              <a:rPr lang="en-US" dirty="0"/>
-              <a:t>PROC IMPORT  DATAFILE = "/home/u59616451/STAT_7500/data1.txt" </a:t>
-            </a:r>
-          </a:p>
-          <a:p>
-            <a:pPr marL="0" indent="0">
-              <a:buNone/>
-            </a:pPr>
-            <a:r>
-              <a:rPr lang="en-US" dirty="0"/>
-              <a:t>     OUT = club</a:t>
-            </a:r>
-          </a:p>
-          <a:p>
-            <a:pPr marL="0" indent="0">
-              <a:buNone/>
-            </a:pPr>
-            <a:r>
-              <a:rPr lang="en-US" dirty="0"/>
-              <a:t>     DBMS= </a:t>
-            </a:r>
-            <a:r>
-              <a:rPr lang="en-US" dirty="0" err="1"/>
-              <a:t>dlm</a:t>
-            </a:r>
-            <a:endParaRPr lang="en-US" dirty="0"/>
-          </a:p>
-          <a:p>
-            <a:pPr marL="0" indent="0">
-              <a:buNone/>
-            </a:pPr>
-            <a:r>
-              <a:rPr lang="en-US" dirty="0"/>
-              <a:t>     REPLACE; </a:t>
-            </a:r>
-          </a:p>
-          <a:p>
-            <a:pPr marL="0" indent="0">
-              <a:buNone/>
-            </a:pPr>
-            <a:r>
-              <a:rPr lang="en-US" dirty="0"/>
-              <a:t>RUN;</a:t>
-            </a:r>
-          </a:p>
-          <a:p>
-            <a:pPr marL="0" indent="0">
-              <a:buNone/>
-            </a:pPr>
-            <a:endParaRPr lang="en-US" dirty="0"/>
-          </a:p>
-          <a:p>
-            <a:pPr marL="0" indent="0">
-              <a:buNone/>
-            </a:pPr>
-            <a:r>
-              <a:rPr lang="en-US" dirty="0"/>
-              <a:t>proc print data=club;</a:t>
-            </a:r>
-          </a:p>
-          <a:p>
-            <a:pPr marL="0" indent="0">
-              <a:buNone/>
-            </a:pPr>
-            <a:r>
-              <a:rPr lang="en-US" dirty="0"/>
-              <a:t>run;</a:t>
-            </a:r>
-          </a:p>
-          <a:p>
-            <a:pPr marL="0" indent="0">
-              <a:buNone/>
-            </a:pPr>
-            <a:endParaRPr lang="en-US" dirty="0"/>
-          </a:p>
-          <a:p>
-            <a:pPr marL="0" indent="0">
-              <a:buNone/>
-            </a:pPr>
-            <a:endParaRPr lang="en-US" dirty="0"/>
-          </a:p>
-        </p:txBody>
-      </p:sp>
-      <p:pic>
-        <p:nvPicPr>
-          <p:cNvPr id="5" name="Picture 4">
-            <a:extLst>
-              <a:ext uri="{FF2B5EF4-FFF2-40B4-BE49-F238E27FC236}">
-                <a16:creationId xmlns:a16="http://schemas.microsoft.com/office/drawing/2014/main" id="{44B638B6-E21D-4ED8-987D-54F9486EC0A7}"/>
-              </a:ext>
-            </a:extLst>
-          </p:cNvPr>
-          <p:cNvPicPr>
-            <a:picLocks noChangeAspect="1"/>
-          </p:cNvPicPr>
-          <p:nvPr/>
-        </p:nvPicPr>
-        <p:blipFill>
-          <a:blip r:embed="rId2"/>
-          <a:stretch>
-            <a:fillRect/>
-          </a:stretch>
-        </p:blipFill>
-        <p:spPr>
-          <a:xfrm>
-            <a:off x="4181599" y="3236976"/>
-            <a:ext cx="6635628" cy="2915073"/>
-          </a:xfrm>
-          <a:prstGeom prst="rect">
-            <a:avLst/>
-          </a:prstGeom>
-        </p:spPr>
-      </p:pic>
-    </p:spTree>
-    <p:extLst>
-      <p:ext uri="{BB962C8B-B14F-4D97-AF65-F5344CB8AC3E}">
-        <p14:creationId xmlns:p14="http://schemas.microsoft.com/office/powerpoint/2010/main" val="3475638571"/>
-      </p:ext>
-    </p:extLst>
-  </p:cSld>
-  <p:clrMapOvr>
-    <a:masterClrMapping/>
-  </p:clrMapOvr>
-</p:sld>
-</file>
-
-<file path=ppt/slides/slide73.xml><?xml version="1.0" encoding="utf-8"?>
-<p:sld xmlns:a="http://schemas.openxmlformats.org/drawingml/2006/main" xmlns:r="http://schemas.openxmlformats.org/officeDocument/2006/relationships" xmlns:p="http://schemas.openxmlformats.org/presentationml/2006/main">
-  <p:cSld>
-    <p:spTree>
-      <p:nvGrpSpPr>
-        <p:cNvPr id="1" name=""/>
-        <p:cNvGrpSpPr/>
-        <p:nvPr/>
-      </p:nvGrpSpPr>
-      <p:grpSpPr>
-        <a:xfrm>
-          <a:off x="0" y="0"/>
-          <a:ext cx="0" cy="0"/>
-          <a:chOff x="0" y="0"/>
-          <a:chExt cx="0" cy="0"/>
-        </a:xfrm>
-      </p:grpSpPr>
-      <p:sp>
-        <p:nvSpPr>
-          <p:cNvPr id="2" name="Title 1">
-            <a:extLst>
-              <a:ext uri="{FF2B5EF4-FFF2-40B4-BE49-F238E27FC236}">
-                <a16:creationId xmlns:a16="http://schemas.microsoft.com/office/drawing/2014/main" id="{55E7B279-FD4F-49F7-8297-272A11ED4F6E}"/>
-              </a:ext>
-            </a:extLst>
-          </p:cNvPr>
-          <p:cNvSpPr>
-            <a:spLocks noGrp="1"/>
-          </p:cNvSpPr>
-          <p:nvPr>
-            <p:ph type="title"/>
-          </p:nvPr>
-        </p:nvSpPr>
-        <p:spPr/>
-        <p:txBody>
-          <a:bodyPr/>
-          <a:lstStyle/>
-          <a:p>
-            <a:r>
-              <a:rPr lang="en-US" dirty="0"/>
-              <a:t>Other Options for Importing Data</a:t>
-            </a:r>
-          </a:p>
-        </p:txBody>
-      </p:sp>
-      <p:sp>
-        <p:nvSpPr>
-          <p:cNvPr id="3" name="Content Placeholder 2">
-            <a:extLst>
-              <a:ext uri="{FF2B5EF4-FFF2-40B4-BE49-F238E27FC236}">
-                <a16:creationId xmlns:a16="http://schemas.microsoft.com/office/drawing/2014/main" id="{EA2BDD2E-4BC0-4CA5-AEA1-32B5FDD181D1}"/>
-              </a:ext>
-            </a:extLst>
-          </p:cNvPr>
-          <p:cNvSpPr>
-            <a:spLocks noGrp="1"/>
-          </p:cNvSpPr>
-          <p:nvPr>
-            <p:ph idx="1"/>
-          </p:nvPr>
-        </p:nvSpPr>
-        <p:spPr/>
-        <p:txBody>
-          <a:bodyPr/>
-          <a:lstStyle/>
-          <a:p>
-            <a:r>
-              <a:rPr lang="en-US" sz="2800" dirty="0"/>
-              <a:t>In PROC IMPORT, can specify the statement </a:t>
-            </a:r>
-            <a:r>
-              <a:rPr lang="en-US" sz="2800" i="1" dirty="0"/>
-              <a:t>DATAROW=&lt;number&gt;</a:t>
-            </a:r>
-            <a:r>
-              <a:rPr lang="en-US" sz="2800" dirty="0"/>
-              <a:t>, where for any integer number, the data will not be read in above this row</a:t>
-            </a:r>
-          </a:p>
-          <a:p>
-            <a:endParaRPr lang="en-US" sz="2800" dirty="0"/>
-          </a:p>
-          <a:p>
-            <a:r>
-              <a:rPr lang="en-US" sz="2800" dirty="0"/>
-              <a:t>INFILE can be used in the data step (and manipulations to the data done manually directly when importing)</a:t>
-            </a:r>
-          </a:p>
-          <a:p>
-            <a:endParaRPr lang="en-US" dirty="0"/>
-          </a:p>
-        </p:txBody>
-      </p:sp>
-    </p:spTree>
-    <p:extLst>
-      <p:ext uri="{BB962C8B-B14F-4D97-AF65-F5344CB8AC3E}">
-        <p14:creationId xmlns:p14="http://schemas.microsoft.com/office/powerpoint/2010/main" val="1686000079"/>
-      </p:ext>
-    </p:extLst>
-  </p:cSld>
-  <p:clrMapOvr>
-    <a:masterClrMapping/>
-  </p:clrMapOvr>
-</p:sld>
-</file>
-
-<file path=ppt/slides/slide74.xml><?xml version="1.0" encoding="utf-8"?>
-<p:sld xmlns:a="http://schemas.openxmlformats.org/drawingml/2006/main" xmlns:r="http://schemas.openxmlformats.org/officeDocument/2006/relationships" xmlns:p="http://schemas.openxmlformats.org/presentationml/2006/main">
-  <p:cSld>
-    <p:spTree>
-      <p:nvGrpSpPr>
-        <p:cNvPr id="1" name=""/>
-        <p:cNvGrpSpPr/>
-        <p:nvPr/>
-      </p:nvGrpSpPr>
-      <p:grpSpPr>
-        <a:xfrm>
-          <a:off x="0" y="0"/>
-          <a:ext cx="0" cy="0"/>
-          <a:chOff x="0" y="0"/>
-          <a:chExt cx="0" cy="0"/>
-        </a:xfrm>
-      </p:grpSpPr>
-      <p:sp>
-        <p:nvSpPr>
-          <p:cNvPr id="2" name="Title 1">
-            <a:extLst>
-              <a:ext uri="{FF2B5EF4-FFF2-40B4-BE49-F238E27FC236}">
-                <a16:creationId xmlns:a16="http://schemas.microsoft.com/office/drawing/2014/main" id="{9D94489C-C602-46B4-B41B-A431415F7D82}"/>
-              </a:ext>
-            </a:extLst>
-          </p:cNvPr>
-          <p:cNvSpPr>
-            <a:spLocks noGrp="1"/>
-          </p:cNvSpPr>
-          <p:nvPr>
-            <p:ph type="title"/>
-          </p:nvPr>
-        </p:nvSpPr>
-        <p:spPr>
-          <a:xfrm>
-            <a:off x="877825" y="554059"/>
-            <a:ext cx="10131425" cy="1456267"/>
-          </a:xfrm>
-        </p:spPr>
-        <p:txBody>
-          <a:bodyPr/>
-          <a:lstStyle/>
-          <a:p>
-            <a:r>
-              <a:rPr lang="en-US" dirty="0"/>
-              <a:t>Exporting Data to Excel Sheet</a:t>
-            </a:r>
-          </a:p>
-        </p:txBody>
-      </p:sp>
-      <p:sp>
-        <p:nvSpPr>
-          <p:cNvPr id="3" name="Content Placeholder 2">
-            <a:extLst>
-              <a:ext uri="{FF2B5EF4-FFF2-40B4-BE49-F238E27FC236}">
-                <a16:creationId xmlns:a16="http://schemas.microsoft.com/office/drawing/2014/main" id="{68D3B260-EE23-4160-8480-8CE650186339}"/>
-              </a:ext>
-            </a:extLst>
-          </p:cNvPr>
-          <p:cNvSpPr>
-            <a:spLocks noGrp="1"/>
-          </p:cNvSpPr>
-          <p:nvPr>
-            <p:ph idx="1"/>
-          </p:nvPr>
-        </p:nvSpPr>
-        <p:spPr>
-          <a:xfrm>
-            <a:off x="1182750" y="2010326"/>
-            <a:ext cx="10131425" cy="3649133"/>
-          </a:xfrm>
-        </p:spPr>
-        <p:txBody>
-          <a:bodyPr/>
-          <a:lstStyle/>
-          <a:p>
-            <a:pPr marL="0" indent="0">
-              <a:buNone/>
-            </a:pPr>
-            <a:r>
-              <a:rPr lang="en-US" dirty="0"/>
-              <a:t>PROC EXPORT</a:t>
-            </a:r>
-          </a:p>
-          <a:p>
-            <a:pPr marL="0" indent="0">
-              <a:buNone/>
-            </a:pPr>
-            <a:r>
-              <a:rPr lang="en-US" dirty="0"/>
-              <a:t>  data=club</a:t>
-            </a:r>
-          </a:p>
-          <a:p>
-            <a:pPr marL="0" indent="0">
-              <a:buNone/>
-            </a:pPr>
-            <a:r>
-              <a:rPr lang="en-US" dirty="0"/>
-              <a:t>  </a:t>
-            </a:r>
-            <a:r>
-              <a:rPr lang="en-US" dirty="0" err="1"/>
-              <a:t>dbms</a:t>
-            </a:r>
-            <a:r>
-              <a:rPr lang="en-US" dirty="0"/>
-              <a:t>=xlsx</a:t>
-            </a:r>
-          </a:p>
-          <a:p>
-            <a:pPr marL="0" indent="0">
-              <a:buNone/>
-            </a:pPr>
-            <a:r>
-              <a:rPr lang="en-US" dirty="0"/>
-              <a:t>  </a:t>
-            </a:r>
-            <a:r>
-              <a:rPr lang="en-US" dirty="0" err="1"/>
-              <a:t>outfile</a:t>
-            </a:r>
-            <a:r>
-              <a:rPr lang="en-US" dirty="0"/>
-              <a:t>="/home/u59616451/STAT_7500/data1export.xlsx"</a:t>
-            </a:r>
-          </a:p>
-          <a:p>
-            <a:pPr marL="0" indent="0">
-              <a:buNone/>
-            </a:pPr>
-            <a:r>
-              <a:rPr lang="en-US" dirty="0"/>
-              <a:t>  replace;</a:t>
-            </a:r>
-          </a:p>
-          <a:p>
-            <a:pPr marL="0" indent="0">
-              <a:buNone/>
-            </a:pPr>
-            <a:r>
-              <a:rPr lang="en-US" dirty="0"/>
-              <a:t>run;</a:t>
-            </a:r>
-          </a:p>
-        </p:txBody>
-      </p:sp>
-    </p:spTree>
-    <p:extLst>
-      <p:ext uri="{BB962C8B-B14F-4D97-AF65-F5344CB8AC3E}">
-        <p14:creationId xmlns:p14="http://schemas.microsoft.com/office/powerpoint/2010/main" val="3933304321"/>
       </p:ext>
     </p:extLst>
   </p:cSld>

--- a/assets/lecture_slides/SAS1_intro_to_sas.pptx
+++ b/assets/lecture_slides/SAS1_intro_to_sas.pptx
@@ -179,7 +179,7 @@
   <pc:docChgLst>
     <pc:chgData name="Kaitlyn Fitzgerald" userId="5f80a7dc-562f-4413-9d6e-37134f387a9f" providerId="ADAL" clId="{FC2319E2-36D7-52E6-A55A-33E60E1F0DB6}"/>
     <pc:docChg chg="undo custSel addSld delSld modSld sldOrd">
-      <pc:chgData name="Kaitlyn Fitzgerald" userId="5f80a7dc-562f-4413-9d6e-37134f387a9f" providerId="ADAL" clId="{FC2319E2-36D7-52E6-A55A-33E60E1F0DB6}" dt="2025-08-27T21:42:28.349" v="634" actId="2696"/>
+      <pc:chgData name="Kaitlyn Fitzgerald" userId="5f80a7dc-562f-4413-9d6e-37134f387a9f" providerId="ADAL" clId="{FC2319E2-36D7-52E6-A55A-33E60E1F0DB6}" dt="2025-08-27T23:45:13.626" v="641" actId="1076"/>
       <pc:docMkLst>
         <pc:docMk/>
       </pc:docMkLst>
@@ -877,7 +877,7 @@
         </pc:spChg>
       </pc:sldChg>
       <pc:sldChg chg="modSp add mod setBg">
-        <pc:chgData name="Kaitlyn Fitzgerald" userId="5f80a7dc-562f-4413-9d6e-37134f387a9f" providerId="ADAL" clId="{FC2319E2-36D7-52E6-A55A-33E60E1F0DB6}" dt="2025-08-26T20:57:21.450" v="474" actId="20577"/>
+        <pc:chgData name="Kaitlyn Fitzgerald" userId="5f80a7dc-562f-4413-9d6e-37134f387a9f" providerId="ADAL" clId="{FC2319E2-36D7-52E6-A55A-33E60E1F0DB6}" dt="2025-08-27T23:45:13.626" v="641" actId="1076"/>
         <pc:sldMkLst>
           <pc:docMk/>
           <pc:sldMk cId="1226426437" sldId="471"/>
@@ -896,6 +896,14 @@
             <pc:docMk/>
             <pc:sldMk cId="1226426437" sldId="471"/>
             <ac:spMk id="4" creationId="{2B1459A4-E3DA-027F-7D4A-FDC60D5580AC}"/>
+          </ac:spMkLst>
+        </pc:spChg>
+        <pc:spChg chg="mod">
+          <ac:chgData name="Kaitlyn Fitzgerald" userId="5f80a7dc-562f-4413-9d6e-37134f387a9f" providerId="ADAL" clId="{FC2319E2-36D7-52E6-A55A-33E60E1F0DB6}" dt="2025-08-27T23:45:13.626" v="641" actId="1076"/>
+          <ac:spMkLst>
+            <pc:docMk/>
+            <pc:sldMk cId="1226426437" sldId="471"/>
+            <ac:spMk id="5" creationId="{F0013077-7BC2-19BF-A234-DAF41A8D7DF3}"/>
           </ac:spMkLst>
         </pc:spChg>
       </pc:sldChg>
@@ -13089,8 +13097,8 @@
         </p:nvSpPr>
         <p:spPr>
           <a:xfrm>
-            <a:off x="2038352" y="1666496"/>
-            <a:ext cx="8215883" cy="4251959"/>
+            <a:off x="2050177" y="864042"/>
+            <a:ext cx="8215883" cy="6053593"/>
           </a:xfrm>
           <a:prstGeom prst="rect">
             <a:avLst/>
@@ -13098,7 +13106,7 @@
         </p:spPr>
         <p:txBody>
           <a:bodyPr vert="horz" lIns="91440" tIns="45720" rIns="91440" bIns="45720" rtlCol="0" anchor="ctr">
-            <a:normAutofit fontScale="77500" lnSpcReduction="20000"/>
+            <a:normAutofit fontScale="85000" lnSpcReduction="20000"/>
           </a:bodyPr>
           <a:lstStyle>
             <a:lvl1pPr marL="285750" indent="-285750" algn="l" defTabSz="457200" rtl="0" eaLnBrk="1" latinLnBrk="0" hangingPunct="1">
@@ -13439,7 +13447,7 @@
               <a:buAutoNum type="arabicPeriod"/>
             </a:pPr>
             <a:r>
-              <a:rPr lang="en-US" sz="1725" cap="none" dirty="0"/>
+              <a:rPr lang="en-US" sz="2100" cap="none" dirty="0"/>
               <a:t>Type out the following in your program and make sure everything runs:</a:t>
             </a:r>
           </a:p>
@@ -13447,7 +13455,7 @@
             <a:pPr marL="0" indent="0">
               <a:buNone/>
             </a:pPr>
-            <a:endParaRPr lang="en-US" sz="1350" b="1" cap="none" dirty="0">
+            <a:endParaRPr lang="en-US" sz="2100" b="1" cap="none" dirty="0">
               <a:latin typeface="Courier New" panose="02070309020205020404" pitchFamily="49" charset="0"/>
             </a:endParaRPr>
           </a:p>
@@ -13456,13 +13464,13 @@
               <a:buNone/>
             </a:pPr>
             <a:r>
-              <a:rPr lang="en-US" sz="1350" b="1" cap="none" dirty="0">
+              <a:rPr lang="en-US" sz="2100" b="1" cap="none" dirty="0">
                 <a:latin typeface="Courier New" panose="02070309020205020404" pitchFamily="49" charset="0"/>
               </a:rPr>
               <a:t>data</a:t>
             </a:r>
             <a:r>
-              <a:rPr lang="en-US" sz="1350" cap="none" dirty="0">
+              <a:rPr lang="en-US" sz="2100" cap="none" dirty="0">
                 <a:latin typeface="Courier New" panose="02070309020205020404" pitchFamily="49" charset="0"/>
               </a:rPr>
               <a:t> welcome;</a:t>
@@ -13473,19 +13481,19 @@
               <a:buNone/>
             </a:pPr>
             <a:r>
-              <a:rPr lang="en-US" sz="1350" cap="none" dirty="0">
+              <a:rPr lang="en-US" sz="2100" cap="none" dirty="0">
                 <a:latin typeface="Courier New" panose="02070309020205020404" pitchFamily="49" charset="0"/>
               </a:rPr>
               <a:t>  input prof $ </a:t>
             </a:r>
             <a:r>
-              <a:rPr lang="en-US" sz="1350" cap="none" dirty="0" err="1">
+              <a:rPr lang="en-US" sz="2100" cap="none" dirty="0" err="1">
                 <a:latin typeface="Courier New" panose="02070309020205020404" pitchFamily="49" charset="0"/>
               </a:rPr>
               <a:t>bestever</a:t>
             </a:r>
             <a:r>
-              <a:rPr lang="en-US" sz="1350" cap="none" dirty="0">
+              <a:rPr lang="en-US" sz="2100" cap="none" dirty="0">
                 <a:latin typeface="Courier New" panose="02070309020205020404" pitchFamily="49" charset="0"/>
               </a:rPr>
               <a:t> $;</a:t>
@@ -13496,7 +13504,7 @@
               <a:buNone/>
             </a:pPr>
             <a:r>
-              <a:rPr lang="en-US" sz="1350" cap="none" dirty="0">
+              <a:rPr lang="en-US" sz="2100" cap="none" dirty="0">
                 <a:latin typeface="Courier New" panose="02070309020205020404" pitchFamily="49" charset="0"/>
               </a:rPr>
               <a:t>  cards;</a:t>
@@ -13507,7 +13515,7 @@
               <a:buNone/>
             </a:pPr>
             <a:r>
-              <a:rPr lang="en-US" cap="none" dirty="0">
+              <a:rPr lang="en-US" sz="2100" cap="none" dirty="0">
                 <a:latin typeface="Courier New" panose="02070309020205020404" pitchFamily="49" charset="0"/>
               </a:rPr>
               <a:t>  Fitzgerald yes</a:t>
@@ -13518,7 +13526,7 @@
               <a:buNone/>
             </a:pPr>
             <a:r>
-              <a:rPr lang="en-US" sz="1350" cap="none" dirty="0">
+              <a:rPr lang="en-US" sz="2100" cap="none" dirty="0">
                 <a:latin typeface="Courier New" panose="02070309020205020404" pitchFamily="49" charset="0"/>
               </a:rPr>
               <a:t>  Plum	no</a:t>
@@ -13529,30 +13537,30 @@
               <a:buNone/>
             </a:pPr>
             <a:r>
-              <a:rPr lang="en-US" sz="1350" cap="none" dirty="0">
+              <a:rPr lang="en-US" sz="2100" cap="none" dirty="0">
                 <a:latin typeface="Courier New" panose="02070309020205020404" pitchFamily="49" charset="0"/>
               </a:rPr>
               <a:t>  </a:t>
             </a:r>
             <a:r>
-              <a:rPr lang="en-US" sz="1350" cap="none" dirty="0" err="1">
+              <a:rPr lang="en-US" sz="2100" cap="none" dirty="0" err="1">
                 <a:latin typeface="Courier New" panose="02070309020205020404" pitchFamily="49" charset="0"/>
               </a:rPr>
               <a:t>Everyoneelse</a:t>
             </a:r>
             <a:r>
-              <a:rPr lang="en-US" sz="1350" cap="none" dirty="0">
+              <a:rPr lang="en-US" sz="2100" cap="none" dirty="0">
                 <a:latin typeface="Courier New" panose="02070309020205020404" pitchFamily="49" charset="0"/>
               </a:rPr>
               <a:t> </a:t>
             </a:r>
             <a:r>
-              <a:rPr lang="en-US" sz="1350" cap="none" dirty="0" err="1">
+              <a:rPr lang="en-US" sz="2100" cap="none" dirty="0" err="1">
                 <a:latin typeface="Courier New" panose="02070309020205020404" pitchFamily="49" charset="0"/>
               </a:rPr>
               <a:t>alsono</a:t>
             </a:r>
-            <a:endParaRPr lang="en-US" sz="1350" cap="none" dirty="0">
+            <a:endParaRPr lang="en-US" sz="2100" cap="none" dirty="0">
               <a:latin typeface="Courier New" panose="02070309020205020404" pitchFamily="49" charset="0"/>
             </a:endParaRPr>
           </a:p>
@@ -13561,7 +13569,7 @@
               <a:buNone/>
             </a:pPr>
             <a:r>
-              <a:rPr lang="en-US" sz="1350" cap="none" dirty="0">
+              <a:rPr lang="en-US" sz="2100" cap="none" dirty="0">
                 <a:latin typeface="Courier New" panose="02070309020205020404" pitchFamily="49" charset="0"/>
               </a:rPr>
               <a:t>  ;</a:t>
@@ -13572,13 +13580,13 @@
               <a:buNone/>
             </a:pPr>
             <a:r>
-              <a:rPr lang="en-US" sz="1350" b="1" cap="none" dirty="0">
+              <a:rPr lang="en-US" sz="2100" b="1" cap="none" dirty="0">
                 <a:latin typeface="Courier New" panose="02070309020205020404" pitchFamily="49" charset="0"/>
               </a:rPr>
               <a:t>run</a:t>
             </a:r>
             <a:r>
-              <a:rPr lang="en-US" sz="1350" cap="none" dirty="0">
+              <a:rPr lang="en-US" sz="2100" cap="none" dirty="0">
                 <a:latin typeface="Courier New" panose="02070309020205020404" pitchFamily="49" charset="0"/>
               </a:rPr>
               <a:t>;</a:t>
@@ -13588,7 +13596,7 @@
             <a:pPr marL="0" indent="0">
               <a:buNone/>
             </a:pPr>
-            <a:endParaRPr lang="en-US" sz="1350" cap="none" dirty="0">
+            <a:endParaRPr lang="en-US" sz="2100" cap="none" dirty="0">
               <a:latin typeface="Courier New" panose="02070309020205020404" pitchFamily="49" charset="0"/>
             </a:endParaRPr>
           </a:p>
@@ -13597,25 +13605,25 @@
               <a:buNone/>
             </a:pPr>
             <a:r>
-              <a:rPr lang="en-US" sz="1350" b="1" cap="none" dirty="0">
+              <a:rPr lang="en-US" sz="2100" b="1" cap="none" dirty="0">
                 <a:latin typeface="Courier New" panose="02070309020205020404" pitchFamily="49" charset="0"/>
               </a:rPr>
               <a:t>proc</a:t>
             </a:r>
             <a:r>
-              <a:rPr lang="en-US" sz="1350" cap="none" dirty="0">
+              <a:rPr lang="en-US" sz="2100" cap="none" dirty="0">
                 <a:latin typeface="Courier New" panose="02070309020205020404" pitchFamily="49" charset="0"/>
               </a:rPr>
               <a:t> </a:t>
             </a:r>
             <a:r>
-              <a:rPr lang="en-US" sz="1350" b="1" cap="none" dirty="0">
+              <a:rPr lang="en-US" sz="2100" b="1" cap="none" dirty="0">
                 <a:latin typeface="Courier New" panose="02070309020205020404" pitchFamily="49" charset="0"/>
               </a:rPr>
               <a:t>print</a:t>
             </a:r>
             <a:r>
-              <a:rPr lang="en-US" sz="1350" cap="none" dirty="0">
+              <a:rPr lang="en-US" sz="2100" cap="none" dirty="0">
                 <a:latin typeface="Courier New" panose="02070309020205020404" pitchFamily="49" charset="0"/>
               </a:rPr>
               <a:t> data=welcome;</a:t>
@@ -13626,7 +13634,7 @@
               <a:buNone/>
             </a:pPr>
             <a:r>
-              <a:rPr lang="en-US" sz="1350" cap="none" dirty="0">
+              <a:rPr lang="en-US" sz="2100" cap="none" dirty="0">
                 <a:latin typeface="Courier New" panose="02070309020205020404" pitchFamily="49" charset="0"/>
               </a:rPr>
               <a:t>  title “Who is the best Professor ever?”;</a:t>
@@ -13637,31 +13645,31 @@
               <a:buNone/>
             </a:pPr>
             <a:r>
-              <a:rPr lang="en-US" sz="1350" b="1" cap="none" dirty="0">
+              <a:rPr lang="en-US" sz="2100" b="1" cap="none" dirty="0">
                 <a:latin typeface="Courier New" panose="02070309020205020404" pitchFamily="49" charset="0"/>
               </a:rPr>
               <a:t>run</a:t>
             </a:r>
             <a:r>
-              <a:rPr lang="en-US" sz="1350" cap="none" dirty="0">
+              <a:rPr lang="en-US" sz="2100" cap="none" dirty="0">
                 <a:latin typeface="Courier New" panose="02070309020205020404" pitchFamily="49" charset="0"/>
               </a:rPr>
               <a:t>;</a:t>
             </a:r>
-            <a:endParaRPr lang="en-US" sz="1350" cap="none" dirty="0"/>
-          </a:p>
-          <a:p>
-            <a:pPr marL="0" indent="0">
-              <a:buNone/>
-            </a:pPr>
-            <a:endParaRPr lang="en-US" cap="none" dirty="0"/>
-          </a:p>
-          <a:p>
-            <a:pPr marL="0" indent="0">
-              <a:buNone/>
-            </a:pPr>
-            <a:r>
-              <a:rPr lang="en-US" sz="1725" cap="none" dirty="0"/>
+            <a:endParaRPr lang="en-US" sz="2100" cap="none" dirty="0"/>
+          </a:p>
+          <a:p>
+            <a:pPr marL="0" indent="0">
+              <a:buNone/>
+            </a:pPr>
+            <a:endParaRPr lang="en-US" sz="2100" cap="none" dirty="0"/>
+          </a:p>
+          <a:p>
+            <a:pPr marL="0" indent="0">
+              <a:buNone/>
+            </a:pPr>
+            <a:r>
+              <a:rPr lang="en-US" sz="2100" cap="none" dirty="0"/>
               <a:t>2.  Check the log, the output data that is included, and the results</a:t>
             </a:r>
           </a:p>
